--- a/GEOAI_SIH2026_Presentation.pptx
+++ b/GEOAI_SIH2026_Presentation.pptx
@@ -3144,8 +3144,8 @@
         </p:nvSpPr>
         <p:spPr>
           <a:xfrm>
-            <a:off x="594360" y="292608"/>
-            <a:ext cx="11002975" cy="27432"/>
+            <a:off x="594360" y="256032"/>
+            <a:ext cx="11002975" cy="22860"/>
           </a:xfrm>
           <a:prstGeom prst="rect">
             <a:avLst/>
@@ -3187,8 +3187,8 @@
         </p:nvSpPr>
         <p:spPr>
           <a:xfrm>
-            <a:off x="594360" y="347472"/>
-            <a:ext cx="7772400" cy="274320"/>
+            <a:off x="594360" y="301752"/>
+            <a:ext cx="7772400" cy="256032"/>
           </a:xfrm>
           <a:prstGeom prst="rect">
             <a:avLst/>
@@ -3202,7 +3202,7 @@
           <a:lstStyle/>
           <a:p>
             <a:pPr>
-              <a:defRPr sz="850" b="1">
+              <a:defRPr sz="800" b="1">
                 <a:solidFill>
                   <a:srgbClr val="C5A869"/>
                 </a:solidFill>
@@ -3210,7 +3210,7 @@
               </a:defRPr>
             </a:pPr>
             <a:r>
-              <a:t>SMART INDIA HACKATHON 2026 · PS: SIH26227 · THEME: SPACE TECHNOLOGY · MINISTRY OF DEFENCE (MOD) / INDIAN ARMY — DGIS</a:t>
+              <a:t>SMART INDIA HACKATHON 2026 · PS: SIH26227 · SPACE TECHNOLOGY · SOFTWARE · MINISTRY OF DEFENCE / INDIAN ARMY — DGIS</a:t>
             </a:r>
           </a:p>
         </p:txBody>
@@ -3223,8 +3223,8 @@
         </p:nvSpPr>
         <p:spPr>
           <a:xfrm>
-            <a:off x="8412480" y="347472"/>
-            <a:ext cx="3182112" cy="274320"/>
+            <a:off x="8412480" y="301752"/>
+            <a:ext cx="3182112" cy="256032"/>
           </a:xfrm>
           <a:prstGeom prst="rect">
             <a:avLst/>
@@ -3239,16 +3239,16 @@
           <a:p>
             <a:pPr algn="r"/>
             <a:r>
-              <a:rPr sz="850">
+              <a:rPr sz="800">
                 <a:solidFill>
                   <a:srgbClr val="94A3B8"/>
                 </a:solidFill>
                 <a:latin typeface="Consolas"/>
               </a:rPr>
-              <a:t>TEAM: Quantumcrew | </a:t>
-            </a:r>
-            <a:r>
-              <a:rPr sz="850" b="1">
+              <a:t>TEAM: Quantumcrew  |  </a:t>
+            </a:r>
+            <a:r>
+              <a:rPr sz="800" b="1">
                 <a:solidFill>
                   <a:srgbClr val="4EA8DE"/>
                 </a:solidFill>
@@ -3267,8 +3267,8 @@
         </p:nvSpPr>
         <p:spPr>
           <a:xfrm>
-            <a:off x="594360" y="594360"/>
-            <a:ext cx="11002975" cy="594360"/>
+            <a:off x="594360" y="548640"/>
+            <a:ext cx="11002975" cy="566928"/>
           </a:xfrm>
           <a:prstGeom prst="rect">
             <a:avLst/>
@@ -3282,7 +3282,7 @@
           <a:lstStyle/>
           <a:p>
             <a:pPr>
-              <a:defRPr sz="1750" b="1">
+              <a:defRPr sz="1650" b="1">
                 <a:solidFill>
                   <a:srgbClr val="F5F3ED"/>
                 </a:solidFill>
@@ -3290,12 +3290,12 @@
               </a:defRPr>
             </a:pPr>
             <a:r>
-              <a:t>SATELLITE ARCHIVES ARE SEARCHABLE. INTELLIGENCE ISN'T.</a:t>
+              <a:t>01 — PROBLEM STATEMENT</a:t>
             </a:r>
           </a:p>
           <a:p>
             <a:pPr>
-              <a:defRPr sz="1000">
+              <a:defRPr sz="950">
                 <a:solidFill>
                   <a:srgbClr val="94A3B8"/>
                 </a:solidFill>
@@ -3303,7 +3303,7 @@
               </a:defRPr>
             </a:pPr>
             <a:r>
-              <a:t>SIH26227 — Semantic Retrieval and Multi-Temporal Change Analysis of Satellite Imagery</a:t>
+              <a:t>SEMANTIC RETRIEVAL AND MULTI-TEMPORAL CHANGE ANALYSIS OF SATELLITE IMAGERY</a:t>
             </a:r>
           </a:p>
         </p:txBody>
@@ -3316,8 +3316,8 @@
         </p:nvSpPr>
         <p:spPr>
           <a:xfrm>
-            <a:off x="594360" y="6537960"/>
-            <a:ext cx="11002975" cy="228600"/>
+            <a:off x="594360" y="6565392"/>
+            <a:ext cx="11002975" cy="201168"/>
           </a:xfrm>
           <a:prstGeom prst="rect">
             <a:avLst/>
@@ -3331,25 +3331,25 @@
           <a:lstStyle/>
           <a:p>
             <a:r>
-              <a:rPr sz="800">
+              <a:rPr sz="780">
                 <a:solidFill>
                   <a:srgbClr val="64748B"/>
                 </a:solidFill>
                 <a:latin typeface="Segoe UI"/>
               </a:rPr>
-              <a:t>GEOAI — Evidence-Based Satellite Investigation Workstation  |  Ministry of Defence (MoD) / Indian Army — DGIS  |  SIH 2026 Submission</a:t>
-            </a:r>
-            <a:r>
-              <a:rPr sz="800">
+              <a:t>TERRAE — Earth Intelligence Satellite Investigation Console  |  Ministry of Defence / Indian Army — DGIS  |  SIH 2026 Submission</a:t>
+            </a:r>
+            <a:r>
+              <a:rPr sz="780">
                 <a:solidFill>
                   <a:srgbClr val="64748B"/>
                 </a:solidFill>
                 <a:latin typeface="Segoe UI"/>
               </a:rPr>
-              <a:t>                                                                    Live Console: </a:t>
-            </a:r>
-            <a:r>
-              <a:rPr sz="800">
+              <a:t>                                                         Live Console: </a:t>
+            </a:r>
+            <a:r>
+              <a:rPr sz="780">
                 <a:solidFill>
                   <a:srgbClr val="4EA8DE"/>
                 </a:solidFill>
@@ -3369,8 +3369,8 @@
         </p:nvSpPr>
         <p:spPr>
           <a:xfrm>
-            <a:off x="594360" y="1234440"/>
-            <a:ext cx="11002975" cy="502920"/>
+            <a:off x="594360" y="1188720"/>
+            <a:ext cx="11002975" cy="457200"/>
           </a:xfrm>
           <a:prstGeom prst="roundRect">
             <a:avLst/>
@@ -3414,7 +3414,7 @@
         </p:nvSpPr>
         <p:spPr>
           <a:xfrm>
-            <a:off x="731520" y="1298448"/>
+            <a:off x="731520" y="1234440"/>
             <a:ext cx="10728655" cy="365760"/>
           </a:xfrm>
           <a:prstGeom prst="rect">
@@ -3430,7 +3430,7 @@
           <a:p>
             <a:pPr algn="ctr"/>
             <a:r>
-              <a:rPr sz="1300" b="1">
+              <a:rPr sz="1250" b="1">
                 <a:solidFill>
                   <a:srgbClr val="C5A869"/>
                 </a:solidFill>
@@ -3449,8 +3449,8 @@
         </p:nvSpPr>
         <p:spPr>
           <a:xfrm>
-            <a:off x="594360" y="1828800"/>
-            <a:ext cx="3291840" cy="3977639"/>
+            <a:off x="594360" y="1737360"/>
+            <a:ext cx="3291840" cy="4114800"/>
           </a:xfrm>
           <a:prstGeom prst="roundRect">
             <a:avLst/>
@@ -3494,8 +3494,8 @@
         </p:nvSpPr>
         <p:spPr>
           <a:xfrm>
-            <a:off x="731520" y="1965960"/>
-            <a:ext cx="3017520" cy="3703320"/>
+            <a:off x="731520" y="1828800"/>
+            <a:ext cx="3017520" cy="3931920"/>
           </a:xfrm>
           <a:prstGeom prst="rect">
             <a:avLst/>
@@ -3509,7 +3509,7 @@
           <a:lstStyle/>
           <a:p>
             <a:pPr>
-              <a:defRPr sz="1000" b="1">
+              <a:defRPr sz="900" b="1">
                 <a:solidFill>
                   <a:srgbClr val="E09F3E"/>
                 </a:solidFill>
@@ -3517,7 +3517,7 @@
               </a:defRPr>
             </a:pPr>
             <a:r>
-              <a:t>TRADITIONAL WORKFLOW (STATUS QUO)</a:t>
+              <a:t>CURRENT ANALYST WORKFLOW (STATUS QUO)</a:t>
             </a:r>
           </a:p>
           <a:p>
@@ -3527,7 +3527,7 @@
               </a:spcBef>
             </a:pPr>
             <a:r>
-              <a:rPr sz="850" b="1">
+              <a:rPr sz="800" b="1">
                 <a:solidFill>
                   <a:srgbClr val="F5F3ED"/>
                 </a:solidFill>
@@ -3537,13 +3537,13 @@
 </a:t>
             </a:r>
             <a:r>
-              <a:rPr sz="800">
+              <a:rPr sz="750">
                 <a:solidFill>
                   <a:srgbClr val="94A3B8"/>
                 </a:solidFill>
                 <a:latin typeface="Segoe UI"/>
               </a:rPr>
-              <a:t>  Filter by sensor catalog, timestamps &amp; cloud %</a:t>
+              <a:t>  Filter sensor catalogs, timestamps, and cloud cover.</a:t>
             </a:r>
           </a:p>
           <a:p>
@@ -3553,23 +3553,23 @@
               </a:spcBef>
             </a:pPr>
             <a:r>
-              <a:rPr sz="850" b="1">
+              <a:rPr sz="800" b="1">
                 <a:solidFill>
                   <a:srgbClr val="F5F3ED"/>
                 </a:solidFill>
                 <a:latin typeface="Segoe UI"/>
               </a:rPr>
-              <a:t>02 / COORDINATE BOUNDING
+              <a:t>02 / COORDINATES
 </a:t>
             </a:r>
             <a:r>
-              <a:rPr sz="800">
+              <a:rPr sz="750">
                 <a:solidFill>
                   <a:srgbClr val="94A3B8"/>
                 </a:solidFill>
                 <a:latin typeface="Segoe UI"/>
               </a:rPr>
-              <a:t>  Manual bounding-box geographic guesswork</a:t>
+              <a:t>  Manual geographic bounding-box guesswork.</a:t>
             </a:r>
           </a:p>
           <a:p>
@@ -3579,23 +3579,23 @@
               </a:spcBef>
             </a:pPr>
             <a:r>
-              <a:rPr sz="850" b="1">
+              <a:rPr sz="800" b="1">
                 <a:solidFill>
                   <a:srgbClr val="F5F3ED"/>
                 </a:solidFill>
                 <a:latin typeface="Segoe UI"/>
               </a:rPr>
-              <a:t>03 / SCENE TRIAGE
+              <a:t>03 / SCENE SEARCH
 </a:t>
             </a:r>
             <a:r>
-              <a:rPr sz="800">
+              <a:rPr sz="750">
                 <a:solidFill>
                   <a:srgbClr val="94A3B8"/>
                 </a:solidFill>
                 <a:latin typeface="Segoe UI"/>
               </a:rPr>
-              <a:t>  Download multi-gigabyte raw GeoTIFF tiles</a:t>
+              <a:t>  Download and unpack multi-gigabyte raw GeoTIFF tiles.</a:t>
             </a:r>
           </a:p>
           <a:p>
@@ -3605,23 +3605,23 @@
               </a:spcBef>
             </a:pPr>
             <a:r>
-              <a:rPr sz="850" b="1">
+              <a:rPr sz="800" b="1">
                 <a:solidFill>
                   <a:srgbClr val="F5F3ED"/>
                 </a:solidFill>
                 <a:latin typeface="Segoe UI"/>
               </a:rPr>
-              <a:t>04 / BLINK INSPECTION
+              <a:t>04 / MANUAL COMPARISON
 </a:t>
             </a:r>
             <a:r>
-              <a:rPr sz="800">
+              <a:rPr sz="750">
                 <a:solidFill>
                   <a:srgbClr val="94A3B8"/>
                 </a:solidFill>
                 <a:latin typeface="Segoe UI"/>
               </a:rPr>
-              <a:t>  Flicker T0 vs T1 images manually on screen</a:t>
+              <a:t>  Flicker/blink inspection of T0 vs T1 images on screen.</a:t>
             </a:r>
           </a:p>
           <a:p>
@@ -3631,49 +3631,23 @@
               </a:spcBef>
             </a:pPr>
             <a:r>
-              <a:rPr sz="850" b="1">
+              <a:rPr sz="800" b="1">
                 <a:solidFill>
                   <a:srgbClr val="F5F3ED"/>
                 </a:solidFill>
                 <a:latin typeface="Segoe UI"/>
               </a:rPr>
-              <a:t>05 / PIXEL DIFFERENCING
+              <a:t>05 / MANUAL INTERPRETATION
 </a:t>
             </a:r>
             <a:r>
-              <a:rPr sz="800">
+              <a:rPr sz="750">
                 <a:solidFill>
                   <a:srgbClr val="94A3B8"/>
                 </a:solidFill>
                 <a:latin typeface="Segoe UI"/>
               </a:rPr>
-              <a:t>  Crude thresholds flag thousands of false alarms</a:t>
-            </a:r>
-          </a:p>
-          <a:p>
-            <a:pPr>
-              <a:spcBef>
-                <a:spcPts val="400"/>
-              </a:spcBef>
-            </a:pPr>
-            <a:r>
-              <a:rPr sz="850" b="1">
-                <a:solidFill>
-                  <a:srgbClr val="F5F3ED"/>
-                </a:solidFill>
-                <a:latin typeface="Segoe UI"/>
-              </a:rPr>
-              <a:t>06 / MANUAL GUESSWORK
-</a:t>
-            </a:r>
-            <a:r>
-              <a:rPr sz="800">
-                <a:solidFill>
-                  <a:srgbClr val="94A3B8"/>
-                </a:solidFill>
-                <a:latin typeface="Segoe UI"/>
-              </a:rPr>
-              <a:t>  Analyst forced to interpret cause without proof</a:t>
+              <a:t>  Crude pixel subtraction forces analyst to guess ground cause.</a:t>
             </a:r>
           </a:p>
           <a:p>
@@ -3683,13 +3657,14 @@
               </a:spcBef>
             </a:pPr>
             <a:r>
-              <a:rPr sz="780" b="1">
+              <a:rPr sz="740" b="1">
                 <a:solidFill>
                   <a:srgbClr val="E09F3E"/>
                 </a:solidFill>
                 <a:latin typeface="Segoe UI"/>
               </a:rPr>
-              <a:t>CRITICAL FLAW: 98%+ of raw pixel alerts represent ephemeral phenology, moisture, or sun angle, creating severe analyst alert fatigue.</a:t>
+              <a:t>CRITICAL DEFENSE FLAW:
+Naive pixel differencing creates massive false-alarm exhaustion from seasonal phenology, moisture, and sun angle.</a:t>
             </a:r>
           </a:p>
         </p:txBody>
@@ -3702,8 +3677,8 @@
         </p:nvSpPr>
         <p:spPr>
           <a:xfrm>
-            <a:off x="3977639" y="1828800"/>
-            <a:ext cx="3931920" cy="3977639"/>
+            <a:off x="3977639" y="1737360"/>
+            <a:ext cx="3977639" cy="4114800"/>
           </a:xfrm>
           <a:prstGeom prst="roundRect">
             <a:avLst/>
@@ -3747,8 +3722,8 @@
         </p:nvSpPr>
         <p:spPr>
           <a:xfrm>
-            <a:off x="4114800" y="1965960"/>
-            <a:ext cx="3657600" cy="3703320"/>
+            <a:off x="4114800" y="1828800"/>
+            <a:ext cx="3703319" cy="3931920"/>
           </a:xfrm>
           <a:prstGeom prst="rect">
             <a:avLst/>
@@ -3762,7 +3737,7 @@
           <a:lstStyle/>
           <a:p>
             <a:pPr>
-              <a:defRPr sz="1000" b="1">
+              <a:defRPr sz="900" b="1">
                 <a:solidFill>
                   <a:srgbClr val="4EA8DE"/>
                 </a:solidFill>
@@ -3770,7 +3745,23 @@
               </a:defRPr>
             </a:pPr>
             <a:r>
-              <a:t>REAL DEFENSE INTELLIGENCE QUESTION</a:t>
+              <a:t>OPERATIONAL DEFENSE CHALLENGE</a:t>
+            </a:r>
+          </a:p>
+          <a:p>
+            <a:pPr>
+              <a:spcBef>
+                <a:spcPts val="300"/>
+              </a:spcBef>
+            </a:pPr>
+            <a:r>
+              <a:rPr sz="850" b="1">
+                <a:solidFill>
+                  <a:srgbClr val="F5F3ED"/>
+                </a:solidFill>
+                <a:latin typeface="Segoe UI"/>
+              </a:rPr>
+              <a:t>Analysts must find relevant satellite scenes and determine whether observed changes are persistent, meaningful, and supported by evidence.</a:t>
             </a:r>
           </a:p>
           <a:p>
@@ -3780,7 +3771,16 @@
               </a:spcBef>
             </a:pPr>
             <a:r>
-              <a:rPr sz="1050" b="1">
+              <a:rPr sz="780" b="1">
+                <a:solidFill>
+                  <a:srgbClr val="C5A869"/>
+                </a:solidFill>
+                <a:latin typeface="Consolas"/>
+              </a:rPr>
+              <a:t>REAL ANALYST QUERY:  </a:t>
+            </a:r>
+            <a:r>
+              <a:rPr sz="850" b="1">
                 <a:solidFill>
                   <a:srgbClr val="F5F3ED"/>
                 </a:solidFill>
@@ -3793,101 +3793,126 @@
           <a:p>
             <a:pPr>
               <a:spcBef>
-                <a:spcPts val="500"/>
+                <a:spcPts val="300"/>
               </a:spcBef>
             </a:pPr>
             <a:r>
-              <a:rPr sz="850" b="1">
+              <a:rPr sz="800" b="1">
                 <a:solidFill>
                   <a:srgbClr val="C5A869"/>
                 </a:solidFill>
                 <a:latin typeface="Segoe UI"/>
               </a:rPr>
-              <a:t>• Multi-Temporal Scale: </a:t>
-            </a:r>
-            <a:r>
-              <a:rPr sz="800">
+              <a:t>• 1. Semantic Discovery: </a:t>
+            </a:r>
+            <a:r>
+              <a:rPr sz="740">
                 <a:solidFill>
                   <a:srgbClr val="94A3B8"/>
                 </a:solidFill>
                 <a:latin typeface="Segoe UI"/>
               </a:rPr>
-              <a:t>Petabytes of imagery stream daily; pixel matching without semantic discovery is computationally impossible.</a:t>
+              <a:t>Archives lack natural-language retrieval; analysts browse thousands of candidate tiles manually.</a:t>
             </a:r>
           </a:p>
           <a:p>
             <a:pPr>
               <a:spcBef>
-                <a:spcPts val="500"/>
+                <a:spcPts val="300"/>
               </a:spcBef>
             </a:pPr>
             <a:r>
-              <a:rPr sz="850" b="1">
+              <a:rPr sz="800" b="1">
                 <a:solidFill>
                   <a:srgbClr val="C5A869"/>
                 </a:solidFill>
                 <a:latin typeface="Segoe UI"/>
               </a:rPr>
-              <a:t>• Phenological Masking: </a:t>
-            </a:r>
-            <a:r>
-              <a:rPr sz="800">
+              <a:t>• 2. Multi-Temporal Scale: </a:t>
+            </a:r>
+            <a:r>
+              <a:rPr sz="740">
                 <a:solidFill>
                   <a:srgbClr val="94A3B8"/>
                 </a:solidFill>
                 <a:latin typeface="Segoe UI"/>
               </a:rPr>
-              <a:t>Seasonal crop flush (monsoon) and harvest senescence look identical to construction in simple differencing.</a:t>
+              <a:t>Two-date differencing fails to separate seasonal crop phenology from permanent transformation.</a:t>
             </a:r>
           </a:p>
           <a:p>
             <a:pPr>
               <a:spcBef>
-                <a:spcPts val="500"/>
+                <a:spcPts val="300"/>
               </a:spcBef>
             </a:pPr>
             <a:r>
-              <a:rPr sz="850" b="1">
+              <a:rPr sz="800" b="1">
                 <a:solidFill>
                   <a:srgbClr val="C5A869"/>
                 </a:solidFill>
                 <a:latin typeface="Segoe UI"/>
               </a:rPr>
-              <a:t>• Atmospheric &amp; Sensor Noise: </a:t>
-            </a:r>
-            <a:r>
-              <a:rPr sz="800">
+              <a:t>• 3. Spectral Attribution: </a:t>
+            </a:r>
+            <a:r>
+              <a:rPr sz="740">
                 <a:solidFill>
                   <a:srgbClr val="94A3B8"/>
                 </a:solidFill>
                 <a:latin typeface="Segoe UI"/>
               </a:rPr>
-              <a:t>Sub-pixel misregistration, thin cirrus, and sun glint trigger dense clusters of false change.</a:t>
+              <a:t>Difference intensity indicates THAT a change occurred, but cannot prove WHAT changed.</a:t>
             </a:r>
           </a:p>
           <a:p>
             <a:pPr>
               <a:spcBef>
-                <a:spcPts val="500"/>
+                <a:spcPts val="300"/>
               </a:spcBef>
             </a:pPr>
             <a:r>
-              <a:rPr sz="850" b="1">
+              <a:rPr sz="800" b="1">
                 <a:solidFill>
                   <a:srgbClr val="C5A869"/>
                 </a:solidFill>
                 <a:latin typeface="Segoe UI"/>
               </a:rPr>
-              <a:t>• Provenance &amp; Offline Need: </a:t>
-            </a:r>
-            <a:r>
-              <a:rPr sz="800">
+              <a:t>• 4. Heterogeneous Sensors: </a:t>
+            </a:r>
+            <a:r>
+              <a:rPr sz="740">
                 <a:solidFill>
                   <a:srgbClr val="94A3B8"/>
                 </a:solidFill>
                 <a:latin typeface="Segoe UI"/>
               </a:rPr>
-              <a:t>Defense analysts require strict auditability, repeatable evidence chains, and 100% on-premises operation.</a:t>
+              <a:t>Varying resolutions, calibrations, and coordinate reference systems (CRS) hinder standardized analysis.</a:t>
+            </a:r>
+          </a:p>
+          <a:p>
+            <a:pPr>
+              <a:spcBef>
+                <a:spcPts val="300"/>
+              </a:spcBef>
+            </a:pPr>
+            <a:r>
+              <a:rPr sz="800" b="1">
+                <a:solidFill>
+                  <a:srgbClr val="C5A869"/>
+                </a:solidFill>
+                <a:latin typeface="Segoe UI"/>
+              </a:rPr>
+              <a:t>• 5. Secure Offline Enclave: </a:t>
+            </a:r>
+            <a:r>
+              <a:rPr sz="740">
+                <a:solidFill>
+                  <a:srgbClr val="94A3B8"/>
+                </a:solidFill>
+                <a:latin typeface="Segoe UI"/>
+              </a:rPr>
+              <a:t>Air-gapped defense workstations require zero cloud APIs, remote tracking, or network egress.</a:t>
             </a:r>
           </a:p>
         </p:txBody>
@@ -3900,8 +3925,8 @@
         </p:nvSpPr>
         <p:spPr>
           <a:xfrm>
-            <a:off x="8001000" y="1828800"/>
-            <a:ext cx="3596335" cy="3977639"/>
+            <a:off x="8046720" y="1737360"/>
+            <a:ext cx="3550615" cy="4114800"/>
           </a:xfrm>
           <a:prstGeom prst="roundRect">
             <a:avLst/>
@@ -3953,8 +3978,8 @@
         </p:blipFill>
         <p:spPr>
           <a:xfrm>
-            <a:off x="8092440" y="1920240"/>
-            <a:ext cx="3413455" cy="2148840"/>
+            <a:off x="8156448" y="1828800"/>
+            <a:ext cx="3331159" cy="2194560"/>
           </a:xfrm>
           <a:prstGeom prst="rect">
             <a:avLst/>
@@ -3969,8 +3994,8 @@
         </p:nvSpPr>
         <p:spPr>
           <a:xfrm>
-            <a:off x="8092440" y="4160520"/>
-            <a:ext cx="3413455" cy="1600200"/>
+            <a:off x="8156448" y="4069080"/>
+            <a:ext cx="3331159" cy="1691640"/>
           </a:xfrm>
           <a:prstGeom prst="rect">
             <a:avLst/>
@@ -3984,7 +4009,7 @@
           <a:lstStyle/>
           <a:p>
             <a:pPr>
-              <a:defRPr sz="950" b="1">
+              <a:defRPr sz="900" b="1">
                 <a:solidFill>
                   <a:srgbClr val="52B788"/>
                 </a:solidFill>
@@ -4002,7 +4027,7 @@
               </a:spcBef>
             </a:pPr>
             <a:r>
-              <a:rPr sz="800">
+              <a:rPr sz="740">
                 <a:solidFill>
                   <a:srgbClr val="94A3B8"/>
                 </a:solidFill>
@@ -4018,13 +4043,13 @@
               </a:spcBef>
             </a:pPr>
             <a:r>
-              <a:rPr sz="800">
+              <a:rPr sz="740">
                 <a:solidFill>
                   <a:srgbClr val="94A3B8"/>
                 </a:solidFill>
                 <a:latin typeface="Segoe UI"/>
               </a:rPr>
-              <a:t>▪ High density urban, coastal, and agrarian terrain.</a:t>
+              <a:t>▪ High-density urban, coastal, and agricultural terrain.</a:t>
             </a:r>
           </a:p>
           <a:p>
@@ -4034,13 +4059,29 @@
               </a:spcBef>
             </a:pPr>
             <a:r>
-              <a:rPr sz="800">
+              <a:rPr sz="740">
                 <a:solidFill>
                   <a:srgbClr val="94A3B8"/>
                 </a:solidFill>
                 <a:latin typeface="Segoe UI"/>
               </a:rPr>
-              <a:t>▪ Change must be physically decomposed across bands, not guessed from pixel luminosity.</a:t>
+              <a:t>▪ Change must be physically decomposed across bands (Blue, Green, Red, NIR), not guessed from pixel luminosity.</a:t>
+            </a:r>
+          </a:p>
+          <a:p>
+            <a:pPr>
+              <a:spcBef>
+                <a:spcPts val="200"/>
+              </a:spcBef>
+            </a:pPr>
+            <a:r>
+              <a:rPr sz="740">
+                <a:solidFill>
+                  <a:srgbClr val="94A3B8"/>
+                </a:solidFill>
+                <a:latin typeface="Segoe UI"/>
+              </a:rPr>
+              <a:t>▪ MGRS Tile 36SYC · Projected CRS EPSG:32636.</a:t>
             </a:r>
           </a:p>
         </p:txBody>
@@ -4053,8 +4094,8 @@
         </p:nvSpPr>
         <p:spPr>
           <a:xfrm>
-            <a:off x="594360" y="5897880"/>
-            <a:ext cx="11002975" cy="502920"/>
+            <a:off x="594360" y="5925312"/>
+            <a:ext cx="11002975" cy="457200"/>
           </a:xfrm>
           <a:prstGeom prst="roundRect">
             <a:avLst/>
@@ -4098,8 +4139,8 @@
         </p:nvSpPr>
         <p:spPr>
           <a:xfrm>
-            <a:off x="685800" y="5961888"/>
-            <a:ext cx="10820095" cy="365760"/>
+            <a:off x="685800" y="5980176"/>
+            <a:ext cx="10820095" cy="347472"/>
           </a:xfrm>
           <a:prstGeom prst="rect">
             <a:avLst/>
@@ -4114,58 +4155,58 @@
           <a:p>
             <a:pPr algn="ctr"/>
             <a:r>
-              <a:rPr sz="850" b="1">
+              <a:rPr sz="800" b="1">
                 <a:solidFill>
                   <a:srgbClr val="C5A869"/>
                 </a:solidFill>
                 <a:latin typeface="Consolas"/>
               </a:rPr>
-              <a:t>PS SIH26227 CORE ALIGNMENT:  </a:t>
-            </a:r>
-            <a:r>
-              <a:rPr sz="800" b="1">
+              <a:t>PS SIH26227 ALIGNMENT:  </a:t>
+            </a:r>
+            <a:r>
+              <a:rPr sz="780" b="1">
                 <a:solidFill>
                   <a:srgbClr val="4EA8DE"/>
                 </a:solidFill>
                 <a:latin typeface="Consolas"/>
               </a:rPr>
-              <a:t>[1. SEMANTIC RETRIEVAL]   </a:t>
-            </a:r>
-            <a:r>
-              <a:rPr sz="800" b="1">
+              <a:t>[SEMANTIC RETRIEVAL]   </a:t>
+            </a:r>
+            <a:r>
+              <a:rPr sz="780" b="1">
                 <a:solidFill>
                   <a:srgbClr val="52B788"/>
                 </a:solidFill>
                 <a:latin typeface="Consolas"/>
               </a:rPr>
-              <a:t>[2. MULTI-TEMPORAL ANALYSIS]   </a:t>
-            </a:r>
-            <a:r>
-              <a:rPr sz="800" b="1">
-                <a:solidFill>
-                  <a:srgbClr val="E09F3E"/>
+              <a:t>[MULTI-TEMPORAL ANALYSIS]   </a:t>
+            </a:r>
+            <a:r>
+              <a:rPr sz="780" b="1">
+                <a:solidFill>
+                  <a:srgbClr val="C5A869"/>
                 </a:solidFill>
                 <a:latin typeface="Consolas"/>
               </a:rPr>
-              <a:t>[3. FALSE-ALARM SUPPRESSION]   </a:t>
-            </a:r>
-            <a:r>
-              <a:rPr sz="800" b="1">
+              <a:t>[MULTI-SPECTRAL EVIDENCE]   </a:t>
+            </a:r>
+            <a:r>
+              <a:rPr sz="780" b="1">
                 <a:solidFill>
                   <a:srgbClr val="F5F3ED"/>
                 </a:solidFill>
                 <a:latin typeface="Consolas"/>
               </a:rPr>
-              <a:t>[4. ANALYST PROVENANCE]   </a:t>
-            </a:r>
-            <a:r>
-              <a:rPr sz="800" b="1">
+              <a:t>[PROVENANCE / REVIEW]   </a:t>
+            </a:r>
+            <a:r>
+              <a:rPr sz="780" b="1">
                 <a:solidFill>
                   <a:srgbClr val="4EA8DE"/>
                 </a:solidFill>
                 <a:latin typeface="Consolas"/>
               </a:rPr>
-              <a:t>[5. OFFLINE OPERATION]   </a:t>
+              <a:t>[OFFLINE OPERATION]   </a:t>
             </a:r>
           </a:p>
         </p:txBody>
@@ -4239,8 +4280,8 @@
         </p:nvSpPr>
         <p:spPr>
           <a:xfrm>
-            <a:off x="594360" y="292608"/>
-            <a:ext cx="11002975" cy="27432"/>
+            <a:off x="594360" y="256032"/>
+            <a:ext cx="11002975" cy="22860"/>
           </a:xfrm>
           <a:prstGeom prst="rect">
             <a:avLst/>
@@ -4282,8 +4323,8 @@
         </p:nvSpPr>
         <p:spPr>
           <a:xfrm>
-            <a:off x="594360" y="347472"/>
-            <a:ext cx="7772400" cy="274320"/>
+            <a:off x="594360" y="301752"/>
+            <a:ext cx="7772400" cy="256032"/>
           </a:xfrm>
           <a:prstGeom prst="rect">
             <a:avLst/>
@@ -4297,7 +4338,7 @@
           <a:lstStyle/>
           <a:p>
             <a:pPr>
-              <a:defRPr sz="850" b="1">
+              <a:defRPr sz="800" b="1">
                 <a:solidFill>
                   <a:srgbClr val="C5A869"/>
                 </a:solidFill>
@@ -4305,7 +4346,7 @@
               </a:defRPr>
             </a:pPr>
             <a:r>
-              <a:t>SMART INDIA HACKATHON 2026 · PS: SIH26227 · THEME: SPACE TECHNOLOGY · MINISTRY OF DEFENCE (MOD) / INDIAN ARMY — DGIS</a:t>
+              <a:t>SMART INDIA HACKATHON 2026 · PS: SIH26227 · SPACE TECHNOLOGY · SOFTWARE · MINISTRY OF DEFENCE / INDIAN ARMY — DGIS</a:t>
             </a:r>
           </a:p>
         </p:txBody>
@@ -4318,8 +4359,8 @@
         </p:nvSpPr>
         <p:spPr>
           <a:xfrm>
-            <a:off x="8412480" y="347472"/>
-            <a:ext cx="3182112" cy="274320"/>
+            <a:off x="8412480" y="301752"/>
+            <a:ext cx="3182112" cy="256032"/>
           </a:xfrm>
           <a:prstGeom prst="rect">
             <a:avLst/>
@@ -4334,16 +4375,16 @@
           <a:p>
             <a:pPr algn="r"/>
             <a:r>
-              <a:rPr sz="850">
+              <a:rPr sz="800">
                 <a:solidFill>
                   <a:srgbClr val="94A3B8"/>
                 </a:solidFill>
                 <a:latin typeface="Consolas"/>
               </a:rPr>
-              <a:t>TEAM: Quantumcrew | </a:t>
-            </a:r>
-            <a:r>
-              <a:rPr sz="850" b="1">
+              <a:t>TEAM: Quantumcrew  |  </a:t>
+            </a:r>
+            <a:r>
+              <a:rPr sz="800" b="1">
                 <a:solidFill>
                   <a:srgbClr val="4EA8DE"/>
                 </a:solidFill>
@@ -4362,8 +4403,8 @@
         </p:nvSpPr>
         <p:spPr>
           <a:xfrm>
-            <a:off x="594360" y="594360"/>
-            <a:ext cx="11002975" cy="594360"/>
+            <a:off x="594360" y="548640"/>
+            <a:ext cx="11002975" cy="566928"/>
           </a:xfrm>
           <a:prstGeom prst="rect">
             <a:avLst/>
@@ -4377,7 +4418,7 @@
           <a:lstStyle/>
           <a:p>
             <a:pPr>
-              <a:defRPr sz="1750" b="1">
+              <a:defRPr sz="1650" b="1">
                 <a:solidFill>
                   <a:srgbClr val="F5F3ED"/>
                 </a:solidFill>
@@ -4385,12 +4426,12 @@
               </a:defRPr>
             </a:pPr>
             <a:r>
-              <a:t>FROM NATURAL-LANGUAGE QUERY TO EVIDENCE-BACKED INVESTIGATION</a:t>
+              <a:t>02 — SOLUTION</a:t>
             </a:r>
           </a:p>
           <a:p>
             <a:pPr>
-              <a:defRPr sz="1000">
+              <a:defRPr sz="950">
                 <a:solidFill>
                   <a:srgbClr val="94A3B8"/>
                 </a:solidFill>
@@ -4398,7 +4439,7 @@
               </a:defRPr>
             </a:pPr>
             <a:r>
-              <a:t>An analyst-first workstation transforming natural intent into verified multi-spectral evidence dossiers.</a:t>
+              <a:t>FROM NATURAL-LANGUAGE QUERY TO EVIDENCE-BACKED INVESTIGATION</a:t>
             </a:r>
           </a:p>
         </p:txBody>
@@ -4411,8 +4452,8 @@
         </p:nvSpPr>
         <p:spPr>
           <a:xfrm>
-            <a:off x="594360" y="6537960"/>
-            <a:ext cx="11002975" cy="228600"/>
+            <a:off x="594360" y="6565392"/>
+            <a:ext cx="11002975" cy="201168"/>
           </a:xfrm>
           <a:prstGeom prst="rect">
             <a:avLst/>
@@ -4426,25 +4467,25 @@
           <a:lstStyle/>
           <a:p>
             <a:r>
-              <a:rPr sz="800">
+              <a:rPr sz="780">
                 <a:solidFill>
                   <a:srgbClr val="64748B"/>
                 </a:solidFill>
                 <a:latin typeface="Segoe UI"/>
               </a:rPr>
-              <a:t>GEOAI — Evidence-Based Satellite Investigation Workstation  |  Ministry of Defence (MoD) / Indian Army — DGIS  |  SIH 2026 Submission</a:t>
-            </a:r>
-            <a:r>
-              <a:rPr sz="800">
+              <a:t>TERRAE — Earth Intelligence Satellite Investigation Console  |  Ministry of Defence / Indian Army — DGIS  |  SIH 2026 Submission</a:t>
+            </a:r>
+            <a:r>
+              <a:rPr sz="780">
                 <a:solidFill>
                   <a:srgbClr val="64748B"/>
                 </a:solidFill>
                 <a:latin typeface="Segoe UI"/>
               </a:rPr>
-              <a:t>                                                                    Live Console: </a:t>
-            </a:r>
-            <a:r>
-              <a:rPr sz="800">
+              <a:t>                                                         Live Console: </a:t>
+            </a:r>
+            <a:r>
+              <a:rPr sz="780">
                 <a:solidFill>
                   <a:srgbClr val="4EA8DE"/>
                 </a:solidFill>
@@ -4464,8 +4505,8 @@
         </p:nvSpPr>
         <p:spPr>
           <a:xfrm>
-            <a:off x="594360" y="1234440"/>
-            <a:ext cx="11002975" cy="731520"/>
+            <a:off x="594360" y="1188720"/>
+            <a:ext cx="11002975" cy="777240"/>
           </a:xfrm>
           <a:prstGeom prst="roundRect">
             <a:avLst/>
@@ -4475,7 +4516,7 @@
           </a:solidFill>
           <a:ln w="12700">
             <a:solidFill>
-              <a:srgbClr val="4EA8DE"/>
+              <a:srgbClr val="C5A869"/>
             </a:solidFill>
           </a:ln>
         </p:spPr>
@@ -4509,8 +4550,8 @@
         </p:nvSpPr>
         <p:spPr>
           <a:xfrm>
-            <a:off x="594360" y="1307592"/>
-            <a:ext cx="1571853" cy="585216"/>
+            <a:off x="594360" y="1261872"/>
+            <a:ext cx="1833829" cy="630936"/>
           </a:xfrm>
           <a:prstGeom prst="rect">
             <a:avLst/>
@@ -4538,7 +4579,7 @@
           <a:p>
             <a:pPr algn="ctr"/>
             <a:r>
-              <a:rPr sz="720">
+              <a:rPr sz="700">
                 <a:solidFill>
                   <a:srgbClr val="94A3B8"/>
                 </a:solidFill>
@@ -4558,8 +4599,8 @@
         </p:nvSpPr>
         <p:spPr>
           <a:xfrm>
-            <a:off x="2166213" y="1307592"/>
-            <a:ext cx="1571853" cy="585216"/>
+            <a:off x="2428189" y="1261872"/>
+            <a:ext cx="1833829" cy="630936"/>
           </a:xfrm>
           <a:prstGeom prst="rect">
             <a:avLst/>
@@ -4587,7 +4628,7 @@
           <a:p>
             <a:pPr algn="ctr"/>
             <a:r>
-              <a:rPr sz="720">
+              <a:rPr sz="700">
                 <a:solidFill>
                   <a:srgbClr val="94A3B8"/>
                 </a:solidFill>
@@ -4607,8 +4648,8 @@
         </p:nvSpPr>
         <p:spPr>
           <a:xfrm>
-            <a:off x="3738066" y="1307592"/>
-            <a:ext cx="1571853" cy="585216"/>
+            <a:off x="4262018" y="1261872"/>
+            <a:ext cx="1833829" cy="630936"/>
           </a:xfrm>
           <a:prstGeom prst="rect">
             <a:avLst/>
@@ -4629,21 +4670,21 @@
                 </a:solidFill>
                 <a:latin typeface="Consolas"/>
               </a:rPr>
-              <a:t>03 LOCATE
+              <a:t>03 COMPARE
 </a:t>
             </a:r>
           </a:p>
           <a:p>
             <a:pPr algn="ctr"/>
             <a:r>
-              <a:rPr sz="720">
+              <a:rPr sz="700">
                 <a:solidFill>
                   <a:srgbClr val="94A3B8"/>
                 </a:solidFill>
                 <a:latin typeface="Segoe UI"/>
               </a:rPr>
-              <a:t>MGRS Coordinate
-Bounding Frame</a:t>
+              <a:t>Calibrated Multi-Spectral
+Differencing (τ = 0.15)</a:t>
             </a:r>
           </a:p>
         </p:txBody>
@@ -4656,8 +4697,8 @@
         </p:nvSpPr>
         <p:spPr>
           <a:xfrm>
-            <a:off x="5309919" y="1307592"/>
-            <a:ext cx="1571853" cy="585216"/>
+            <a:off x="6095847" y="1261872"/>
+            <a:ext cx="1833829" cy="630936"/>
           </a:xfrm>
           <a:prstGeom prst="rect">
             <a:avLst/>
@@ -4678,21 +4719,21 @@
                 </a:solidFill>
                 <a:latin typeface="Consolas"/>
               </a:rPr>
-              <a:t>04 COMPARE
+              <a:t>04 EXPLAIN
 </a:t>
             </a:r>
           </a:p>
           <a:p>
             <a:pPr algn="ctr"/>
             <a:r>
-              <a:rPr sz="720">
+              <a:rPr sz="700">
                 <a:solidFill>
                   <a:srgbClr val="94A3B8"/>
                 </a:solidFill>
                 <a:latin typeface="Segoe UI"/>
               </a:rPr>
-              <a:t>Sub-Pixel Calibrated
-Bi-Temporal Diff</a:t>
+              <a:t>Multi-Band Decomposition
+&amp; Spatial Coherence</a:t>
             </a:r>
           </a:p>
         </p:txBody>
@@ -4705,8 +4746,8 @@
         </p:nvSpPr>
         <p:spPr>
           <a:xfrm>
-            <a:off x="6881772" y="1307592"/>
-            <a:ext cx="1571853" cy="585216"/>
+            <a:off x="7929676" y="1261872"/>
+            <a:ext cx="1833829" cy="630936"/>
           </a:xfrm>
           <a:prstGeom prst="rect">
             <a:avLst/>
@@ -4727,21 +4768,21 @@
                 </a:solidFill>
                 <a:latin typeface="Consolas"/>
               </a:rPr>
-              <a:t>05 EXPLAIN
+              <a:t>05 CHALLENGE
 </a:t>
             </a:r>
           </a:p>
           <a:p>
             <a:pPr algn="ctr"/>
             <a:r>
-              <a:rPr sz="720">
+              <a:rPr sz="700">
                 <a:solidFill>
                   <a:srgbClr val="94A3B8"/>
                 </a:solidFill>
                 <a:latin typeface="Segoe UI"/>
               </a:rPr>
-              <a:t>Multi-Spectral Math
-&amp; Spatial Topology</a:t>
+              <a:t>Multi-Date Trajectory
+Persistence Check</a:t>
             </a:r>
           </a:p>
         </p:txBody>
@@ -4754,8 +4795,8 @@
         </p:nvSpPr>
         <p:spPr>
           <a:xfrm>
-            <a:off x="8453625" y="1307592"/>
-            <a:ext cx="1571853" cy="585216"/>
+            <a:off x="9763505" y="1261872"/>
+            <a:ext cx="1833829" cy="630936"/>
           </a:xfrm>
           <a:prstGeom prst="rect">
             <a:avLst/>
@@ -4772,88 +4813,39 @@
             <a:r>
               <a:rPr sz="850" b="1">
                 <a:solidFill>
-                  <a:srgbClr val="F5F3ED"/>
+                  <a:srgbClr val="C5A869"/>
                 </a:solidFill>
                 <a:latin typeface="Consolas"/>
               </a:rPr>
-              <a:t>06 CHALLENGE
+              <a:t>06 DECIDE
 </a:t>
             </a:r>
           </a:p>
           <a:p>
             <a:pPr algn="ctr"/>
             <a:r>
-              <a:rPr sz="720">
+              <a:rPr sz="700">
                 <a:solidFill>
                   <a:srgbClr val="94A3B8"/>
                 </a:solidFill>
                 <a:latin typeface="Segoe UI"/>
               </a:rPr>
-              <a:t>Competing Hypotheses
-&amp; Trajectory Check</a:t>
-            </a:r>
-          </a:p>
-        </p:txBody>
-      </p:sp>
-      <p:sp>
-        <p:nvSpPr>
-          <p:cNvPr id="15" name="TextBox 14"/>
-          <p:cNvSpPr txBox="1"/>
-          <p:nvPr/>
-        </p:nvSpPr>
-        <p:spPr>
-          <a:xfrm>
-            <a:off x="10025478" y="1307592"/>
-            <a:ext cx="1571853" cy="585216"/>
-          </a:xfrm>
-          <a:prstGeom prst="rect">
-            <a:avLst/>
-          </a:prstGeom>
-          <a:noFill/>
-        </p:spPr>
-        <p:txBody>
-          <a:bodyPr wrap="square" lIns="0" tIns="0" rIns="0" bIns="0">
-            <a:spAutoFit/>
-          </a:bodyPr>
-          <a:lstStyle/>
-          <a:p>
-            <a:pPr algn="ctr"/>
-            <a:r>
-              <a:rPr sz="850" b="1">
-                <a:solidFill>
-                  <a:srgbClr val="C5A869"/>
-                </a:solidFill>
-                <a:latin typeface="Consolas"/>
-              </a:rPr>
-              <a:t>07 DECIDE
-</a:t>
-            </a:r>
-          </a:p>
-          <a:p>
-            <a:pPr algn="ctr"/>
-            <a:r>
-              <a:rPr sz="720">
-                <a:solidFill>
-                  <a:srgbClr val="94A3B8"/>
-                </a:solidFill>
-                <a:latin typeface="Segoe UI"/>
-              </a:rPr>
-              <a:t>SUPPORTED / REVIEW
-Cryptographic Proof</a:t>
-            </a:r>
-          </a:p>
-        </p:txBody>
-      </p:sp>
-      <p:sp>
-        <p:nvSpPr>
-          <p:cNvPr id="16" name="Rounded Rectangle 15"/>
+              <a:t>Conservative Verdict:
+SUPPORTED / REVIEW / ABSTAIN</a:t>
+            </a:r>
+          </a:p>
+        </p:txBody>
+      </p:sp>
+      <p:sp>
+        <p:nvSpPr>
+          <p:cNvPr id="15" name="Rounded Rectangle 14"/>
           <p:cNvSpPr/>
           <p:nvPr/>
         </p:nvSpPr>
         <p:spPr>
           <a:xfrm>
             <a:off x="594360" y="2057400"/>
-            <a:ext cx="3931920" cy="4343400"/>
+            <a:ext cx="3977639" cy="3794760"/>
           </a:xfrm>
           <a:prstGeom prst="roundRect">
             <a:avLst/>
@@ -4891,14 +4883,14 @@
       </p:sp>
       <p:sp>
         <p:nvSpPr>
-          <p:cNvPr id="17" name="TextBox 16"/>
+          <p:cNvPr id="16" name="TextBox 15"/>
           <p:cNvSpPr txBox="1"/>
           <p:nvPr/>
         </p:nvSpPr>
         <p:spPr>
           <a:xfrm>
             <a:off x="731520" y="2148840"/>
-            <a:ext cx="3657600" cy="4160520"/>
+            <a:ext cx="3703319" cy="3611880"/>
           </a:xfrm>
           <a:prstGeom prst="rect">
             <a:avLst/>
@@ -4912,7 +4904,7 @@
           <a:lstStyle/>
           <a:p>
             <a:pPr>
-              <a:defRPr sz="950" b="1">
+              <a:defRPr sz="900" b="1">
                 <a:solidFill>
                   <a:srgbClr val="C5A869"/>
                 </a:solidFill>
@@ -4930,180 +4922,25 @@
               </a:spcBef>
             </a:pPr>
             <a:r>
-              <a:rPr sz="819">
+              <a:rPr sz="800" b="1">
+                <a:solidFill>
+                  <a:srgbClr val="F5F3ED"/>
+                </a:solidFill>
+                <a:latin typeface="Segoe UI"/>
+              </a:rPr>
+              <a:t>ANALYST INTENT: “Show me areas with newly built structures.”
+</a:t>
+            </a:r>
+          </a:p>
+          <a:p>
+            <a:r>
+              <a:rPr sz="750">
                 <a:solidFill>
                   <a:srgbClr val="94A3B8"/>
                 </a:solidFill>
                 <a:latin typeface="Segoe UI"/>
               </a:rPr>
-              <a:t>The system refuses to blindly declare change. Instead, it provides an auditable defense evidence trail answering:</a:t>
-            </a:r>
-          </a:p>
-          <a:p>
-            <a:pPr>
-              <a:spcBef>
-                <a:spcPts val="300"/>
-              </a:spcBef>
-            </a:pPr>
-            <a:r>
-              <a:rPr sz="800" b="1">
-                <a:solidFill>
-                  <a:srgbClr val="4EA8DE"/>
-                </a:solidFill>
-                <a:latin typeface="Segoe UI"/>
-              </a:rPr>
-              <a:t>▪ WHAT changed? </a:t>
-            </a:r>
-            <a:r>
-              <a:rPr sz="780">
-                <a:solidFill>
-                  <a:srgbClr val="F5F3ED"/>
-                </a:solidFill>
-                <a:latin typeface="Segoe UI"/>
-              </a:rPr>
-              <a:t>Exact reflectance deltas across Blue, Green, Red, NIR.</a:t>
-            </a:r>
-          </a:p>
-          <a:p>
-            <a:pPr>
-              <a:spcBef>
-                <a:spcPts val="300"/>
-              </a:spcBef>
-            </a:pPr>
-            <a:r>
-              <a:rPr sz="800" b="1">
-                <a:solidFill>
-                  <a:srgbClr val="4EA8DE"/>
-                </a:solidFill>
-                <a:latin typeface="Segoe UI"/>
-              </a:rPr>
-              <a:t>▪ WHERE is it located? </a:t>
-            </a:r>
-            <a:r>
-              <a:rPr sz="780">
-                <a:solidFill>
-                  <a:srgbClr val="F5F3ED"/>
-                </a:solidFill>
-                <a:latin typeface="Segoe UI"/>
-              </a:rPr>
-              <a:t>Canonical MGRS tile EPSG:32643 coordinate frame.</a:t>
-            </a:r>
-          </a:p>
-          <a:p>
-            <a:pPr>
-              <a:spcBef>
-                <a:spcPts val="300"/>
-              </a:spcBef>
-            </a:pPr>
-            <a:r>
-              <a:rPr sz="800" b="1">
-                <a:solidFill>
-                  <a:srgbClr val="4EA8DE"/>
-                </a:solidFill>
-                <a:latin typeface="Segoe UI"/>
-              </a:rPr>
-              <a:t>▪ WHAT supports it? </a:t>
-            </a:r>
-            <a:r>
-              <a:rPr sz="780">
-                <a:solidFill>
-                  <a:srgbClr val="F5F3ED"/>
-                </a:solidFill>
-                <a:latin typeface="Segoe UI"/>
-              </a:rPr>
-              <a:t>ΔNIR, ΔRed, NDVI shifts + connected component clustering.</a:t>
-            </a:r>
-          </a:p>
-          <a:p>
-            <a:pPr>
-              <a:spcBef>
-                <a:spcPts val="300"/>
-              </a:spcBef>
-            </a:pPr>
-            <a:r>
-              <a:rPr sz="800" b="1">
-                <a:solidFill>
-                  <a:srgbClr val="4EA8DE"/>
-                </a:solidFill>
-                <a:latin typeface="Segoe UI"/>
-              </a:rPr>
-              <a:t>▪ WHAT alternatives exist? </a:t>
-            </a:r>
-            <a:r>
-              <a:rPr sz="780">
-                <a:solidFill>
-                  <a:srgbClr val="F5F3ED"/>
-                </a:solidFill>
-                <a:latin typeface="Segoe UI"/>
-              </a:rPr>
-              <a:t>Competes against crop senescence, water &amp; cloud shadows.</a:t>
-            </a:r>
-          </a:p>
-          <a:p>
-            <a:pPr>
-              <a:spcBef>
-                <a:spcPts val="300"/>
-              </a:spcBef>
-            </a:pPr>
-            <a:r>
-              <a:rPr sz="800" b="1">
-                <a:solidFill>
-                  <a:srgbClr val="4EA8DE"/>
-                </a:solidFill>
-                <a:latin typeface="Segoe UI"/>
-              </a:rPr>
-              <a:t>▪ HOW strong is evidence? </a:t>
-            </a:r>
-            <a:r>
-              <a:rPr sz="780">
-                <a:solidFill>
-                  <a:srgbClr val="F5F3ED"/>
-                </a:solidFill>
-                <a:latin typeface="Segoe UI"/>
-              </a:rPr>
-              <a:t>Heuristic attribution support based on physical optics.</a:t>
-            </a:r>
-          </a:p>
-          <a:p>
-            <a:pPr>
-              <a:spcBef>
-                <a:spcPts val="300"/>
-              </a:spcBef>
-            </a:pPr>
-            <a:r>
-              <a:rPr sz="800" b="1">
-                <a:solidFill>
-                  <a:srgbClr val="4EA8DE"/>
-                </a:solidFill>
-                <a:latin typeface="Segoe UI"/>
-              </a:rPr>
-              <a:t>▪ WHEN to abstain? </a:t>
-            </a:r>
-            <a:r>
-              <a:rPr sz="780">
-                <a:solidFill>
-                  <a:srgbClr val="F5F3ED"/>
-                </a:solidFill>
-                <a:latin typeface="Segoe UI"/>
-              </a:rPr>
-              <a:t>SCL cloud/snow occlusion, defective pixels, or sub-threshold SNR.</a:t>
-            </a:r>
-          </a:p>
-          <a:p>
-            <a:pPr>
-              <a:spcBef>
-                <a:spcPts val="600"/>
-              </a:spcBef>
-            </a:pPr>
-            <a:r>
-              <a:rPr sz="850" b="1">
-                <a:solidFill>
-                  <a:srgbClr val="F5F3ED"/>
-                </a:solidFill>
-                <a:latin typeface="Consolas"/>
-              </a:rPr>
-              <a:t>THREE HONEST ANALYTICAL VERDICTS:
-</a:t>
+              <a:t>The console replaces blind differencing with structured evidence:</a:t>
             </a:r>
           </a:p>
           <a:p>
@@ -5113,22 +4950,22 @@
               </a:spcBef>
             </a:pPr>
             <a:r>
-              <a:rPr sz="800" b="1">
-                <a:solidFill>
-                  <a:srgbClr val="52B788"/>
-                </a:solidFill>
-                <a:latin typeface="Segoe UI"/>
-              </a:rPr>
-              <a:t>✔ SUPPORTED: </a:t>
-            </a:r>
-            <a:r>
-              <a:rPr sz="750">
-                <a:solidFill>
-                  <a:srgbClr val="94A3B8"/>
-                </a:solidFill>
-                <a:latin typeface="Segoe UI"/>
-              </a:rPr>
-              <a:t>High spatial coherence (&gt;70%) + clear spectral match + persistence.</a:t>
+              <a:rPr sz="760" b="1">
+                <a:solidFill>
+                  <a:srgbClr val="4EA8DE"/>
+                </a:solidFill>
+                <a:latin typeface="Segoe UI"/>
+              </a:rPr>
+              <a:t>▪ WHAT changed? </a:t>
+            </a:r>
+            <a:r>
+              <a:rPr sz="730">
+                <a:solidFill>
+                  <a:srgbClr val="F5F3ED"/>
+                </a:solidFill>
+                <a:latin typeface="Segoe UI"/>
+              </a:rPr>
+              <a:t>Exact surface reflectance shifts across Blue, Green, Red, NIR.</a:t>
             </a:r>
           </a:p>
           <a:p>
@@ -5138,22 +4975,22 @@
               </a:spcBef>
             </a:pPr>
             <a:r>
-              <a:rPr sz="800" b="1">
-                <a:solidFill>
-                  <a:srgbClr val="E09F3E"/>
-                </a:solidFill>
-                <a:latin typeface="Segoe UI"/>
-              </a:rPr>
-              <a:t>⚠ REVIEW: </a:t>
-            </a:r>
-            <a:r>
-              <a:rPr sz="750">
-                <a:solidFill>
-                  <a:srgbClr val="94A3B8"/>
-                </a:solidFill>
-                <a:latin typeface="Segoe UI"/>
-              </a:rPr>
-              <a:t>Mixed evidence, borderline coherence, or seasonal trajectory ambiguity.</a:t>
+              <a:rPr sz="760" b="1">
+                <a:solidFill>
+                  <a:srgbClr val="4EA8DE"/>
+                </a:solidFill>
+                <a:latin typeface="Segoe UI"/>
+              </a:rPr>
+              <a:t>▪ WHERE is it located? </a:t>
+            </a:r>
+            <a:r>
+              <a:rPr sz="730">
+                <a:solidFill>
+                  <a:srgbClr val="F5F3ED"/>
+                </a:solidFill>
+                <a:latin typeface="Segoe UI"/>
+              </a:rPr>
+              <a:t>Canonical MGRS tile EPSG:32643 coordinate frame.</a:t>
             </a:r>
           </a:p>
           <a:p>
@@ -5163,36 +5000,203 @@
               </a:spcBef>
             </a:pPr>
             <a:r>
+              <a:rPr sz="760" b="1">
+                <a:solidFill>
+                  <a:srgbClr val="4EA8DE"/>
+                </a:solidFill>
+                <a:latin typeface="Segoe UI"/>
+              </a:rPr>
+              <a:t>▪ WHAT supports it? </a:t>
+            </a:r>
+            <a:r>
+              <a:rPr sz="730">
+                <a:solidFill>
+                  <a:srgbClr val="F5F3ED"/>
+                </a:solidFill>
+                <a:latin typeface="Segoe UI"/>
+              </a:rPr>
+              <a:t>ΔNIR, ΔRed, NDVI shifts + connected-component clustering.</a:t>
+            </a:r>
+          </a:p>
+          <a:p>
+            <a:pPr>
+              <a:spcBef>
+                <a:spcPts val="200"/>
+              </a:spcBef>
+            </a:pPr>
+            <a:r>
+              <a:rPr sz="760" b="1">
+                <a:solidFill>
+                  <a:srgbClr val="4EA8DE"/>
+                </a:solidFill>
+                <a:latin typeface="Segoe UI"/>
+              </a:rPr>
+              <a:t>▪ WHAT alternatives exist? </a:t>
+            </a:r>
+            <a:r>
+              <a:rPr sz="730">
+                <a:solidFill>
+                  <a:srgbClr val="F5F3ED"/>
+                </a:solidFill>
+                <a:latin typeface="Segoe UI"/>
+              </a:rPr>
+              <a:t>Competes against crop senescence, water &amp; cloud shadows.</a:t>
+            </a:r>
+          </a:p>
+          <a:p>
+            <a:pPr>
+              <a:spcBef>
+                <a:spcPts val="200"/>
+              </a:spcBef>
+            </a:pPr>
+            <a:r>
+              <a:rPr sz="760" b="1">
+                <a:solidFill>
+                  <a:srgbClr val="4EA8DE"/>
+                </a:solidFill>
+                <a:latin typeface="Segoe UI"/>
+              </a:rPr>
+              <a:t>▪ DOES it persist? </a:t>
+            </a:r>
+            <a:r>
+              <a:rPr sz="730">
+                <a:solidFill>
+                  <a:srgbClr val="F5F3ED"/>
+                </a:solidFill>
+                <a:latin typeface="Segoe UI"/>
+              </a:rPr>
+              <a:t>3-date trajectory check (T0 → Tmid → T1) for permanence.</a:t>
+            </a:r>
+          </a:p>
+          <a:p>
+            <a:pPr>
+              <a:spcBef>
+                <a:spcPts val="200"/>
+              </a:spcBef>
+            </a:pPr>
+            <a:r>
+              <a:rPr sz="760" b="1">
+                <a:solidFill>
+                  <a:srgbClr val="4EA8DE"/>
+                </a:solidFill>
+                <a:latin typeface="Segoe UI"/>
+              </a:rPr>
+              <a:t>▪ WHEN to abstain? </a:t>
+            </a:r>
+            <a:r>
+              <a:rPr sz="730">
+                <a:solidFill>
+                  <a:srgbClr val="F5F3ED"/>
+                </a:solidFill>
+                <a:latin typeface="Segoe UI"/>
+              </a:rPr>
+              <a:t>SCL cloud/snow occlusion, defective pixels, or sub-threshold SNR.</a:t>
+            </a:r>
+          </a:p>
+          <a:p>
+            <a:pPr>
+              <a:spcBef>
+                <a:spcPts val="500"/>
+              </a:spcBef>
+            </a:pPr>
+            <a:r>
               <a:rPr sz="800" b="1">
                 <a:solidFill>
+                  <a:srgbClr val="F5F3ED"/>
+                </a:solidFill>
+                <a:latin typeface="Consolas"/>
+              </a:rPr>
+              <a:t>THREE CONSERVATIVE VERDICTS:
+</a:t>
+            </a:r>
+          </a:p>
+          <a:p>
+            <a:pPr>
+              <a:spcBef>
+                <a:spcPts val="100"/>
+              </a:spcBef>
+            </a:pPr>
+            <a:r>
+              <a:rPr sz="760" b="1">
+                <a:solidFill>
+                  <a:srgbClr val="52B788"/>
+                </a:solidFill>
+                <a:latin typeface="Consolas"/>
+              </a:rPr>
+              <a:t>[SUPPORTED] </a:t>
+            </a:r>
+            <a:r>
+              <a:rPr sz="720">
+                <a:solidFill>
+                  <a:srgbClr val="94A3B8"/>
+                </a:solidFill>
+                <a:latin typeface="Segoe UI"/>
+              </a:rPr>
+              <a:t>Spatial coherence (&gt;0.5) + dominant signature + persistent trajectory.</a:t>
+            </a:r>
+          </a:p>
+          <a:p>
+            <a:pPr>
+              <a:spcBef>
+                <a:spcPts val="100"/>
+              </a:spcBef>
+            </a:pPr>
+            <a:r>
+              <a:rPr sz="760" b="1">
+                <a:solidFill>
+                  <a:srgbClr val="E09F3E"/>
+                </a:solidFill>
+                <a:latin typeface="Consolas"/>
+              </a:rPr>
+              <a:t>[REVIEW] </a:t>
+            </a:r>
+            <a:r>
+              <a:rPr sz="720">
+                <a:solidFill>
+                  <a:srgbClr val="94A3B8"/>
+                </a:solidFill>
+                <a:latin typeface="Segoe UI"/>
+              </a:rPr>
+              <a:t>Sub-threshold change (f ≤ 5%), ambiguous attribution, or reversible cycle.</a:t>
+            </a:r>
+          </a:p>
+          <a:p>
+            <a:pPr>
+              <a:spcBef>
+                <a:spcPts val="100"/>
+              </a:spcBef>
+            </a:pPr>
+            <a:r>
+              <a:rPr sz="760" b="1">
+                <a:solidFill>
                   <a:srgbClr val="EF4444"/>
                 </a:solidFill>
-                <a:latin typeface="Segoe UI"/>
-              </a:rPr>
-              <a:t>✖ ABSTAIN: </a:t>
-            </a:r>
-            <a:r>
-              <a:rPr sz="750">
+                <a:latin typeface="Consolas"/>
+              </a:rPr>
+              <a:t>[ABSTAIN] </a:t>
+            </a:r>
+            <a:r>
+              <a:rPr sz="720">
                 <a:solidFill>
                   <a:srgbClr val="94A3B8"/>
                 </a:solidFill>
                 <a:latin typeface="Segoe UI"/>
               </a:rPr>
-              <a:t>SCL cloud/shadow obstruction, saturated pixels, or noise floor.</a:t>
-            </a:r>
-          </a:p>
-        </p:txBody>
-      </p:sp>
-      <p:sp>
-        <p:nvSpPr>
-          <p:cNvPr id="18" name="Rounded Rectangle 17"/>
+              <a:t>Cloud/shadow corruption, registration failure, or &lt;2 observations.</a:t>
+            </a:r>
+          </a:p>
+        </p:txBody>
+      </p:sp>
+      <p:sp>
+        <p:nvSpPr>
+          <p:cNvPr id="17" name="Rounded Rectangle 16"/>
           <p:cNvSpPr/>
           <p:nvPr/>
         </p:nvSpPr>
         <p:spPr>
           <a:xfrm>
-            <a:off x="4617720" y="2057400"/>
-            <a:ext cx="6949440" cy="4343400"/>
+            <a:off x="4690872" y="2057400"/>
+            <a:ext cx="6903720" cy="3794760"/>
           </a:xfrm>
           <a:prstGeom prst="roundRect">
             <a:avLst/>
@@ -5230,14 +5234,14 @@
       </p:sp>
       <p:sp>
         <p:nvSpPr>
-          <p:cNvPr id="19" name="TextBox 18"/>
+          <p:cNvPr id="18" name="TextBox 17"/>
           <p:cNvSpPr txBox="1"/>
           <p:nvPr/>
         </p:nvSpPr>
         <p:spPr>
           <a:xfrm>
-            <a:off x="4754880" y="2148840"/>
-            <a:ext cx="6675120" cy="502920"/>
+            <a:off x="4828032" y="2148840"/>
+            <a:ext cx="6629400" cy="320040"/>
           </a:xfrm>
           <a:prstGeom prst="rect">
             <a:avLst/>
@@ -5251,7 +5255,7 @@
           <a:lstStyle/>
           <a:p>
             <a:pPr>
-              <a:defRPr sz="950" b="1">
+              <a:defRPr sz="900" b="1">
                 <a:solidFill>
                   <a:srgbClr val="4EA8DE"/>
                 </a:solidFill>
@@ -5259,22 +5263,556 @@
               </a:defRPr>
             </a:pPr>
             <a:r>
-              <a:t>OPERATIONAL ANALYST WORKSTATION · CASE 01 CONTROLLED VALIDATION</a:t>
-            </a:r>
-          </a:p>
-          <a:p>
-            <a:r>
-              <a:rPr sz="750">
-                <a:solidFill>
-                  <a:srgbClr val="94A3B8"/>
-                </a:solidFill>
-                <a:latin typeface="Consolas"/>
-              </a:rPr>
-              <a:t>QUERY HYPOTHESIS: “new construction and buildings”  |  TILE: 256×256 (65,536 px)  |  10M GSD  |  AIR-GAPPED</a:t>
-            </a:r>
-          </a:p>
-        </p:txBody>
-      </p:sp>
+              <a:t>COMPARISON: STATUS QUO VS. TERRAE INVESTIGATION CONSOLE</a:t>
+            </a:r>
+          </a:p>
+        </p:txBody>
+      </p:sp>
+      <p:graphicFrame>
+        <p:nvGraphicFramePr>
+          <p:cNvPr id="19" name="Table 18"/>
+          <p:cNvGraphicFramePr>
+            <a:graphicFrameLocks noGrp="1"/>
+          </p:cNvGraphicFramePr>
+          <p:nvPr/>
+        </p:nvGraphicFramePr>
+        <p:xfrm>
+          <a:off x="4828032" y="2487168"/>
+          <a:ext cx="6629400" cy="1874519"/>
+        </p:xfrm>
+        <a:graphic>
+          <a:graphicData uri="http://schemas.openxmlformats.org/drawingml/2006/table">
+            <a:tbl>
+              <a:tblPr firstRow="1" bandRow="1">
+                <a:tableStyleId>{5C22544A-7EE6-4342-B048-85BDC9FD1C3A}</a:tableStyleId>
+              </a:tblPr>
+              <a:tblGrid>
+                <a:gridCol w="1600200"/>
+                <a:gridCol w="2423160"/>
+                <a:gridCol w="2606040"/>
+              </a:tblGrid>
+              <a:tr h="267788">
+                <a:tc>
+                  <a:txBody>
+                    <a:bodyPr/>
+                    <a:lstStyle/>
+                    <a:p>
+                      <a:pPr>
+                        <a:defRPr sz="740" b="1">
+                          <a:solidFill>
+                            <a:srgbClr val="C5A869"/>
+                          </a:solidFill>
+                          <a:latin typeface="Segoe UI"/>
+                        </a:defRPr>
+                      </a:pPr>
+                      <a:r>
+                        <a:t>Dimension</a:t>
+                      </a:r>
+                    </a:p>
+                  </a:txBody>
+                  <a:tcPr marL="27432" marR="27432" marT="27432" marB="27432">
+                    <a:solidFill>
+                      <a:srgbClr val="171F30"/>
+                    </a:solidFill>
+                  </a:tcPr>
+                </a:tc>
+                <a:tc>
+                  <a:txBody>
+                    <a:bodyPr/>
+                    <a:lstStyle/>
+                    <a:p>
+                      <a:pPr>
+                        <a:defRPr sz="740" b="1">
+                          <a:solidFill>
+                            <a:srgbClr val="C5A869"/>
+                          </a:solidFill>
+                          <a:latin typeface="Segoe UI"/>
+                        </a:defRPr>
+                      </a:pPr>
+                      <a:r>
+                        <a:t>Status Quo Change Detector</a:t>
+                      </a:r>
+                    </a:p>
+                  </a:txBody>
+                  <a:tcPr marL="27432" marR="27432" marT="27432" marB="27432">
+                    <a:solidFill>
+                      <a:srgbClr val="171F30"/>
+                    </a:solidFill>
+                  </a:tcPr>
+                </a:tc>
+                <a:tc>
+                  <a:txBody>
+                    <a:bodyPr/>
+                    <a:lstStyle/>
+                    <a:p>
+                      <a:pPr>
+                        <a:defRPr sz="740" b="1">
+                          <a:solidFill>
+                            <a:srgbClr val="C5A869"/>
+                          </a:solidFill>
+                          <a:latin typeface="Segoe UI"/>
+                        </a:defRPr>
+                      </a:pPr>
+                      <a:r>
+                        <a:t>TERRAE Investigation Console</a:t>
+                      </a:r>
+                    </a:p>
+                  </a:txBody>
+                  <a:tcPr marL="27432" marR="27432" marT="27432" marB="27432">
+                    <a:solidFill>
+                      <a:srgbClr val="171F30"/>
+                    </a:solidFill>
+                  </a:tcPr>
+                </a:tc>
+              </a:tr>
+              <a:tr h="267788">
+                <a:tc>
+                  <a:txBody>
+                    <a:bodyPr/>
+                    <a:lstStyle/>
+                    <a:p>
+                      <a:pPr>
+                        <a:defRPr sz="680" b="1">
+                          <a:solidFill>
+                            <a:srgbClr val="F5F3ED"/>
+                          </a:solidFill>
+                          <a:latin typeface="Segoe UI"/>
+                        </a:defRPr>
+                      </a:pPr>
+                      <a:r>
+                        <a:t>Search &amp; Discovery</a:t>
+                      </a:r>
+                    </a:p>
+                  </a:txBody>
+                  <a:tcPr marL="27432" marR="27432" marT="27432" marB="27432">
+                    <a:solidFill>
+                      <a:srgbClr val="111724"/>
+                    </a:solidFill>
+                  </a:tcPr>
+                </a:tc>
+                <a:tc>
+                  <a:txBody>
+                    <a:bodyPr/>
+                    <a:lstStyle/>
+                    <a:p>
+                      <a:pPr>
+                        <a:defRPr sz="680">
+                          <a:solidFill>
+                            <a:srgbClr val="94A3B8"/>
+                          </a:solidFill>
+                          <a:latin typeface="Segoe UI"/>
+                        </a:defRPr>
+                      </a:pPr>
+                      <a:r>
+                        <a:t>Manual coordinate bounding &amp; catalog spreadsheets</a:t>
+                      </a:r>
+                    </a:p>
+                  </a:txBody>
+                  <a:tcPr marL="27432" marR="27432" marT="27432" marB="27432">
+                    <a:solidFill>
+                      <a:srgbClr val="111724"/>
+                    </a:solidFill>
+                  </a:tcPr>
+                </a:tc>
+                <a:tc>
+                  <a:txBody>
+                    <a:bodyPr/>
+                    <a:lstStyle/>
+                    <a:p>
+                      <a:pPr>
+                        <a:defRPr sz="680">
+                          <a:solidFill>
+                            <a:srgbClr val="4EA8DE"/>
+                          </a:solidFill>
+                          <a:latin typeface="Segoe UI"/>
+                        </a:defRPr>
+                      </a:pPr>
+                      <a:r>
+                        <a:t>RemoteCLIP natural-language cross-modal search</a:t>
+                      </a:r>
+                    </a:p>
+                  </a:txBody>
+                  <a:tcPr marL="27432" marR="27432" marT="27432" marB="27432">
+                    <a:solidFill>
+                      <a:srgbClr val="111724"/>
+                    </a:solidFill>
+                  </a:tcPr>
+                </a:tc>
+              </a:tr>
+              <a:tr h="267788">
+                <a:tc>
+                  <a:txBody>
+                    <a:bodyPr/>
+                    <a:lstStyle/>
+                    <a:p>
+                      <a:pPr>
+                        <a:defRPr sz="680" b="1">
+                          <a:solidFill>
+                            <a:srgbClr val="F5F3ED"/>
+                          </a:solidFill>
+                          <a:latin typeface="Segoe UI"/>
+                        </a:defRPr>
+                      </a:pPr>
+                      <a:r>
+                        <a:t>Change Analysis</a:t>
+                      </a:r>
+                    </a:p>
+                  </a:txBody>
+                  <a:tcPr marL="27432" marR="27432" marT="27432" marB="27432">
+                    <a:solidFill>
+                      <a:srgbClr val="171F30"/>
+                    </a:solidFill>
+                  </a:tcPr>
+                </a:tc>
+                <a:tc>
+                  <a:txBody>
+                    <a:bodyPr/>
+                    <a:lstStyle/>
+                    <a:p>
+                      <a:pPr>
+                        <a:defRPr sz="680">
+                          <a:solidFill>
+                            <a:srgbClr val="94A3B8"/>
+                          </a:solidFill>
+                          <a:latin typeface="Segoe UI"/>
+                        </a:defRPr>
+                      </a:pPr>
+                      <a:r>
+                        <a:t>Naive 2-date pixel subtraction (T0 - T1)</a:t>
+                      </a:r>
+                    </a:p>
+                  </a:txBody>
+                  <a:tcPr marL="27432" marR="27432" marT="27432" marB="27432">
+                    <a:solidFill>
+                      <a:srgbClr val="171F30"/>
+                    </a:solidFill>
+                  </a:tcPr>
+                </a:tc>
+                <a:tc>
+                  <a:txBody>
+                    <a:bodyPr/>
+                    <a:lstStyle/>
+                    <a:p>
+                      <a:pPr>
+                        <a:defRPr sz="680">
+                          <a:solidFill>
+                            <a:srgbClr val="4EA8DE"/>
+                          </a:solidFill>
+                          <a:latin typeface="Segoe UI"/>
+                        </a:defRPr>
+                      </a:pPr>
+                      <a:r>
+                        <a:t>Calibrated multi-band differencing (τ = 0.15)</a:t>
+                      </a:r>
+                    </a:p>
+                  </a:txBody>
+                  <a:tcPr marL="27432" marR="27432" marT="27432" marB="27432">
+                    <a:solidFill>
+                      <a:srgbClr val="171F30"/>
+                    </a:solidFill>
+                  </a:tcPr>
+                </a:tc>
+              </a:tr>
+              <a:tr h="267788">
+                <a:tc>
+                  <a:txBody>
+                    <a:bodyPr/>
+                    <a:lstStyle/>
+                    <a:p>
+                      <a:pPr>
+                        <a:defRPr sz="680" b="1">
+                          <a:solidFill>
+                            <a:srgbClr val="F5F3ED"/>
+                          </a:solidFill>
+                          <a:latin typeface="Segoe UI"/>
+                        </a:defRPr>
+                      </a:pPr>
+                      <a:r>
+                        <a:t>Attribution Support</a:t>
+                      </a:r>
+                    </a:p>
+                  </a:txBody>
+                  <a:tcPr marL="27432" marR="27432" marT="27432" marB="27432">
+                    <a:solidFill>
+                      <a:srgbClr val="111724"/>
+                    </a:solidFill>
+                  </a:tcPr>
+                </a:tc>
+                <a:tc>
+                  <a:txBody>
+                    <a:bodyPr/>
+                    <a:lstStyle/>
+                    <a:p>
+                      <a:pPr>
+                        <a:defRPr sz="680">
+                          <a:solidFill>
+                            <a:srgbClr val="94A3B8"/>
+                          </a:solidFill>
+                          <a:latin typeface="Segoe UI"/>
+                        </a:defRPr>
+                      </a:pPr>
+                      <a:r>
+                        <a:t>Uncalibrated binary changed pixel mask</a:t>
+                      </a:r>
+                    </a:p>
+                  </a:txBody>
+                  <a:tcPr marL="27432" marR="27432" marT="27432" marB="27432">
+                    <a:solidFill>
+                      <a:srgbClr val="111724"/>
+                    </a:solidFill>
+                  </a:tcPr>
+                </a:tc>
+                <a:tc>
+                  <a:txBody>
+                    <a:bodyPr/>
+                    <a:lstStyle/>
+                    <a:p>
+                      <a:pPr>
+                        <a:defRPr sz="680">
+                          <a:solidFill>
+                            <a:srgbClr val="4EA8DE"/>
+                          </a:solidFill>
+                          <a:latin typeface="Segoe UI"/>
+                        </a:defRPr>
+                      </a:pPr>
+                      <a:r>
+                        <a:t>Decomposed physical support across 6 signatures</a:t>
+                      </a:r>
+                    </a:p>
+                  </a:txBody>
+                  <a:tcPr marL="27432" marR="27432" marT="27432" marB="27432">
+                    <a:solidFill>
+                      <a:srgbClr val="111724"/>
+                    </a:solidFill>
+                  </a:tcPr>
+                </a:tc>
+              </a:tr>
+              <a:tr h="267788">
+                <a:tc>
+                  <a:txBody>
+                    <a:bodyPr/>
+                    <a:lstStyle/>
+                    <a:p>
+                      <a:pPr>
+                        <a:defRPr sz="680" b="1">
+                          <a:solidFill>
+                            <a:srgbClr val="F5F3ED"/>
+                          </a:solidFill>
+                          <a:latin typeface="Segoe UI"/>
+                        </a:defRPr>
+                      </a:pPr>
+                      <a:r>
+                        <a:t>Temporal Verification</a:t>
+                      </a:r>
+                    </a:p>
+                  </a:txBody>
+                  <a:tcPr marL="27432" marR="27432" marT="27432" marB="27432">
+                    <a:solidFill>
+                      <a:srgbClr val="171F30"/>
+                    </a:solidFill>
+                  </a:tcPr>
+                </a:tc>
+                <a:tc>
+                  <a:txBody>
+                    <a:bodyPr/>
+                    <a:lstStyle/>
+                    <a:p>
+                      <a:pPr>
+                        <a:defRPr sz="680">
+                          <a:solidFill>
+                            <a:srgbClr val="94A3B8"/>
+                          </a:solidFill>
+                          <a:latin typeface="Segoe UI"/>
+                        </a:defRPr>
+                      </a:pPr>
+                      <a:r>
+                        <a:t>Single interval; high seasonal false alarms</a:t>
+                      </a:r>
+                    </a:p>
+                  </a:txBody>
+                  <a:tcPr marL="27432" marR="27432" marT="27432" marB="27432">
+                    <a:solidFill>
+                      <a:srgbClr val="171F30"/>
+                    </a:solidFill>
+                  </a:tcPr>
+                </a:tc>
+                <a:tc>
+                  <a:txBody>
+                    <a:bodyPr/>
+                    <a:lstStyle/>
+                    <a:p>
+                      <a:pPr>
+                        <a:defRPr sz="680">
+                          <a:solidFill>
+                            <a:srgbClr val="4EA8DE"/>
+                          </a:solidFill>
+                          <a:latin typeface="Segoe UI"/>
+                        </a:defRPr>
+                      </a:pPr>
+                      <a:r>
+                        <a:t>3-date MECE trajectory persistence test</a:t>
+                      </a:r>
+                    </a:p>
+                  </a:txBody>
+                  <a:tcPr marL="27432" marR="27432" marT="27432" marB="27432">
+                    <a:solidFill>
+                      <a:srgbClr val="171F30"/>
+                    </a:solidFill>
+                  </a:tcPr>
+                </a:tc>
+              </a:tr>
+              <a:tr h="267788">
+                <a:tc>
+                  <a:txBody>
+                    <a:bodyPr/>
+                    <a:lstStyle/>
+                    <a:p>
+                      <a:pPr>
+                        <a:defRPr sz="680" b="1">
+                          <a:solidFill>
+                            <a:srgbClr val="F5F3ED"/>
+                          </a:solidFill>
+                          <a:latin typeface="Segoe UI"/>
+                        </a:defRPr>
+                      </a:pPr>
+                      <a:r>
+                        <a:t>Decision Integrity</a:t>
+                      </a:r>
+                    </a:p>
+                  </a:txBody>
+                  <a:tcPr marL="27432" marR="27432" marT="27432" marB="27432">
+                    <a:solidFill>
+                      <a:srgbClr val="111724"/>
+                    </a:solidFill>
+                  </a:tcPr>
+                </a:tc>
+                <a:tc>
+                  <a:txBody>
+                    <a:bodyPr/>
+                    <a:lstStyle/>
+                    <a:p>
+                      <a:pPr>
+                        <a:defRPr sz="680">
+                          <a:solidFill>
+                            <a:srgbClr val="94A3B8"/>
+                          </a:solidFill>
+                          <a:latin typeface="Segoe UI"/>
+                        </a:defRPr>
+                      </a:pPr>
+                      <a:r>
+                        <a:t>Forced binary classification (Change / No Change)</a:t>
+                      </a:r>
+                    </a:p>
+                  </a:txBody>
+                  <a:tcPr marL="27432" marR="27432" marT="27432" marB="27432">
+                    <a:solidFill>
+                      <a:srgbClr val="111724"/>
+                    </a:solidFill>
+                  </a:tcPr>
+                </a:tc>
+                <a:tc>
+                  <a:txBody>
+                    <a:bodyPr/>
+                    <a:lstStyle/>
+                    <a:p>
+                      <a:pPr>
+                        <a:defRPr sz="680">
+                          <a:solidFill>
+                            <a:srgbClr val="4EA8DE"/>
+                          </a:solidFill>
+                          <a:latin typeface="Segoe UI"/>
+                        </a:defRPr>
+                      </a:pPr>
+                      <a:r>
+                        <a:t>Conservative verdicts: SUPPORTED / REVIEW / ABSTAIN</a:t>
+                      </a:r>
+                    </a:p>
+                  </a:txBody>
+                  <a:tcPr marL="27432" marR="27432" marT="27432" marB="27432">
+                    <a:solidFill>
+                      <a:srgbClr val="111724"/>
+                    </a:solidFill>
+                  </a:tcPr>
+                </a:tc>
+              </a:tr>
+              <a:tr h="267791">
+                <a:tc>
+                  <a:txBody>
+                    <a:bodyPr/>
+                    <a:lstStyle/>
+                    <a:p>
+                      <a:pPr>
+                        <a:defRPr sz="680" b="1">
+                          <a:solidFill>
+                            <a:srgbClr val="F5F3ED"/>
+                          </a:solidFill>
+                          <a:latin typeface="Segoe UI"/>
+                        </a:defRPr>
+                      </a:pPr>
+                      <a:r>
+                        <a:t>Enclave Security</a:t>
+                      </a:r>
+                    </a:p>
+                  </a:txBody>
+                  <a:tcPr marL="27432" marR="27432" marT="27432" marB="27432">
+                    <a:solidFill>
+                      <a:srgbClr val="171F30"/>
+                    </a:solidFill>
+                  </a:tcPr>
+                </a:tc>
+                <a:tc>
+                  <a:txBody>
+                    <a:bodyPr/>
+                    <a:lstStyle/>
+                    <a:p>
+                      <a:pPr>
+                        <a:defRPr sz="680">
+                          <a:solidFill>
+                            <a:srgbClr val="94A3B8"/>
+                          </a:solidFill>
+                          <a:latin typeface="Segoe UI"/>
+                        </a:defRPr>
+                      </a:pPr>
+                      <a:r>
+                        <a:t>Cloud API dependence &amp; telemetry leakage</a:t>
+                      </a:r>
+                    </a:p>
+                  </a:txBody>
+                  <a:tcPr marL="27432" marR="27432" marT="27432" marB="27432">
+                    <a:solidFill>
+                      <a:srgbClr val="171F30"/>
+                    </a:solidFill>
+                  </a:tcPr>
+                </a:tc>
+                <a:tc>
+                  <a:txBody>
+                    <a:bodyPr/>
+                    <a:lstStyle/>
+                    <a:p>
+                      <a:pPr>
+                        <a:defRPr sz="680">
+                          <a:solidFill>
+                            <a:srgbClr val="4EA8DE"/>
+                          </a:solidFill>
+                          <a:latin typeface="Segoe UI"/>
+                        </a:defRPr>
+                      </a:pPr>
+                      <a:r>
+                        <a:t>100% offline air-gapped on-premises execution</a:t>
+                      </a:r>
+                    </a:p>
+                  </a:txBody>
+                  <a:tcPr marL="27432" marR="27432" marT="27432" marB="27432">
+                    <a:solidFill>
+                      <a:srgbClr val="171F30"/>
+                    </a:solidFill>
+                  </a:tcPr>
+                </a:tc>
+              </a:tr>
+            </a:tbl>
+          </a:graphicData>
+        </a:graphic>
+      </p:graphicFrame>
       <p:pic>
         <p:nvPicPr>
           <p:cNvPr id="20" name="Picture 19" descr="PROD_09_WORKSTATION_1920.png"/>
@@ -5291,8 +5829,8 @@
         </p:blipFill>
         <p:spPr>
           <a:xfrm>
-            <a:off x="4754880" y="2697480"/>
-            <a:ext cx="6675120" cy="2514600"/>
+            <a:off x="4828032" y="4462272"/>
+            <a:ext cx="2148840" cy="1280160"/>
           </a:xfrm>
           <a:prstGeom prst="rect">
             <a:avLst/>
@@ -5301,24 +5839,75 @@
       </p:pic>
       <p:sp>
         <p:nvSpPr>
-          <p:cNvPr id="21" name="Rounded Rectangle 20"/>
+          <p:cNvPr id="21" name="TextBox 20"/>
+          <p:cNvSpPr txBox="1"/>
+          <p:nvPr/>
+        </p:nvSpPr>
+        <p:spPr>
+          <a:xfrm>
+            <a:off x="7086600" y="4462272"/>
+            <a:ext cx="4206240" cy="1280160"/>
+          </a:xfrm>
+          <a:prstGeom prst="rect">
+            <a:avLst/>
+          </a:prstGeom>
+          <a:noFill/>
+        </p:spPr>
+        <p:txBody>
+          <a:bodyPr wrap="square" lIns="0" tIns="0" rIns="0" bIns="0">
+            <a:spAutoFit/>
+          </a:bodyPr>
+          <a:lstStyle/>
+          <a:p>
+            <a:pPr>
+              <a:defRPr sz="760" b="1">
+                <a:solidFill>
+                  <a:srgbClr val="C5A869"/>
+                </a:solidFill>
+                <a:latin typeface="Consolas"/>
+              </a:defRPr>
+            </a:pPr>
+            <a:r>
+              <a:t>AUTHENTIC CONSOLE TELEMETRY (CASE 01):</a:t>
+            </a:r>
+          </a:p>
+          <a:p>
+            <a:r>
+              <a:rPr sz="700">
+                <a:solidFill>
+                  <a:srgbClr val="F5F3ED"/>
+                </a:solidFill>
+                <a:latin typeface="Segoe UI"/>
+              </a:rPr>
+              <a:t>• Footprint: 256×256 tile | 7,549 px Changed (11.5%)
+• Spatial Coherence: 99.7% | Connected Components: 24
+• Attribution Support: Built 97.1% | Veg 0.5% | Seasonal 0.5%
+• Temporal Trajectory: LATE_ONSET_CHANGE (11.48%)
+• Final Verdict: ✔ SUPPORTED · AFFIRMATIVE PROOF</a:t>
+            </a:r>
+          </a:p>
+        </p:txBody>
+      </p:sp>
+      <p:sp>
+        <p:nvSpPr>
+          <p:cNvPr id="22" name="Rounded Rectangle 21"/>
           <p:cNvSpPr/>
           <p:nvPr/>
         </p:nvSpPr>
         <p:spPr>
           <a:xfrm>
-            <a:off x="4754880" y="5303520"/>
-            <a:ext cx="6675120" cy="1005840"/>
+            <a:off x="594360" y="5925312"/>
+            <a:ext cx="11002975" cy="457200"/>
           </a:xfrm>
           <a:prstGeom prst="roundRect">
             <a:avLst/>
           </a:prstGeom>
           <a:solidFill>
-            <a:srgbClr val="171F30"/>
+            <a:srgbClr val="0F1726"/>
           </a:solidFill>
           <a:ln w="12700">
             <a:solidFill>
-              <a:srgbClr val="C5A869"/>
+              <a:srgbClr val="25324A"/>
             </a:solidFill>
           </a:ln>
         </p:spPr>
@@ -5346,14 +5935,14 @@
       </p:sp>
       <p:sp>
         <p:nvSpPr>
-          <p:cNvPr id="22" name="TextBox 21"/>
+          <p:cNvPr id="23" name="TextBox 22"/>
           <p:cNvSpPr txBox="1"/>
           <p:nvPr/>
         </p:nvSpPr>
         <p:spPr>
           <a:xfrm>
-            <a:off x="4892040" y="5349240"/>
-            <a:ext cx="6400800" cy="914400"/>
+            <a:off x="685800" y="5980176"/>
+            <a:ext cx="10820095" cy="347472"/>
           </a:xfrm>
           <a:prstGeom prst="rect">
             <a:avLst/>
@@ -5361,80 +5950,29 @@
           <a:noFill/>
         </p:spPr>
         <p:txBody>
-          <a:bodyPr wrap="square" lIns="0" tIns="0" rIns="0" bIns="0">
+          <a:bodyPr wrap="none" lIns="0" tIns="0" rIns="0" bIns="0">
             <a:spAutoFit/>
           </a:bodyPr>
           <a:lstStyle/>
           <a:p>
-            <a:pPr>
-              <a:defRPr sz="800" b="1">
+            <a:pPr algn="ctr"/>
+            <a:r>
+              <a:rPr sz="800" b="1">
                 <a:solidFill>
                   <a:srgbClr val="C5A869"/>
                 </a:solidFill>
                 <a:latin typeface="Consolas"/>
-              </a:defRPr>
-            </a:pPr>
-            <a:r>
-              <a:t>EVIDENCE ATTRIBUTION CHAIN:  7,549 px Changed (11.5%)  |  Spatial Coherence: 99.7%  |  Component Count: 1</a:t>
-            </a:r>
-          </a:p>
-          <a:p>
-            <a:pPr>
-              <a:spcBef>
-                <a:spcPts val="200"/>
-              </a:spcBef>
-            </a:pPr>
-            <a:r>
-              <a:rPr sz="750">
-                <a:solidFill>
-                  <a:srgbClr val="F5F3ED"/>
-                </a:solidFill>
-                <a:latin typeface="Segoe UI"/>
-              </a:rPr>
-              <a:t>▪ ΔNIR Mean: -1.54% (Low NIR Reflectance (Non-Vegetative))   </a:t>
-            </a:r>
-            <a:r>
-              <a:rPr sz="750">
-                <a:solidFill>
-                  <a:srgbClr val="F5F3ED"/>
-                </a:solidFill>
-                <a:latin typeface="Segoe UI"/>
-              </a:rPr>
-              <a:t>▪ ΔRed Mean: +21.52% (Strong Concrete/Built Reflectance)   </a:t>
-            </a:r>
-            <a:r>
-              <a:rPr sz="750">
-                <a:solidFill>
-                  <a:srgbClr val="F5F3ED"/>
-                </a:solidFill>
-                <a:latin typeface="Segoe UI"/>
-              </a:rPr>
-              <a:t>▪ ΔNDVI: -0.75 (Severe Canopy Depletion)   </a:t>
-            </a:r>
-            <a:r>
-              <a:rPr sz="750">
-                <a:solidFill>
-                  <a:srgbClr val="F5F3ED"/>
-                </a:solidFill>
-                <a:latin typeface="Segoe UI"/>
-              </a:rPr>
-              <a:t>▪ Built-Surface Support: 97.1% (Affirmative Heuristic Fit)   </a:t>
-            </a:r>
-          </a:p>
-          <a:p>
-            <a:pPr>
-              <a:spcBef>
-                <a:spcPts val="300"/>
-              </a:spcBef>
-            </a:pPr>
-            <a:r>
-              <a:rPr sz="800" b="1">
-                <a:solidFill>
-                  <a:srgbClr val="52B788"/>
+              </a:rPr>
+              <a:t>LIVE SYSTEM ACCESS:   </a:t>
+            </a:r>
+            <a:r>
+              <a:rPr sz="760">
+                <a:solidFill>
+                  <a:srgbClr val="4EA8DE"/>
                 </a:solidFill>
                 <a:latin typeface="Consolas"/>
               </a:rPr>
-              <a:t>SYSTEM VERDICT: ✔ SUPPORTED · AFFIRMATIVE CONCLUSION  (High Spatial Coherence + Consistent Multi-Spectral Attribution)</a:t>
+              <a:t>Console: https://terrae-geospatial-intelligence.vercel.app   |   GitHub: https://github.com/PhantomCipher13/terrae-geospatial-intelligence   |   Report: REPORT.md</a:t>
             </a:r>
           </a:p>
         </p:txBody>
@@ -5508,8 +6046,8 @@
         </p:nvSpPr>
         <p:spPr>
           <a:xfrm>
-            <a:off x="594360" y="292608"/>
-            <a:ext cx="11002975" cy="27432"/>
+            <a:off x="594360" y="256032"/>
+            <a:ext cx="11002975" cy="22860"/>
           </a:xfrm>
           <a:prstGeom prst="rect">
             <a:avLst/>
@@ -5551,8 +6089,8 @@
         </p:nvSpPr>
         <p:spPr>
           <a:xfrm>
-            <a:off x="594360" y="347472"/>
-            <a:ext cx="7772400" cy="274320"/>
+            <a:off x="594360" y="301752"/>
+            <a:ext cx="7772400" cy="256032"/>
           </a:xfrm>
           <a:prstGeom prst="rect">
             <a:avLst/>
@@ -5566,7 +6104,7 @@
           <a:lstStyle/>
           <a:p>
             <a:pPr>
-              <a:defRPr sz="850" b="1">
+              <a:defRPr sz="800" b="1">
                 <a:solidFill>
                   <a:srgbClr val="C5A869"/>
                 </a:solidFill>
@@ -5574,7 +6112,7 @@
               </a:defRPr>
             </a:pPr>
             <a:r>
-              <a:t>SMART INDIA HACKATHON 2026 · PS: SIH26227 · THEME: SPACE TECHNOLOGY · MINISTRY OF DEFENCE (MOD) / INDIAN ARMY — DGIS</a:t>
+              <a:t>SMART INDIA HACKATHON 2026 · PS: SIH26227 · SPACE TECHNOLOGY · SOFTWARE · MINISTRY OF DEFENCE / INDIAN ARMY — DGIS</a:t>
             </a:r>
           </a:p>
         </p:txBody>
@@ -5587,8 +6125,8 @@
         </p:nvSpPr>
         <p:spPr>
           <a:xfrm>
-            <a:off x="8412480" y="347472"/>
-            <a:ext cx="3182112" cy="274320"/>
+            <a:off x="8412480" y="301752"/>
+            <a:ext cx="3182112" cy="256032"/>
           </a:xfrm>
           <a:prstGeom prst="rect">
             <a:avLst/>
@@ -5603,16 +6141,16 @@
           <a:p>
             <a:pPr algn="r"/>
             <a:r>
-              <a:rPr sz="850">
+              <a:rPr sz="800">
                 <a:solidFill>
                   <a:srgbClr val="94A3B8"/>
                 </a:solidFill>
                 <a:latin typeface="Consolas"/>
               </a:rPr>
-              <a:t>TEAM: Quantumcrew | </a:t>
-            </a:r>
-            <a:r>
-              <a:rPr sz="850" b="1">
+              <a:t>TEAM: Quantumcrew  |  </a:t>
+            </a:r>
+            <a:r>
+              <a:rPr sz="800" b="1">
                 <a:solidFill>
                   <a:srgbClr val="4EA8DE"/>
                 </a:solidFill>
@@ -5631,8 +6169,8 @@
         </p:nvSpPr>
         <p:spPr>
           <a:xfrm>
-            <a:off x="594360" y="594360"/>
-            <a:ext cx="11002975" cy="594360"/>
+            <a:off x="594360" y="548640"/>
+            <a:ext cx="11002975" cy="566928"/>
           </a:xfrm>
           <a:prstGeom prst="rect">
             <a:avLst/>
@@ -5646,7 +6184,7 @@
           <a:lstStyle/>
           <a:p>
             <a:pPr>
-              <a:defRPr sz="1750" b="1">
+              <a:defRPr sz="1650" b="1">
                 <a:solidFill>
                   <a:srgbClr val="F5F3ED"/>
                 </a:solidFill>
@@ -5654,12 +6192,12 @@
               </a:defRPr>
             </a:pPr>
             <a:r>
-              <a:t>ONE INVESTIGATION. MULTIPLE INDEPENDENT EVIDENCE STREAMS.</a:t>
+              <a:t>03 — TECHNICAL APPROACH / METHODOLOGY &amp; PROCESS OF IMPLEMENTATION</a:t>
             </a:r>
           </a:p>
           <a:p>
             <a:pPr>
-              <a:defRPr sz="1000">
+              <a:defRPr sz="950">
                 <a:solidFill>
                   <a:srgbClr val="94A3B8"/>
                 </a:solidFill>
@@ -5667,7 +6205,7 @@
               </a:defRPr>
             </a:pPr>
             <a:r>
-              <a:t>Decoupled multi-stage pipeline combining vision-language cross-modal embeddings with deterministic physical optics.</a:t>
+              <a:t>SYSTEM ARCHITECTURE &amp; MULTI-STREAM EVIDENCE PIPELINE</a:t>
             </a:r>
           </a:p>
         </p:txBody>
@@ -5680,8 +6218,8 @@
         </p:nvSpPr>
         <p:spPr>
           <a:xfrm>
-            <a:off x="594360" y="6537960"/>
-            <a:ext cx="11002975" cy="228600"/>
+            <a:off x="594360" y="6565392"/>
+            <a:ext cx="11002975" cy="201168"/>
           </a:xfrm>
           <a:prstGeom prst="rect">
             <a:avLst/>
@@ -5695,25 +6233,25 @@
           <a:lstStyle/>
           <a:p>
             <a:r>
-              <a:rPr sz="800">
+              <a:rPr sz="780">
                 <a:solidFill>
                   <a:srgbClr val="64748B"/>
                 </a:solidFill>
                 <a:latin typeface="Segoe UI"/>
               </a:rPr>
-              <a:t>GEOAI — Evidence-Based Satellite Investigation Workstation  |  Ministry of Defence (MoD) / Indian Army — DGIS  |  SIH 2026 Submission</a:t>
-            </a:r>
-            <a:r>
-              <a:rPr sz="800">
+              <a:t>TERRAE — Earth Intelligence Satellite Investigation Console  |  Ministry of Defence / Indian Army — DGIS  |  SIH 2026 Submission</a:t>
+            </a:r>
+            <a:r>
+              <a:rPr sz="780">
                 <a:solidFill>
                   <a:srgbClr val="64748B"/>
                 </a:solidFill>
                 <a:latin typeface="Segoe UI"/>
               </a:rPr>
-              <a:t>                                                                    Live Console: </a:t>
-            </a:r>
-            <a:r>
-              <a:rPr sz="800">
+              <a:t>                                                         Live Console: </a:t>
+            </a:r>
+            <a:r>
+              <a:rPr sz="780">
                 <a:solidFill>
                   <a:srgbClr val="4EA8DE"/>
                 </a:solidFill>
@@ -5733,8 +6271,635 @@
         </p:nvSpPr>
         <p:spPr>
           <a:xfrm>
-            <a:off x="594360" y="1280160"/>
-            <a:ext cx="7406640" cy="1234440"/>
+            <a:off x="594360" y="1188720"/>
+            <a:ext cx="3291840" cy="5193792"/>
+          </a:xfrm>
+          <a:prstGeom prst="roundRect">
+            <a:avLst/>
+          </a:prstGeom>
+          <a:solidFill>
+            <a:srgbClr val="111724"/>
+          </a:solidFill>
+          <a:ln w="12700">
+            <a:solidFill>
+              <a:srgbClr val="C5A869"/>
+            </a:solidFill>
+          </a:ln>
+        </p:spPr>
+        <p:style>
+          <a:lnRef idx="1">
+            <a:schemeClr val="accent1"/>
+          </a:lnRef>
+          <a:fillRef idx="3">
+            <a:schemeClr val="accent1"/>
+          </a:fillRef>
+          <a:effectRef idx="2">
+            <a:schemeClr val="accent1"/>
+          </a:effectRef>
+          <a:fontRef idx="minor">
+            <a:schemeClr val="lt1"/>
+          </a:fontRef>
+        </p:style>
+        <p:txBody>
+          <a:bodyPr rtlCol="0" anchor="ctr"/>
+          <a:lstStyle/>
+          <a:p>
+            <a:pPr algn="ctr"/>
+          </a:p>
+        </p:txBody>
+      </p:sp>
+      <p:sp>
+        <p:nvSpPr>
+          <p:cNvPr id="9" name="TextBox 8"/>
+          <p:cNvSpPr txBox="1"/>
+          <p:nvPr/>
+        </p:nvSpPr>
+        <p:spPr>
+          <a:xfrm>
+            <a:off x="731520" y="1298448"/>
+            <a:ext cx="3017520" cy="320040"/>
+          </a:xfrm>
+          <a:prstGeom prst="rect">
+            <a:avLst/>
+          </a:prstGeom>
+          <a:noFill/>
+        </p:spPr>
+        <p:txBody>
+          <a:bodyPr wrap="none" lIns="0" tIns="0" rIns="0" bIns="0">
+            <a:spAutoFit/>
+          </a:bodyPr>
+          <a:lstStyle/>
+          <a:p>
+            <a:pPr>
+              <a:defRPr sz="900" b="1">
+                <a:solidFill>
+                  <a:srgbClr val="C5A869"/>
+                </a:solidFill>
+                <a:latin typeface="Consolas"/>
+              </a:defRPr>
+            </a:pPr>
+            <a:r>
+              <a:t>TERRAE INVESTIGATION LOOP</a:t>
+            </a:r>
+          </a:p>
+        </p:txBody>
+      </p:sp>
+      <p:sp>
+        <p:nvSpPr>
+          <p:cNvPr id="10" name="Rounded Rectangle 9"/>
+          <p:cNvSpPr/>
+          <p:nvPr/>
+        </p:nvSpPr>
+        <p:spPr>
+          <a:xfrm>
+            <a:off x="731520" y="1691640"/>
+            <a:ext cx="3017520" cy="658368"/>
+          </a:xfrm>
+          <a:prstGeom prst="roundRect">
+            <a:avLst/>
+          </a:prstGeom>
+          <a:solidFill>
+            <a:srgbClr val="171F30"/>
+          </a:solidFill>
+          <a:ln w="12700">
+            <a:solidFill>
+              <a:srgbClr val="25324A"/>
+            </a:solidFill>
+          </a:ln>
+        </p:spPr>
+        <p:style>
+          <a:lnRef idx="1">
+            <a:schemeClr val="accent1"/>
+          </a:lnRef>
+          <a:fillRef idx="3">
+            <a:schemeClr val="accent1"/>
+          </a:fillRef>
+          <a:effectRef idx="2">
+            <a:schemeClr val="accent1"/>
+          </a:effectRef>
+          <a:fontRef idx="minor">
+            <a:schemeClr val="lt1"/>
+          </a:fontRef>
+        </p:style>
+        <p:txBody>
+          <a:bodyPr rtlCol="0" anchor="ctr"/>
+          <a:lstStyle/>
+          <a:p>
+            <a:pPr algn="ctr"/>
+          </a:p>
+        </p:txBody>
+      </p:sp>
+      <p:sp>
+        <p:nvSpPr>
+          <p:cNvPr id="11" name="TextBox 10"/>
+          <p:cNvSpPr txBox="1"/>
+          <p:nvPr/>
+        </p:nvSpPr>
+        <p:spPr>
+          <a:xfrm>
+            <a:off x="822960" y="1746504"/>
+            <a:ext cx="2834640" cy="548640"/>
+          </a:xfrm>
+          <a:prstGeom prst="rect">
+            <a:avLst/>
+          </a:prstGeom>
+          <a:noFill/>
+        </p:spPr>
+        <p:txBody>
+          <a:bodyPr wrap="square" lIns="0" tIns="0" rIns="0" bIns="0">
+            <a:spAutoFit/>
+          </a:bodyPr>
+          <a:lstStyle/>
+          <a:p>
+            <a:r>
+              <a:rPr sz="780" b="1">
+                <a:solidFill>
+                  <a:srgbClr val="4EA8DE"/>
+                </a:solidFill>
+                <a:latin typeface="Consolas"/>
+              </a:rPr>
+              <a:t>01 / ASK: Analyst Natural Intent Formulation
+</a:t>
+            </a:r>
+          </a:p>
+          <a:p>
+            <a:r>
+              <a:rPr sz="700">
+                <a:solidFill>
+                  <a:srgbClr val="94A3B8"/>
+                </a:solidFill>
+                <a:latin typeface="Segoe UI"/>
+              </a:rPr>
+              <a:t>Parses text query without coordinates.</a:t>
+            </a:r>
+          </a:p>
+        </p:txBody>
+      </p:sp>
+      <p:sp>
+        <p:nvSpPr>
+          <p:cNvPr id="12" name="Rounded Rectangle 11"/>
+          <p:cNvSpPr/>
+          <p:nvPr/>
+        </p:nvSpPr>
+        <p:spPr>
+          <a:xfrm>
+            <a:off x="731520" y="2459736"/>
+            <a:ext cx="3017520" cy="658368"/>
+          </a:xfrm>
+          <a:prstGeom prst="roundRect">
+            <a:avLst/>
+          </a:prstGeom>
+          <a:solidFill>
+            <a:srgbClr val="171F30"/>
+          </a:solidFill>
+          <a:ln w="12700">
+            <a:solidFill>
+              <a:srgbClr val="25324A"/>
+            </a:solidFill>
+          </a:ln>
+        </p:spPr>
+        <p:style>
+          <a:lnRef idx="1">
+            <a:schemeClr val="accent1"/>
+          </a:lnRef>
+          <a:fillRef idx="3">
+            <a:schemeClr val="accent1"/>
+          </a:fillRef>
+          <a:effectRef idx="2">
+            <a:schemeClr val="accent1"/>
+          </a:effectRef>
+          <a:fontRef idx="minor">
+            <a:schemeClr val="lt1"/>
+          </a:fontRef>
+        </p:style>
+        <p:txBody>
+          <a:bodyPr rtlCol="0" anchor="ctr"/>
+          <a:lstStyle/>
+          <a:p>
+            <a:pPr algn="ctr"/>
+          </a:p>
+        </p:txBody>
+      </p:sp>
+      <p:sp>
+        <p:nvSpPr>
+          <p:cNvPr id="13" name="TextBox 12"/>
+          <p:cNvSpPr txBox="1"/>
+          <p:nvPr/>
+        </p:nvSpPr>
+        <p:spPr>
+          <a:xfrm>
+            <a:off x="822960" y="2514600"/>
+            <a:ext cx="2834640" cy="548640"/>
+          </a:xfrm>
+          <a:prstGeom prst="rect">
+            <a:avLst/>
+          </a:prstGeom>
+          <a:noFill/>
+        </p:spPr>
+        <p:txBody>
+          <a:bodyPr wrap="square" lIns="0" tIns="0" rIns="0" bIns="0">
+            <a:spAutoFit/>
+          </a:bodyPr>
+          <a:lstStyle/>
+          <a:p>
+            <a:r>
+              <a:rPr sz="780" b="1">
+                <a:solidFill>
+                  <a:srgbClr val="4EA8DE"/>
+                </a:solidFill>
+                <a:latin typeface="Consolas"/>
+              </a:rPr>
+              <a:t>02 / DISCOVER: Cross-Modal Semantic Retrieval
+</a:t>
+            </a:r>
+          </a:p>
+          <a:p>
+            <a:r>
+              <a:rPr sz="700">
+                <a:solidFill>
+                  <a:srgbClr val="94A3B8"/>
+                </a:solidFill>
+                <a:latin typeface="Segoe UI"/>
+              </a:rPr>
+              <a:t>RemoteCLIP ViT-B-32 + FAISS vector cosine.</a:t>
+            </a:r>
+          </a:p>
+        </p:txBody>
+      </p:sp>
+      <p:sp>
+        <p:nvSpPr>
+          <p:cNvPr id="14" name="Rounded Rectangle 13"/>
+          <p:cNvSpPr/>
+          <p:nvPr/>
+        </p:nvSpPr>
+        <p:spPr>
+          <a:xfrm>
+            <a:off x="731520" y="3227832"/>
+            <a:ext cx="3017520" cy="658368"/>
+          </a:xfrm>
+          <a:prstGeom prst="roundRect">
+            <a:avLst/>
+          </a:prstGeom>
+          <a:solidFill>
+            <a:srgbClr val="171F30"/>
+          </a:solidFill>
+          <a:ln w="12700">
+            <a:solidFill>
+              <a:srgbClr val="25324A"/>
+            </a:solidFill>
+          </a:ln>
+        </p:spPr>
+        <p:style>
+          <a:lnRef idx="1">
+            <a:schemeClr val="accent1"/>
+          </a:lnRef>
+          <a:fillRef idx="3">
+            <a:schemeClr val="accent1"/>
+          </a:fillRef>
+          <a:effectRef idx="2">
+            <a:schemeClr val="accent1"/>
+          </a:effectRef>
+          <a:fontRef idx="minor">
+            <a:schemeClr val="lt1"/>
+          </a:fontRef>
+        </p:style>
+        <p:txBody>
+          <a:bodyPr rtlCol="0" anchor="ctr"/>
+          <a:lstStyle/>
+          <a:p>
+            <a:pPr algn="ctr"/>
+          </a:p>
+        </p:txBody>
+      </p:sp>
+      <p:sp>
+        <p:nvSpPr>
+          <p:cNvPr id="15" name="TextBox 14"/>
+          <p:cNvSpPr txBox="1"/>
+          <p:nvPr/>
+        </p:nvSpPr>
+        <p:spPr>
+          <a:xfrm>
+            <a:off x="822960" y="3282696"/>
+            <a:ext cx="2834640" cy="548640"/>
+          </a:xfrm>
+          <a:prstGeom prst="rect">
+            <a:avLst/>
+          </a:prstGeom>
+          <a:noFill/>
+        </p:spPr>
+        <p:txBody>
+          <a:bodyPr wrap="square" lIns="0" tIns="0" rIns="0" bIns="0">
+            <a:spAutoFit/>
+          </a:bodyPr>
+          <a:lstStyle/>
+          <a:p>
+            <a:r>
+              <a:rPr sz="780" b="1">
+                <a:solidFill>
+                  <a:srgbClr val="52B788"/>
+                </a:solidFill>
+                <a:latin typeface="Consolas"/>
+              </a:rPr>
+              <a:t>03 / COMPARE: Multi-Band Spectral Differencing
+</a:t>
+            </a:r>
+          </a:p>
+          <a:p>
+            <a:r>
+              <a:rPr sz="700">
+                <a:solidFill>
+                  <a:srgbClr val="94A3B8"/>
+                </a:solidFill>
+                <a:latin typeface="Segoe UI"/>
+              </a:rPr>
+              <a:t>B02, B03, B04, B08 calibrated shift (τ = 0.15).</a:t>
+            </a:r>
+          </a:p>
+        </p:txBody>
+      </p:sp>
+      <p:sp>
+        <p:nvSpPr>
+          <p:cNvPr id="16" name="Rounded Rectangle 15"/>
+          <p:cNvSpPr/>
+          <p:nvPr/>
+        </p:nvSpPr>
+        <p:spPr>
+          <a:xfrm>
+            <a:off x="731520" y="3995928"/>
+            <a:ext cx="3017520" cy="658368"/>
+          </a:xfrm>
+          <a:prstGeom prst="roundRect">
+            <a:avLst/>
+          </a:prstGeom>
+          <a:solidFill>
+            <a:srgbClr val="171F30"/>
+          </a:solidFill>
+          <a:ln w="12700">
+            <a:solidFill>
+              <a:srgbClr val="25324A"/>
+            </a:solidFill>
+          </a:ln>
+        </p:spPr>
+        <p:style>
+          <a:lnRef idx="1">
+            <a:schemeClr val="accent1"/>
+          </a:lnRef>
+          <a:fillRef idx="3">
+            <a:schemeClr val="accent1"/>
+          </a:fillRef>
+          <a:effectRef idx="2">
+            <a:schemeClr val="accent1"/>
+          </a:effectRef>
+          <a:fontRef idx="minor">
+            <a:schemeClr val="lt1"/>
+          </a:fontRef>
+        </p:style>
+        <p:txBody>
+          <a:bodyPr rtlCol="0" anchor="ctr"/>
+          <a:lstStyle/>
+          <a:p>
+            <a:pPr algn="ctr"/>
+          </a:p>
+        </p:txBody>
+      </p:sp>
+      <p:sp>
+        <p:nvSpPr>
+          <p:cNvPr id="17" name="TextBox 16"/>
+          <p:cNvSpPr txBox="1"/>
+          <p:nvPr/>
+        </p:nvSpPr>
+        <p:spPr>
+          <a:xfrm>
+            <a:off x="822960" y="4050792"/>
+            <a:ext cx="2834640" cy="548640"/>
+          </a:xfrm>
+          <a:prstGeom prst="rect">
+            <a:avLst/>
+          </a:prstGeom>
+          <a:noFill/>
+        </p:spPr>
+        <p:txBody>
+          <a:bodyPr wrap="square" lIns="0" tIns="0" rIns="0" bIns="0">
+            <a:spAutoFit/>
+          </a:bodyPr>
+          <a:lstStyle/>
+          <a:p>
+            <a:r>
+              <a:rPr sz="780" b="1">
+                <a:solidFill>
+                  <a:srgbClr val="52B788"/>
+                </a:solidFill>
+                <a:latin typeface="Consolas"/>
+              </a:rPr>
+              <a:t>04 / EXPLAIN: Evidence-Based Change Attribution
+</a:t>
+            </a:r>
+          </a:p>
+          <a:p>
+            <a:r>
+              <a:rPr sz="700">
+                <a:solidFill>
+                  <a:srgbClr val="94A3B8"/>
+                </a:solidFill>
+                <a:latin typeface="Segoe UI"/>
+              </a:rPr>
+              <a:t>NDVI, NDWI &amp; spatial coherence topology.</a:t>
+            </a:r>
+          </a:p>
+        </p:txBody>
+      </p:sp>
+      <p:sp>
+        <p:nvSpPr>
+          <p:cNvPr id="18" name="Rounded Rectangle 17"/>
+          <p:cNvSpPr/>
+          <p:nvPr/>
+        </p:nvSpPr>
+        <p:spPr>
+          <a:xfrm>
+            <a:off x="731520" y="4764024"/>
+            <a:ext cx="3017520" cy="658368"/>
+          </a:xfrm>
+          <a:prstGeom prst="roundRect">
+            <a:avLst/>
+          </a:prstGeom>
+          <a:solidFill>
+            <a:srgbClr val="171F30"/>
+          </a:solidFill>
+          <a:ln w="12700">
+            <a:solidFill>
+              <a:srgbClr val="25324A"/>
+            </a:solidFill>
+          </a:ln>
+        </p:spPr>
+        <p:style>
+          <a:lnRef idx="1">
+            <a:schemeClr val="accent1"/>
+          </a:lnRef>
+          <a:fillRef idx="3">
+            <a:schemeClr val="accent1"/>
+          </a:fillRef>
+          <a:effectRef idx="2">
+            <a:schemeClr val="accent1"/>
+          </a:effectRef>
+          <a:fontRef idx="minor">
+            <a:schemeClr val="lt1"/>
+          </a:fontRef>
+        </p:style>
+        <p:txBody>
+          <a:bodyPr rtlCol="0" anchor="ctr"/>
+          <a:lstStyle/>
+          <a:p>
+            <a:pPr algn="ctr"/>
+          </a:p>
+        </p:txBody>
+      </p:sp>
+      <p:sp>
+        <p:nvSpPr>
+          <p:cNvPr id="19" name="TextBox 18"/>
+          <p:cNvSpPr txBox="1"/>
+          <p:nvPr/>
+        </p:nvSpPr>
+        <p:spPr>
+          <a:xfrm>
+            <a:off x="822960" y="4818888"/>
+            <a:ext cx="2834640" cy="548640"/>
+          </a:xfrm>
+          <a:prstGeom prst="rect">
+            <a:avLst/>
+          </a:prstGeom>
+          <a:noFill/>
+        </p:spPr>
+        <p:txBody>
+          <a:bodyPr wrap="square" lIns="0" tIns="0" rIns="0" bIns="0">
+            <a:spAutoFit/>
+          </a:bodyPr>
+          <a:lstStyle/>
+          <a:p>
+            <a:r>
+              <a:rPr sz="780" b="1">
+                <a:solidFill>
+                  <a:srgbClr val="C5A869"/>
+                </a:solidFill>
+                <a:latin typeface="Consolas"/>
+              </a:rPr>
+              <a:t>05 / CHALLENGE: Multi-Temporal Persistence Check
+</a:t>
+            </a:r>
+          </a:p>
+          <a:p>
+            <a:r>
+              <a:rPr sz="700">
+                <a:solidFill>
+                  <a:srgbClr val="94A3B8"/>
+                </a:solidFill>
+                <a:latin typeface="Segoe UI"/>
+              </a:rPr>
+              <a:t>3-date MECE trajectory classification.</a:t>
+            </a:r>
+          </a:p>
+        </p:txBody>
+      </p:sp>
+      <p:sp>
+        <p:nvSpPr>
+          <p:cNvPr id="20" name="Rounded Rectangle 19"/>
+          <p:cNvSpPr/>
+          <p:nvPr/>
+        </p:nvSpPr>
+        <p:spPr>
+          <a:xfrm>
+            <a:off x="731520" y="5532120"/>
+            <a:ext cx="3017520" cy="658368"/>
+          </a:xfrm>
+          <a:prstGeom prst="roundRect">
+            <a:avLst/>
+          </a:prstGeom>
+          <a:solidFill>
+            <a:srgbClr val="171F30"/>
+          </a:solidFill>
+          <a:ln w="12700">
+            <a:solidFill>
+              <a:srgbClr val="25324A"/>
+            </a:solidFill>
+          </a:ln>
+        </p:spPr>
+        <p:style>
+          <a:lnRef idx="1">
+            <a:schemeClr val="accent1"/>
+          </a:lnRef>
+          <a:fillRef idx="3">
+            <a:schemeClr val="accent1"/>
+          </a:fillRef>
+          <a:effectRef idx="2">
+            <a:schemeClr val="accent1"/>
+          </a:effectRef>
+          <a:fontRef idx="minor">
+            <a:schemeClr val="lt1"/>
+          </a:fontRef>
+        </p:style>
+        <p:txBody>
+          <a:bodyPr rtlCol="0" anchor="ctr"/>
+          <a:lstStyle/>
+          <a:p>
+            <a:pPr algn="ctr"/>
+          </a:p>
+        </p:txBody>
+      </p:sp>
+      <p:sp>
+        <p:nvSpPr>
+          <p:cNvPr id="21" name="TextBox 20"/>
+          <p:cNvSpPr txBox="1"/>
+          <p:nvPr/>
+        </p:nvSpPr>
+        <p:spPr>
+          <a:xfrm>
+            <a:off x="822960" y="5586984"/>
+            <a:ext cx="2834640" cy="548640"/>
+          </a:xfrm>
+          <a:prstGeom prst="rect">
+            <a:avLst/>
+          </a:prstGeom>
+          <a:noFill/>
+        </p:spPr>
+        <p:txBody>
+          <a:bodyPr wrap="square" lIns="0" tIns="0" rIns="0" bIns="0">
+            <a:spAutoFit/>
+          </a:bodyPr>
+          <a:lstStyle/>
+          <a:p>
+            <a:r>
+              <a:rPr sz="780" b="1">
+                <a:solidFill>
+                  <a:srgbClr val="C5A869"/>
+                </a:solidFill>
+                <a:latin typeface="Consolas"/>
+              </a:rPr>
+              <a:t>06 / DECIDE: Conservative Auditable Verdict
+</a:t>
+            </a:r>
+          </a:p>
+          <a:p>
+            <a:r>
+              <a:rPr sz="700">
+                <a:solidFill>
+                  <a:srgbClr val="94A3B8"/>
+                </a:solidFill>
+                <a:latin typeface="Segoe UI"/>
+              </a:rPr>
+              <a:t>SUPPORTED / REVIEW / ABSTAIN decision layer.</a:t>
+            </a:r>
+          </a:p>
+        </p:txBody>
+      </p:sp>
+      <p:sp>
+        <p:nvSpPr>
+          <p:cNvPr id="22" name="Rounded Rectangle 21"/>
+          <p:cNvSpPr/>
+          <p:nvPr/>
+        </p:nvSpPr>
+        <p:spPr>
+          <a:xfrm>
+            <a:off x="3977639" y="1188720"/>
+            <a:ext cx="4343400" cy="2514600"/>
           </a:xfrm>
           <a:prstGeom prst="roundRect">
             <a:avLst/>
@@ -5772,14 +6937,50 @@
       </p:sp>
       <p:sp>
         <p:nvSpPr>
-          <p:cNvPr id="9" name="TextBox 8"/>
+          <p:cNvPr id="23" name="TextBox 22"/>
           <p:cNvSpPr txBox="1"/>
           <p:nvPr/>
         </p:nvSpPr>
         <p:spPr>
           <a:xfrm>
-            <a:off x="731520" y="1353312"/>
-            <a:ext cx="7132320" cy="1097280"/>
+            <a:off x="4114800" y="1280160"/>
+            <a:ext cx="4069080" cy="320040"/>
+          </a:xfrm>
+          <a:prstGeom prst="rect">
+            <a:avLst/>
+          </a:prstGeom>
+          <a:noFill/>
+        </p:spPr>
+        <p:txBody>
+          <a:bodyPr wrap="none" lIns="0" tIns="0" rIns="0" bIns="0">
+            <a:spAutoFit/>
+          </a:bodyPr>
+          <a:lstStyle/>
+          <a:p>
+            <a:pPr>
+              <a:defRPr sz="900" b="1">
+                <a:solidFill>
+                  <a:srgbClr val="4EA8DE"/>
+                </a:solidFill>
+                <a:latin typeface="Consolas"/>
+              </a:defRPr>
+            </a:pPr>
+            <a:r>
+              <a:t>PROCESS 1: CROSS-MODAL SEMANTIC RETRIEVAL</a:t>
+            </a:r>
+          </a:p>
+        </p:txBody>
+      </p:sp>
+      <p:sp>
+        <p:nvSpPr>
+          <p:cNvPr id="24" name="TextBox 23"/>
+          <p:cNvSpPr txBox="1"/>
+          <p:nvPr/>
+        </p:nvSpPr>
+        <p:spPr>
+          <a:xfrm>
+            <a:off x="4114800" y="1627632"/>
+            <a:ext cx="4069080" cy="2011680"/>
           </a:xfrm>
           <a:prstGeom prst="rect">
             <a:avLst/>
@@ -5792,58 +6993,139 @@
           </a:bodyPr>
           <a:lstStyle/>
           <a:p>
-            <a:pPr>
-              <a:defRPr sz="950" b="1">
-                <a:solidFill>
-                  <a:srgbClr val="4EA8DE"/>
-                </a:solidFill>
-                <a:latin typeface="Consolas"/>
-              </a:defRPr>
-            </a:pPr>
-            <a:r>
-              <a:t>LAYER 1: MULTIMODAL SEMANTIC RETRIEVAL (WHERE TO LOOK)</a:t>
+            <a:r>
+              <a:rPr sz="780" b="1">
+                <a:solidFill>
+                  <a:srgbClr val="F5F3ED"/>
+                </a:solidFill>
+                <a:latin typeface="Segoe UI"/>
+              </a:rPr>
+              <a:t>Step 1 · Query Formulation: </a:t>
+            </a:r>
+            <a:r>
+              <a:rPr sz="730">
+                <a:solidFill>
+                  <a:srgbClr val="94A3B8"/>
+                </a:solidFill>
+                <a:latin typeface="Segoe UI"/>
+              </a:rPr>
+              <a:t>Analyst enters intent in natural English (e.g., “newly built structures”).</a:t>
             </a:r>
           </a:p>
           <a:p>
             <a:pPr>
               <a:spcBef>
-                <a:spcPts val="200"/>
+                <a:spcPts val="300"/>
               </a:spcBef>
             </a:pPr>
             <a:r>
-              <a:rPr sz="800">
+              <a:rPr sz="780" b="1">
                 <a:solidFill>
                   <a:srgbClr val="F5F3ED"/>
                 </a:solidFill>
                 <a:latin typeface="Segoe UI"/>
               </a:rPr>
-              <a:t>• Analyst Input: Unconstrained natural-language hypothesis (e.g., “newly built structures near a river”).
-• RemoteCLIP ViT-B/32: Projects satellite GeoTIFF tiles &amp; textual intent into shared 512-dim embedding space.
-• In-Memory FAISS Flat L2 Index: Fast sub-millisecond vector similarity search across pre-indexed defense tiles.
-• Performance Benchmark: Model load ~3.3s | Text embed ~43ms | Image embed ~78ms | FAISS scan ~1.8ms | Total &lt;65ms.</a:t>
-            </a:r>
-          </a:p>
-        </p:txBody>
-      </p:sp>
-      <p:sp>
-        <p:nvSpPr>
-          <p:cNvPr id="10" name="Down Arrow 9"/>
+              <a:t>Step 2 · RemoteCLIP ViT-B-32: </a:t>
+            </a:r>
+            <a:r>
+              <a:rPr sz="730">
+                <a:solidFill>
+                  <a:srgbClr val="94A3B8"/>
+                </a:solidFill>
+                <a:latin typeface="Segoe UI"/>
+              </a:rPr>
+              <a:t>Projects text and GeoTIFF tiles into 512-dim joint space (Sun et al. / Chen et al.).</a:t>
+            </a:r>
+          </a:p>
+          <a:p>
+            <a:pPr>
+              <a:spcBef>
+                <a:spcPts val="300"/>
+              </a:spcBef>
+            </a:pPr>
+            <a:r>
+              <a:rPr sz="780" b="1">
+                <a:solidFill>
+                  <a:srgbClr val="F5F3ED"/>
+                </a:solidFill>
+                <a:latin typeface="Segoe UI"/>
+              </a:rPr>
+              <a:t>Step 3 · FAISS FlatIP Search: </a:t>
+            </a:r>
+            <a:r>
+              <a:rPr sz="730">
+                <a:solidFill>
+                  <a:srgbClr val="94A3B8"/>
+                </a:solidFill>
+                <a:latin typeface="Segoe UI"/>
+              </a:rPr>
+              <a:t>Exact cosine similarity matching: s(q, v) = q̂ · v̂ = cos(θ). Sub-millisecond scan.</a:t>
+            </a:r>
+          </a:p>
+          <a:p>
+            <a:pPr>
+              <a:spcBef>
+                <a:spcPts val="300"/>
+              </a:spcBef>
+            </a:pPr>
+            <a:r>
+              <a:rPr sz="780" b="1">
+                <a:solidFill>
+                  <a:srgbClr val="F5F3ED"/>
+                </a:solidFill>
+                <a:latin typeface="Segoe UI"/>
+              </a:rPr>
+              <a:t>Step 4 · SQLite Metadata Lookup: </a:t>
+            </a:r>
+            <a:r>
+              <a:rPr sz="730">
+                <a:solidFill>
+                  <a:srgbClr val="94A3B8"/>
+                </a:solidFill>
+                <a:latin typeface="Segoe UI"/>
+              </a:rPr>
+              <a:t>Stable UUID primary keys resolve tile_id to bounds_wgs84 &amp; EPSG:32643 MGRS tile.</a:t>
+            </a:r>
+          </a:p>
+          <a:p>
+            <a:pPr>
+              <a:spcBef>
+                <a:spcPts val="400"/>
+              </a:spcBef>
+            </a:pPr>
+            <a:r>
+              <a:rPr sz="700" b="1">
+                <a:solidFill>
+                  <a:srgbClr val="C5A869"/>
+                </a:solidFill>
+                <a:latin typeface="Consolas"/>
+              </a:rPr>
+              <a:t>OFFLINE BENCHMARK: Model load 4.94s | Text embed 48.6ms | FAISS scan 2.0ms | Total 66.1ms</a:t>
+            </a:r>
+          </a:p>
+        </p:txBody>
+      </p:sp>
+      <p:sp>
+        <p:nvSpPr>
+          <p:cNvPr id="25" name="Rounded Rectangle 24"/>
           <p:cNvSpPr/>
           <p:nvPr/>
         </p:nvSpPr>
         <p:spPr>
           <a:xfrm>
-            <a:off x="4114800" y="2560320"/>
-            <a:ext cx="274320" cy="182880"/>
-          </a:xfrm>
-          <a:prstGeom prst="downArrow">
+            <a:off x="3977639" y="3794760"/>
+            <a:ext cx="4343400" cy="2587752"/>
+          </a:xfrm>
+          <a:prstGeom prst="roundRect">
             <a:avLst/>
           </a:prstGeom>
           <a:solidFill>
-            <a:srgbClr val="C5A869"/>
+            <a:srgbClr val="111724"/>
           </a:solidFill>
-          <a:ln>
-            <a:noFill/>
+          <a:ln w="12700">
+            <a:solidFill>
+              <a:srgbClr val="52B788"/>
+            </a:solidFill>
           </a:ln>
         </p:spPr>
         <p:style>
@@ -5870,14 +7152,184 @@
       </p:sp>
       <p:sp>
         <p:nvSpPr>
-          <p:cNvPr id="11" name="Rounded Rectangle 10"/>
+          <p:cNvPr id="26" name="TextBox 25"/>
+          <p:cNvSpPr txBox="1"/>
+          <p:nvPr/>
+        </p:nvSpPr>
+        <p:spPr>
+          <a:xfrm>
+            <a:off x="4114800" y="3886200"/>
+            <a:ext cx="4069080" cy="320040"/>
+          </a:xfrm>
+          <a:prstGeom prst="rect">
+            <a:avLst/>
+          </a:prstGeom>
+          <a:noFill/>
+        </p:spPr>
+        <p:txBody>
+          <a:bodyPr wrap="none" lIns="0" tIns="0" rIns="0" bIns="0">
+            <a:spAutoFit/>
+          </a:bodyPr>
+          <a:lstStyle/>
+          <a:p>
+            <a:pPr>
+              <a:defRPr sz="900" b="1">
+                <a:solidFill>
+                  <a:srgbClr val="52B788"/>
+                </a:solidFill>
+                <a:latin typeface="Consolas"/>
+              </a:defRPr>
+            </a:pPr>
+            <a:r>
+              <a:t>PROCESS 2: MULTI-TEMPORAL EVIDENCE &amp; ATTRIBUTION</a:t>
+            </a:r>
+          </a:p>
+        </p:txBody>
+      </p:sp>
+      <p:sp>
+        <p:nvSpPr>
+          <p:cNvPr id="27" name="TextBox 26"/>
+          <p:cNvSpPr txBox="1"/>
+          <p:nvPr/>
+        </p:nvSpPr>
+        <p:spPr>
+          <a:xfrm>
+            <a:off x="4114800" y="4224528"/>
+            <a:ext cx="4069080" cy="2084831"/>
+          </a:xfrm>
+          <a:prstGeom prst="rect">
+            <a:avLst/>
+          </a:prstGeom>
+          <a:noFill/>
+        </p:spPr>
+        <p:txBody>
+          <a:bodyPr wrap="square" lIns="0" tIns="0" rIns="0" bIns="0">
+            <a:spAutoFit/>
+          </a:bodyPr>
+          <a:lstStyle/>
+          <a:p>
+            <a:r>
+              <a:rPr sz="780" b="1">
+                <a:solidFill>
+                  <a:srgbClr val="F5F3ED"/>
+                </a:solidFill>
+                <a:latin typeface="Segoe UI"/>
+              </a:rPr>
+              <a:t>Layer 1 · Spectral Differencing (τ = 0.15): </a:t>
+            </a:r>
+            <a:r>
+              <a:rPr sz="730">
+                <a:solidFill>
+                  <a:srgbClr val="94A3B8"/>
+                </a:solidFill>
+                <a:latin typeface="Segoe UI"/>
+              </a:rPr>
+              <a:t>Δmean = (1/B) Σ |I_T1(b) - I_T0(b)| across B02, B03, B04, B08.</a:t>
+            </a:r>
+          </a:p>
+          <a:p>
+            <a:pPr>
+              <a:spcBef>
+                <a:spcPts val="300"/>
+              </a:spcBef>
+            </a:pPr>
+            <a:r>
+              <a:rPr sz="780" b="1">
+                <a:solidFill>
+                  <a:srgbClr val="F5F3ED"/>
+                </a:solidFill>
+                <a:latin typeface="Segoe UI"/>
+              </a:rPr>
+              <a:t>Layer 2 · Biophysical Indices: </a:t>
+            </a:r>
+            <a:r>
+              <a:rPr sz="730">
+                <a:solidFill>
+                  <a:srgbClr val="94A3B8"/>
+                </a:solidFill>
+                <a:latin typeface="Segoe UI"/>
+              </a:rPr>
+              <a:t>NDVI = (NIR - Red)/(NIR + Red) and NDWI = (Green - NIR)/(Green + NIR).</a:t>
+            </a:r>
+          </a:p>
+          <a:p>
+            <a:pPr>
+              <a:spcBef>
+                <a:spcPts val="300"/>
+              </a:spcBef>
+            </a:pPr>
+            <a:r>
+              <a:rPr sz="780" b="1">
+                <a:solidFill>
+                  <a:srgbClr val="F5F3ED"/>
+                </a:solidFill>
+                <a:latin typeface="Segoe UI"/>
+              </a:rPr>
+              <a:t>Layer 3 · Spatial Coherence Topology: </a:t>
+            </a:r>
+            <a:r>
+              <a:rPr sz="730">
+                <a:solidFill>
+                  <a:srgbClr val="94A3B8"/>
+                </a:solidFill>
+                <a:latin typeface="Segoe UI"/>
+              </a:rPr>
+              <a:t>Connected component labeling: C_spatial = max_component_size / total_changed.</a:t>
+            </a:r>
+          </a:p>
+          <a:p>
+            <a:pPr>
+              <a:spcBef>
+                <a:spcPts val="300"/>
+              </a:spcBef>
+            </a:pPr>
+            <a:r>
+              <a:rPr sz="780" b="1">
+                <a:solidFill>
+                  <a:srgbClr val="F5F3ED"/>
+                </a:solidFill>
+                <a:latin typeface="Segoe UI"/>
+              </a:rPr>
+              <a:t>Layer 4 · MECE Trajectory Classification: </a:t>
+            </a:r>
+            <a:r>
+              <a:rPr sz="730">
+                <a:solidFill>
+                  <a:srgbClr val="94A3B8"/>
+                </a:solidFill>
+                <a:latin typeface="Segoe UI"/>
+              </a:rPr>
+              <a:t>3-date stack (T0, Tmid, T1) classified into 5 canonical categories.</a:t>
+            </a:r>
+          </a:p>
+          <a:p>
+            <a:pPr>
+              <a:spcBef>
+                <a:spcPts val="400"/>
+              </a:spcBef>
+            </a:pPr>
+            <a:r>
+              <a:rPr sz="700" b="1">
+                <a:solidFill>
+                  <a:srgbClr val="C5A869"/>
+                </a:solidFill>
+                <a:latin typeface="Consolas"/>
+              </a:rPr>
+              <a:t>MECE TRAJECTORIES: STABLE | PERSISTENT_CHANGE | TRANSIENT | LATE_ONSET | REVERSIBLE</a:t>
+            </a:r>
+          </a:p>
+        </p:txBody>
+      </p:sp>
+      <p:sp>
+        <p:nvSpPr>
+          <p:cNvPr id="28" name="Rounded Rectangle 27"/>
           <p:cNvSpPr/>
           <p:nvPr/>
         </p:nvSpPr>
         <p:spPr>
           <a:xfrm>
-            <a:off x="594360" y="2788920"/>
-            <a:ext cx="7406640" cy="1645920"/>
+            <a:off x="8412480" y="1188720"/>
+            <a:ext cx="3184855" cy="5193792"/>
           </a:xfrm>
           <a:prstGeom prst="roundRect">
             <a:avLst/>
@@ -5915,14 +7367,14 @@
       </p:sp>
       <p:sp>
         <p:nvSpPr>
-          <p:cNvPr id="12" name="TextBox 11"/>
+          <p:cNvPr id="29" name="TextBox 28"/>
           <p:cNvSpPr txBox="1"/>
           <p:nvPr/>
         </p:nvSpPr>
         <p:spPr>
           <a:xfrm>
-            <a:off x="731520" y="2862072"/>
-            <a:ext cx="7132320" cy="1508760"/>
+            <a:off x="8549640" y="1298448"/>
+            <a:ext cx="2910535" cy="320040"/>
           </a:xfrm>
           <a:prstGeom prst="rect">
             <a:avLst/>
@@ -5930,13 +7382,13 @@
           <a:noFill/>
         </p:spPr>
         <p:txBody>
-          <a:bodyPr wrap="square" lIns="0" tIns="0" rIns="0" bIns="0">
+          <a:bodyPr wrap="none" lIns="0" tIns="0" rIns="0" bIns="0">
             <a:spAutoFit/>
           </a:bodyPr>
           <a:lstStyle/>
           <a:p>
             <a:pPr>
-              <a:defRPr sz="950" b="1">
+              <a:defRPr sz="900" b="1">
                 <a:solidFill>
                   <a:srgbClr val="C5A869"/>
                 </a:solidFill>
@@ -5944,51 +7396,32 @@
               </a:defRPr>
             </a:pPr>
             <a:r>
-              <a:t>LAYER 2: MULTI-TEMPORAL &amp; PHYSICAL OPTICAL ANALYSIS (WHAT CHANGED)</a:t>
-            </a:r>
-          </a:p>
-          <a:p>
-            <a:pPr>
-              <a:spcBef>
-                <a:spcPts val="200"/>
-              </a:spcBef>
-            </a:pPr>
-            <a:r>
-              <a:rPr sz="780">
-                <a:solidFill>
-                  <a:srgbClr val="F5F3ED"/>
-                </a:solidFill>
-                <a:latin typeface="Segoe UI"/>
-              </a:rPr>
-              <a:t>• Satellite Constellation: ESA Copernicus Sentinel-2A Level-2A Bottom-Of-Atmosphere (BOA) surface reflectance.
-• Pixel-Window Alignment: Exact spatial bounds matching across EPSG:32643 (10m GSD); eliminates cross-tile contamination.
-• Quality &amp; Cloud Masking: Scene Classification Layer (SCL) filters clouds, cirrus, cloud shadows &amp; saturated pixels.
-• Calibrated Spectral Differencing: Evaluates ΔB02, ΔB03, ΔB04, ΔB08 under fixed operational threshold (τ = 0.15).
-• Deterministic Index Math: Calculates NDVI = (NIR - Red)/(NIR + Red) and NDWI = (Green - NIR)/(Green + NIR).
-• Spatial Topology: 8-connected connected-component clustering (Coherence = Largest Component / Total Changed Pixels).</a:t>
-            </a:r>
-          </a:p>
-        </p:txBody>
-      </p:sp>
-      <p:sp>
-        <p:nvSpPr>
-          <p:cNvPr id="13" name="Down Arrow 12"/>
+              <a:t>TECHNOLOGIES USED</a:t>
+            </a:r>
+          </a:p>
+        </p:txBody>
+      </p:sp>
+      <p:sp>
+        <p:nvSpPr>
+          <p:cNvPr id="30" name="Rounded Rectangle 29"/>
           <p:cNvSpPr/>
           <p:nvPr/>
         </p:nvSpPr>
         <p:spPr>
           <a:xfrm>
-            <a:off x="4114800" y="4480560"/>
-            <a:ext cx="274320" cy="182880"/>
-          </a:xfrm>
-          <a:prstGeom prst="downArrow">
+            <a:off x="8549640" y="1691640"/>
+            <a:ext cx="2910535" cy="1097280"/>
+          </a:xfrm>
+          <a:prstGeom prst="roundRect">
             <a:avLst/>
           </a:prstGeom>
           <a:solidFill>
-            <a:srgbClr val="52B788"/>
+            <a:srgbClr val="171F30"/>
           </a:solidFill>
-          <a:ln>
-            <a:noFill/>
+          <a:ln w="12700">
+            <a:solidFill>
+              <a:srgbClr val="25324A"/>
+            </a:solidFill>
           </a:ln>
         </p:spPr>
         <p:style>
@@ -6015,24 +7448,140 @@
       </p:sp>
       <p:sp>
         <p:nvSpPr>
-          <p:cNvPr id="14" name="Rounded Rectangle 13"/>
+          <p:cNvPr id="31" name="TextBox 30"/>
+          <p:cNvSpPr txBox="1"/>
+          <p:nvPr/>
+        </p:nvSpPr>
+        <p:spPr>
+          <a:xfrm>
+            <a:off x="8641080" y="1737360"/>
+            <a:ext cx="2727655" cy="1005840"/>
+          </a:xfrm>
+          <a:prstGeom prst="rect">
+            <a:avLst/>
+          </a:prstGeom>
+          <a:noFill/>
+        </p:spPr>
+        <p:txBody>
+          <a:bodyPr wrap="square" lIns="0" tIns="0" rIns="0" bIns="0">
+            <a:spAutoFit/>
+          </a:bodyPr>
+          <a:lstStyle/>
+          <a:p>
+            <a:pPr>
+              <a:defRPr sz="760" b="1">
+                <a:solidFill>
+                  <a:srgbClr val="4EA8DE"/>
+                </a:solidFill>
+                <a:latin typeface="Consolas"/>
+              </a:defRPr>
+            </a:pPr>
+            <a:r>
+              <a:t>BAND 1: SEMANTIC RETRIEVAL</a:t>
+            </a:r>
+          </a:p>
+          <a:p>
+            <a:r>
+              <a:rPr sz="700" b="1">
+                <a:solidFill>
+                  <a:srgbClr val="F5F3ED"/>
+                </a:solidFill>
+                <a:latin typeface="Segoe UI"/>
+              </a:rPr>
+              <a:t>• Model: </a:t>
+            </a:r>
+            <a:r>
+              <a:rPr sz="680">
+                <a:solidFill>
+                  <a:srgbClr val="94A3B8"/>
+                </a:solidFill>
+                <a:latin typeface="Segoe UI"/>
+              </a:rPr>
+              <a:t>RemoteCLIP ViT-B-32 (605 MB local checkpoint)</a:t>
+            </a:r>
+          </a:p>
+          <a:p>
+            <a:r>
+              <a:rPr sz="700" b="1">
+                <a:solidFill>
+                  <a:srgbClr val="F5F3ED"/>
+                </a:solidFill>
+                <a:latin typeface="Segoe UI"/>
+              </a:rPr>
+              <a:t>• Vector Index: </a:t>
+            </a:r>
+            <a:r>
+              <a:rPr sz="680">
+                <a:solidFill>
+                  <a:srgbClr val="94A3B8"/>
+                </a:solidFill>
+                <a:latin typeface="Segoe UI"/>
+              </a:rPr>
+              <a:t>FAISS CPU IndexIDMap(IndexFlatIP)</a:t>
+            </a:r>
+          </a:p>
+          <a:p>
+            <a:r>
+              <a:rPr sz="700" b="1">
+                <a:solidFill>
+                  <a:srgbClr val="F5F3ED"/>
+                </a:solidFill>
+                <a:latin typeface="Segoe UI"/>
+              </a:rPr>
+              <a:t>• Embedding: </a:t>
+            </a:r>
+            <a:r>
+              <a:rPr sz="680">
+                <a:solidFill>
+                  <a:srgbClr val="94A3B8"/>
+                </a:solidFill>
+                <a:latin typeface="Segoe UI"/>
+              </a:rPr>
+              <a:t>512-dim L2-normalized unit vectors</a:t>
+            </a:r>
+          </a:p>
+          <a:p>
+            <a:r>
+              <a:rPr sz="700" b="1">
+                <a:solidFill>
+                  <a:srgbClr val="F5F3ED"/>
+                </a:solidFill>
+                <a:latin typeface="Segoe UI"/>
+              </a:rPr>
+              <a:t>• Metadata DB: </a:t>
+            </a:r>
+            <a:r>
+              <a:rPr sz="680">
+                <a:solidFill>
+                  <a:srgbClr val="94A3B8"/>
+                </a:solidFill>
+                <a:latin typeface="Segoe UI"/>
+              </a:rPr>
+              <a:t>SQLite local store (metadata.db)</a:t>
+            </a:r>
+          </a:p>
+        </p:txBody>
+      </p:sp>
+      <p:sp>
+        <p:nvSpPr>
+          <p:cNvPr id="32" name="Rounded Rectangle 31"/>
           <p:cNvSpPr/>
           <p:nvPr/>
         </p:nvSpPr>
         <p:spPr>
           <a:xfrm>
-            <a:off x="594360" y="4709160"/>
-            <a:ext cx="7406640" cy="1691640"/>
+            <a:off x="8549640" y="2862072"/>
+            <a:ext cx="2910535" cy="1097280"/>
           </a:xfrm>
           <a:prstGeom prst="roundRect">
             <a:avLst/>
           </a:prstGeom>
           <a:solidFill>
-            <a:srgbClr val="111724"/>
+            <a:srgbClr val="171F30"/>
           </a:solidFill>
           <a:ln w="12700">
             <a:solidFill>
-              <a:srgbClr val="52B788"/>
+              <a:srgbClr val="25324A"/>
             </a:solidFill>
           </a:ln>
         </p:spPr>
@@ -6060,14 +7609,14 @@
       </p:sp>
       <p:sp>
         <p:nvSpPr>
-          <p:cNvPr id="15" name="TextBox 14"/>
+          <p:cNvPr id="33" name="TextBox 32"/>
           <p:cNvSpPr txBox="1"/>
           <p:nvPr/>
         </p:nvSpPr>
         <p:spPr>
           <a:xfrm>
-            <a:off x="731520" y="4782312"/>
-            <a:ext cx="7132320" cy="1554480"/>
+            <a:off x="8641080" y="2907792"/>
+            <a:ext cx="2727655" cy="1005840"/>
           </a:xfrm>
           <a:prstGeom prst="rect">
             <a:avLst/>
@@ -6081,7 +7630,7 @@
           <a:lstStyle/>
           <a:p>
             <a:pPr>
-              <a:defRPr sz="950" b="1">
+              <a:defRPr sz="760" b="1">
                 <a:solidFill>
                   <a:srgbClr val="52B788"/>
                 </a:solidFill>
@@ -6089,51 +7638,111 @@
               </a:defRPr>
             </a:pPr>
             <a:r>
-              <a:t>LAYER 3: EVIDENCE-BASED ATTRIBUTION &amp; AUDITABLE DECISION</a:t>
-            </a:r>
-          </a:p>
-          <a:p>
-            <a:pPr>
-              <a:spcBef>
-                <a:spcPts val="200"/>
-              </a:spcBef>
-            </a:pPr>
-            <a:r>
-              <a:rPr sz="780">
+              <a:t>BAND 2: GEOSPATIAL ANALYSIS</a:t>
+            </a:r>
+          </a:p>
+          <a:p>
+            <a:r>
+              <a:rPr sz="700" b="1">
                 <a:solidFill>
                   <a:srgbClr val="F5F3ED"/>
                 </a:solidFill>
                 <a:latin typeface="Segoe UI"/>
               </a:rPr>
-              <a:t>• 6 Competing Hypotheses: Evaluates Built Surface vs. Vegetation Change vs. Water Change vs. Seasonal vs. Artifact vs. Uncertain.
-• Attribution Support (Heuristic Fit): Combines spectral vector decomposition with spatial clustering (NOT calibrated probabilities).
-• Multi-Date Trajectory Check: Assesses 3 observations (T0 → Tmid → T1) for STABLE, PERSISTENT, TRANSIENT, LATE_ONSET, REVERSIBLE.
-• Final Defense Verdict: Emits SUPPORTED (high persistence), REVIEW (mixed evidence), or ABSTAIN (poor data quality).
-• Cryptographic Integrity: Every dossier is sealed with a SHA-256 hash covering inputs, masks, and telemetry for chain-of-custody.</a:t>
-            </a:r>
-          </a:p>
-        </p:txBody>
-      </p:sp>
-      <p:sp>
-        <p:nvSpPr>
-          <p:cNvPr id="16" name="Rounded Rectangle 15"/>
+              <a:t>• Raster Engine: </a:t>
+            </a:r>
+            <a:r>
+              <a:rPr sz="680">
+                <a:solidFill>
+                  <a:srgbClr val="94A3B8"/>
+                </a:solidFill>
+                <a:latin typeface="Segoe UI"/>
+              </a:rPr>
+              <a:t>Rasterio &amp; GDAL C-bindings</a:t>
+            </a:r>
+          </a:p>
+          <a:p>
+            <a:r>
+              <a:rPr sz="700" b="1">
+                <a:solidFill>
+                  <a:srgbClr val="F5F3ED"/>
+                </a:solidFill>
+                <a:latin typeface="Segoe UI"/>
+              </a:rPr>
+              <a:t>• Grid Projection: </a:t>
+            </a:r>
+            <a:r>
+              <a:rPr sz="680">
+                <a:solidFill>
+                  <a:srgbClr val="94A3B8"/>
+                </a:solidFill>
+                <a:latin typeface="Segoe UI"/>
+              </a:rPr>
+              <a:t>EPSG:32643 (UTM Zone 43N)</a:t>
+            </a:r>
+          </a:p>
+          <a:p>
+            <a:r>
+              <a:rPr sz="700" b="1">
+                <a:solidFill>
+                  <a:srgbClr val="F5F3ED"/>
+                </a:solidFill>
+                <a:latin typeface="Segoe UI"/>
+              </a:rPr>
+              <a:t>• Arrays &amp; Math: </a:t>
+            </a:r>
+            <a:r>
+              <a:rPr sz="680">
+                <a:solidFill>
+                  <a:srgbClr val="94A3B8"/>
+                </a:solidFill>
+                <a:latin typeface="Segoe UI"/>
+              </a:rPr>
+              <a:t>NumPy 2.x vectorized arrays</a:t>
+            </a:r>
+          </a:p>
+          <a:p>
+            <a:r>
+              <a:rPr sz="700" b="1">
+                <a:solidFill>
+                  <a:srgbClr val="F5F3ED"/>
+                </a:solidFill>
+                <a:latin typeface="Segoe UI"/>
+              </a:rPr>
+              <a:t>• Topology: </a:t>
+            </a:r>
+            <a:r>
+              <a:rPr sz="680">
+                <a:solidFill>
+                  <a:srgbClr val="94A3B8"/>
+                </a:solidFill>
+                <a:latin typeface="Segoe UI"/>
+              </a:rPr>
+              <a:t>SciPy 1.14 (ndimage.label 8-conn)</a:t>
+            </a:r>
+          </a:p>
+        </p:txBody>
+      </p:sp>
+      <p:sp>
+        <p:nvSpPr>
+          <p:cNvPr id="34" name="Rounded Rectangle 33"/>
           <p:cNvSpPr/>
           <p:nvPr/>
         </p:nvSpPr>
         <p:spPr>
           <a:xfrm>
-            <a:off x="8257031" y="1280160"/>
-            <a:ext cx="3337560" cy="5120640"/>
+            <a:off x="8549640" y="4032504"/>
+            <a:ext cx="2910535" cy="1097280"/>
           </a:xfrm>
           <a:prstGeom prst="roundRect">
             <a:avLst/>
           </a:prstGeom>
           <a:solidFill>
-            <a:srgbClr val="111724"/>
+            <a:srgbClr val="171F30"/>
           </a:solidFill>
           <a:ln w="12700">
             <a:solidFill>
-              <a:srgbClr val="C5A869"/>
+              <a:srgbClr val="25324A"/>
             </a:solidFill>
           </a:ln>
         </p:spPr>
@@ -6161,14 +7770,14 @@
       </p:sp>
       <p:sp>
         <p:nvSpPr>
-          <p:cNvPr id="17" name="TextBox 16"/>
+          <p:cNvPr id="35" name="TextBox 34"/>
           <p:cNvSpPr txBox="1"/>
           <p:nvPr/>
         </p:nvSpPr>
         <p:spPr>
           <a:xfrm>
-            <a:off x="8394192" y="1389888"/>
-            <a:ext cx="3063240" cy="4892040"/>
+            <a:off x="8641080" y="4078224"/>
+            <a:ext cx="2727655" cy="1005840"/>
           </a:xfrm>
           <a:prstGeom prst="rect">
             <a:avLst/>
@@ -6182,7 +7791,7 @@
           <a:lstStyle/>
           <a:p>
             <a:pPr>
-              <a:defRPr sz="1000" b="1">
+              <a:defRPr sz="760" b="1">
                 <a:solidFill>
                   <a:srgbClr val="C5A869"/>
                 </a:solidFill>
@@ -6190,163 +7799,248 @@
               </a:defRPr>
             </a:pPr>
             <a:r>
-              <a:t>WHY THIS MATTERS TO DEFENSE</a:t>
-            </a:r>
-          </a:p>
+              <a:t>BAND 3: TEMPORAL &amp; VALIDATION</a:t>
+            </a:r>
+          </a:p>
+          <a:p>
+            <a:r>
+              <a:rPr sz="700" b="1">
+                <a:solidFill>
+                  <a:srgbClr val="F5F3ED"/>
+                </a:solidFill>
+                <a:latin typeface="Segoe UI"/>
+              </a:rPr>
+              <a:t>• Constellation: </a:t>
+            </a:r>
+            <a:r>
+              <a:rPr sz="680">
+                <a:solidFill>
+                  <a:srgbClr val="94A3B8"/>
+                </a:solidFill>
+                <a:latin typeface="Segoe UI"/>
+              </a:rPr>
+              <a:t>Copernicus Sentinel-2 MSI (10m BOA)</a:t>
+            </a:r>
+          </a:p>
+          <a:p>
+            <a:r>
+              <a:rPr sz="700" b="1">
+                <a:solidFill>
+                  <a:srgbClr val="F5F3ED"/>
+                </a:solidFill>
+                <a:latin typeface="Segoe UI"/>
+              </a:rPr>
+              <a:t>• Threshold: </a:t>
+            </a:r>
+            <a:r>
+              <a:rPr sz="680">
+                <a:solidFill>
+                  <a:srgbClr val="94A3B8"/>
+                </a:solidFill>
+                <a:latin typeface="Segoe UI"/>
+              </a:rPr>
+              <a:t>Fixed calibrated τ = 0.15</a:t>
+            </a:r>
+          </a:p>
+          <a:p>
+            <a:r>
+              <a:rPr sz="700" b="1">
+                <a:solidFill>
+                  <a:srgbClr val="F5F3ED"/>
+                </a:solidFill>
+                <a:latin typeface="Segoe UI"/>
+              </a:rPr>
+              <a:t>• Persistence: </a:t>
+            </a:r>
+            <a:r>
+              <a:rPr sz="680">
+                <a:solidFill>
+                  <a:srgbClr val="94A3B8"/>
+                </a:solidFill>
+                <a:latin typeface="Segoe UI"/>
+              </a:rPr>
+              <a:t>5-State MECE trajectory engine</a:t>
+            </a:r>
+          </a:p>
+          <a:p>
+            <a:r>
+              <a:rPr sz="700" b="1">
+                <a:solidFill>
+                  <a:srgbClr val="F5F3ED"/>
+                </a:solidFill>
+                <a:latin typeface="Segoe UI"/>
+              </a:rPr>
+              <a:t>• Validation: </a:t>
+            </a:r>
+            <a:r>
+              <a:rPr sz="680">
+                <a:solidFill>
+                  <a:srgbClr val="94A3B8"/>
+                </a:solidFill>
+                <a:latin typeface="Segoe UI"/>
+              </a:rPr>
+              <a:t>OSCD 5-pair subset (3,025,938 px)</a:t>
+            </a:r>
+          </a:p>
+        </p:txBody>
+      </p:sp>
+      <p:sp>
+        <p:nvSpPr>
+          <p:cNvPr id="36" name="Rounded Rectangle 35"/>
+          <p:cNvSpPr/>
+          <p:nvPr/>
+        </p:nvSpPr>
+        <p:spPr>
+          <a:xfrm>
+            <a:off x="8549640" y="5202936"/>
+            <a:ext cx="2910535" cy="1097280"/>
+          </a:xfrm>
+          <a:prstGeom prst="roundRect">
+            <a:avLst/>
+          </a:prstGeom>
+          <a:solidFill>
+            <a:srgbClr val="171F30"/>
+          </a:solidFill>
+          <a:ln w="12700">
+            <a:solidFill>
+              <a:srgbClr val="25324A"/>
+            </a:solidFill>
+          </a:ln>
+        </p:spPr>
+        <p:style>
+          <a:lnRef idx="1">
+            <a:schemeClr val="accent1"/>
+          </a:lnRef>
+          <a:fillRef idx="3">
+            <a:schemeClr val="accent1"/>
+          </a:fillRef>
+          <a:effectRef idx="2">
+            <a:schemeClr val="accent1"/>
+          </a:effectRef>
+          <a:fontRef idx="minor">
+            <a:schemeClr val="lt1"/>
+          </a:fontRef>
+        </p:style>
+        <p:txBody>
+          <a:bodyPr rtlCol="0" anchor="ctr"/>
+          <a:lstStyle/>
+          <a:p>
+            <a:pPr algn="ctr"/>
+          </a:p>
+        </p:txBody>
+      </p:sp>
+      <p:sp>
+        <p:nvSpPr>
+          <p:cNvPr id="37" name="TextBox 36"/>
+          <p:cNvSpPr txBox="1"/>
+          <p:nvPr/>
+        </p:nvSpPr>
+        <p:spPr>
+          <a:xfrm>
+            <a:off x="8641080" y="5248656"/>
+            <a:ext cx="2727655" cy="1005840"/>
+          </a:xfrm>
+          <a:prstGeom prst="rect">
+            <a:avLst/>
+          </a:prstGeom>
+          <a:noFill/>
+        </p:spPr>
+        <p:txBody>
+          <a:bodyPr wrap="square" lIns="0" tIns="0" rIns="0" bIns="0">
+            <a:spAutoFit/>
+          </a:bodyPr>
+          <a:lstStyle/>
           <a:p>
             <a:pPr>
-              <a:spcBef>
-                <a:spcPts val="400"/>
-              </a:spcBef>
+              <a:defRPr sz="760" b="1">
+                <a:solidFill>
+                  <a:srgbClr val="F5F3ED"/>
+                </a:solidFill>
+                <a:latin typeface="Consolas"/>
+              </a:defRPr>
             </a:pPr>
             <a:r>
-              <a:rPr sz="850" b="1">
-                <a:solidFill>
-                  <a:srgbClr val="4EA8DE"/>
-                </a:solidFill>
-                <a:latin typeface="Segoe UI"/>
-              </a:rPr>
-              <a:t>Semantic Retrieval → WHERE should I look?
-</a:t>
-            </a:r>
-            <a:r>
-              <a:rPr sz="780">
+              <a:t>BAND 4: OFFLINE-FIRST CORE</a:t>
+            </a:r>
+          </a:p>
+          <a:p>
+            <a:r>
+              <a:rPr sz="700" b="1">
+                <a:solidFill>
+                  <a:srgbClr val="F5F3ED"/>
+                </a:solidFill>
+                <a:latin typeface="Segoe UI"/>
+              </a:rPr>
+              <a:t>• Runtime: </a:t>
+            </a:r>
+            <a:r>
+              <a:rPr sz="680">
                 <a:solidFill>
                   <a:srgbClr val="94A3B8"/>
                 </a:solidFill>
                 <a:latin typeface="Segoe UI"/>
               </a:rPr>
-              <a:t>Prunes 99%+ of unchanged geographic space in milliseconds without manual bounding.</a:t>
-            </a:r>
-          </a:p>
-          <a:p>
-            <a:pPr>
-              <a:spcBef>
-                <a:spcPts val="400"/>
-              </a:spcBef>
-            </a:pPr>
-            <a:r>
-              <a:rPr sz="850" b="1">
-                <a:solidFill>
-                  <a:srgbClr val="4EA8DE"/>
-                </a:solidFill>
-                <a:latin typeface="Segoe UI"/>
-              </a:rPr>
-              <a:t>Spectral Differencing → WHAT changed?
-</a:t>
-            </a:r>
-            <a:r>
-              <a:rPr sz="780">
+              <a:t>Python 3.11 core analytical engine</a:t>
+            </a:r>
+          </a:p>
+          <a:p>
+            <a:r>
+              <a:rPr sz="700" b="1">
+                <a:solidFill>
+                  <a:srgbClr val="F5F3ED"/>
+                </a:solidFill>
+                <a:latin typeface="Segoe UI"/>
+              </a:rPr>
+              <a:t>• Interface: </a:t>
+            </a:r>
+            <a:r>
+              <a:rPr sz="680">
                 <a:solidFill>
                   <a:srgbClr val="94A3B8"/>
                 </a:solidFill>
                 <a:latin typeface="Segoe UI"/>
               </a:rPr>
-              <a:t>Separates physical absorption shifts from illumination and shadow artifacts.</a:t>
-            </a:r>
-          </a:p>
-          <a:p>
-            <a:pPr>
-              <a:spcBef>
-                <a:spcPts val="400"/>
-              </a:spcBef>
-            </a:pPr>
-            <a:r>
-              <a:rPr sz="850" b="1">
-                <a:solidFill>
-                  <a:srgbClr val="4EA8DE"/>
-                </a:solidFill>
-                <a:latin typeface="Segoe UI"/>
-              </a:rPr>
-              <a:t>Spatial Coherence → IS it coherent?
-</a:t>
-            </a:r>
-            <a:r>
-              <a:rPr sz="780">
+              <a:t>Next.js 14 console &amp; Streamlit UI</a:t>
+            </a:r>
+          </a:p>
+          <a:p>
+            <a:r>
+              <a:rPr sz="700" b="1">
+                <a:solidFill>
+                  <a:srgbClr val="F5F3ED"/>
+                </a:solidFill>
+                <a:latin typeface="Segoe UI"/>
+              </a:rPr>
+              <a:t>• API Service: </a:t>
+            </a:r>
+            <a:r>
+              <a:rPr sz="680">
                 <a:solidFill>
                   <a:srgbClr val="94A3B8"/>
                 </a:solidFill>
                 <a:latin typeface="Segoe UI"/>
               </a:rPr>
-              <a:t>Distinguishes contiguous military infrastructure from noisy atmospheric speckle.</a:t>
-            </a:r>
-          </a:p>
-          <a:p>
-            <a:pPr>
-              <a:spcBef>
-                <a:spcPts val="400"/>
-              </a:spcBef>
-            </a:pPr>
-            <a:r>
-              <a:rPr sz="850" b="1">
-                <a:solidFill>
-                  <a:srgbClr val="4EA8DE"/>
-                </a:solidFill>
-                <a:latin typeface="Segoe UI"/>
-              </a:rPr>
-              <a:t>Temporal Trajectory → DOES it persist?
-</a:t>
-            </a:r>
-            <a:r>
-              <a:rPr sz="780">
+              <a:t>FastAPI local REST microservice</a:t>
+            </a:r>
+          </a:p>
+          <a:p>
+            <a:r>
+              <a:rPr sz="700" b="1">
+                <a:solidFill>
+                  <a:srgbClr val="F5F3ED"/>
+                </a:solidFill>
+                <a:latin typeface="Segoe UI"/>
+              </a:rPr>
+              <a:t>• Air-Gap Mandate: </a:t>
+            </a:r>
+            <a:r>
+              <a:rPr sz="680">
                 <a:solidFill>
                   <a:srgbClr val="94A3B8"/>
                 </a:solidFill>
                 <a:latin typeface="Segoe UI"/>
               </a:rPr>
-              <a:t>Guarantees seasonal phenology flush is not falsely alerted as permanent construction.</a:t>
-            </a:r>
-          </a:p>
-          <a:p>
-            <a:pPr>
-              <a:spcBef>
-                <a:spcPts val="400"/>
-              </a:spcBef>
-            </a:pPr>
-            <a:r>
-              <a:rPr sz="850" b="1">
-                <a:solidFill>
-                  <a:srgbClr val="4EA8DE"/>
-                </a:solidFill>
-                <a:latin typeface="Segoe UI"/>
-              </a:rPr>
-              <a:t>Evidence Attribution → WHAT fits the data?
-</a:t>
-            </a:r>
-            <a:r>
-              <a:rPr sz="780">
-                <a:solidFill>
-                  <a:srgbClr val="94A3B8"/>
-                </a:solidFill>
-                <a:latin typeface="Segoe UI"/>
-              </a:rPr>
-              <a:t>Ranks competing interpretations honestly rather than outputting a black-box label.</a:t>
-            </a:r>
-          </a:p>
-          <a:p>
-            <a:pPr>
-              <a:spcBef>
-                <a:spcPts val="400"/>
-              </a:spcBef>
-            </a:pPr>
-            <a:r>
-              <a:rPr sz="850" b="1">
-                <a:solidFill>
-                  <a:srgbClr val="4EA8DE"/>
-                </a:solidFill>
-                <a:latin typeface="Segoe UI"/>
-              </a:rPr>
-              <a:t>Honest Verdict → CAN I trust this?
-</a:t>
-            </a:r>
-            <a:r>
-              <a:rPr sz="780">
-                <a:solidFill>
-                  <a:srgbClr val="94A3B8"/>
-                </a:solidFill>
-                <a:latin typeface="Segoe UI"/>
-              </a:rPr>
-              <a:t>Protects command staff with conservative REVIEW verdicts when evidence is mixed.</a:t>
+              <a:t>Zero runtime network egress</a:t>
             </a:r>
           </a:p>
         </p:txBody>
@@ -6420,8 +8114,8 @@
         </p:nvSpPr>
         <p:spPr>
           <a:xfrm>
-            <a:off x="594360" y="292608"/>
-            <a:ext cx="11002975" cy="27432"/>
+            <a:off x="594360" y="256032"/>
+            <a:ext cx="11002975" cy="22860"/>
           </a:xfrm>
           <a:prstGeom prst="rect">
             <a:avLst/>
@@ -6463,8 +8157,8 @@
         </p:nvSpPr>
         <p:spPr>
           <a:xfrm>
-            <a:off x="594360" y="347472"/>
-            <a:ext cx="7772400" cy="274320"/>
+            <a:off x="594360" y="301752"/>
+            <a:ext cx="7772400" cy="256032"/>
           </a:xfrm>
           <a:prstGeom prst="rect">
             <a:avLst/>
@@ -6478,7 +8172,7 @@
           <a:lstStyle/>
           <a:p>
             <a:pPr>
-              <a:defRPr sz="850" b="1">
+              <a:defRPr sz="800" b="1">
                 <a:solidFill>
                   <a:srgbClr val="C5A869"/>
                 </a:solidFill>
@@ -6486,7 +8180,7 @@
               </a:defRPr>
             </a:pPr>
             <a:r>
-              <a:t>SMART INDIA HACKATHON 2026 · PS: SIH26227 · THEME: SPACE TECHNOLOGY · MINISTRY OF DEFENCE (MOD) / INDIAN ARMY — DGIS</a:t>
+              <a:t>SMART INDIA HACKATHON 2026 · PS: SIH26227 · SPACE TECHNOLOGY · SOFTWARE · MINISTRY OF DEFENCE / INDIAN ARMY — DGIS</a:t>
             </a:r>
           </a:p>
         </p:txBody>
@@ -6499,8 +8193,8 @@
         </p:nvSpPr>
         <p:spPr>
           <a:xfrm>
-            <a:off x="8412480" y="347472"/>
-            <a:ext cx="3182112" cy="274320"/>
+            <a:off x="8412480" y="301752"/>
+            <a:ext cx="3182112" cy="256032"/>
           </a:xfrm>
           <a:prstGeom prst="rect">
             <a:avLst/>
@@ -6515,16 +8209,16 @@
           <a:p>
             <a:pPr algn="r"/>
             <a:r>
-              <a:rPr sz="850">
+              <a:rPr sz="800">
                 <a:solidFill>
                   <a:srgbClr val="94A3B8"/>
                 </a:solidFill>
                 <a:latin typeface="Consolas"/>
               </a:rPr>
-              <a:t>TEAM: Quantumcrew | </a:t>
-            </a:r>
-            <a:r>
-              <a:rPr sz="850" b="1">
+              <a:t>TEAM: Quantumcrew  |  </a:t>
+            </a:r>
+            <a:r>
+              <a:rPr sz="800" b="1">
                 <a:solidFill>
                   <a:srgbClr val="4EA8DE"/>
                 </a:solidFill>
@@ -6543,8 +8237,8 @@
         </p:nvSpPr>
         <p:spPr>
           <a:xfrm>
-            <a:off x="594360" y="594360"/>
-            <a:ext cx="11002975" cy="594360"/>
+            <a:off x="594360" y="548640"/>
+            <a:ext cx="11002975" cy="566928"/>
           </a:xfrm>
           <a:prstGeom prst="rect">
             <a:avLst/>
@@ -6558,7 +8252,7 @@
           <a:lstStyle/>
           <a:p>
             <a:pPr>
-              <a:defRPr sz="1750" b="1">
+              <a:defRPr sz="1650" b="1">
                 <a:solidFill>
                   <a:srgbClr val="F5F3ED"/>
                 </a:solidFill>
@@ -6566,12 +8260,12 @@
               </a:defRPr>
             </a:pPr>
             <a:r>
-              <a:t>BUILT TO RUN OFFLINE. VALIDATED ON REAL SENTINEL-2.</a:t>
+              <a:t>04 — FEASIBILITY &amp; VIABILITY</a:t>
             </a:r>
           </a:p>
           <a:p>
             <a:pPr>
-              <a:defRPr sz="1000">
+              <a:defRPr sz="950">
                 <a:solidFill>
                   <a:srgbClr val="94A3B8"/>
                 </a:solidFill>
@@ -6579,7 +8273,7 @@
               </a:defRPr>
             </a:pPr>
             <a:r>
-              <a:t>Empirical prototype benchmarks, air-gapped runtime verification, and transparent multi-date Sentinel-2 trajectory validation.</a:t>
+              <a:t>BUILT TO RUN LOCALLY. VALIDATED ON REAL SENTINEL-2.</a:t>
             </a:r>
           </a:p>
         </p:txBody>
@@ -6592,8 +8286,8 @@
         </p:nvSpPr>
         <p:spPr>
           <a:xfrm>
-            <a:off x="594360" y="6537960"/>
-            <a:ext cx="11002975" cy="228600"/>
+            <a:off x="594360" y="6565392"/>
+            <a:ext cx="11002975" cy="201168"/>
           </a:xfrm>
           <a:prstGeom prst="rect">
             <a:avLst/>
@@ -6607,25 +8301,25 @@
           <a:lstStyle/>
           <a:p>
             <a:r>
-              <a:rPr sz="800">
+              <a:rPr sz="780">
                 <a:solidFill>
                   <a:srgbClr val="64748B"/>
                 </a:solidFill>
                 <a:latin typeface="Segoe UI"/>
               </a:rPr>
-              <a:t>GEOAI — Evidence-Based Satellite Investigation Workstation  |  Ministry of Defence (MoD) / Indian Army — DGIS  |  SIH 2026 Submission</a:t>
-            </a:r>
-            <a:r>
-              <a:rPr sz="800">
+              <a:t>TERRAE — Earth Intelligence Satellite Investigation Console  |  Ministry of Defence / Indian Army — DGIS  |  SIH 2026 Submission</a:t>
+            </a:r>
+            <a:r>
+              <a:rPr sz="780">
                 <a:solidFill>
                   <a:srgbClr val="64748B"/>
                 </a:solidFill>
                 <a:latin typeface="Segoe UI"/>
               </a:rPr>
-              <a:t>                                                                    Live Console: </a:t>
-            </a:r>
-            <a:r>
-              <a:rPr sz="800">
+              <a:t>                                                         Live Console: </a:t>
+            </a:r>
+            <a:r>
+              <a:rPr sz="780">
                 <a:solidFill>
                   <a:srgbClr val="4EA8DE"/>
                 </a:solidFill>
@@ -6645,520 +8339,8 @@
         </p:nvSpPr>
         <p:spPr>
           <a:xfrm>
-            <a:off x="594360" y="1234440"/>
-            <a:ext cx="2606040" cy="1691640"/>
-          </a:xfrm>
-          <a:prstGeom prst="roundRect">
-            <a:avLst/>
-          </a:prstGeom>
-          <a:solidFill>
-            <a:srgbClr val="111724"/>
-          </a:solidFill>
-          <a:ln w="12700">
-            <a:solidFill>
-              <a:srgbClr val="4EA8DE"/>
-            </a:solidFill>
-          </a:ln>
-        </p:spPr>
-        <p:style>
-          <a:lnRef idx="1">
-            <a:schemeClr val="accent1"/>
-          </a:lnRef>
-          <a:fillRef idx="3">
-            <a:schemeClr val="accent1"/>
-          </a:fillRef>
-          <a:effectRef idx="2">
-            <a:schemeClr val="accent1"/>
-          </a:effectRef>
-          <a:fontRef idx="minor">
-            <a:schemeClr val="lt1"/>
-          </a:fontRef>
-        </p:style>
-        <p:txBody>
-          <a:bodyPr rtlCol="0" anchor="ctr"/>
-          <a:lstStyle/>
-          <a:p>
-            <a:pPr algn="ctr"/>
-          </a:p>
-        </p:txBody>
-      </p:sp>
-      <p:sp>
-        <p:nvSpPr>
-          <p:cNvPr id="9" name="TextBox 8"/>
-          <p:cNvSpPr txBox="1"/>
-          <p:nvPr/>
-        </p:nvSpPr>
-        <p:spPr>
-          <a:xfrm>
-            <a:off x="704088" y="1325880"/>
-            <a:ext cx="2386584" cy="1508760"/>
-          </a:xfrm>
-          <a:prstGeom prst="rect">
-            <a:avLst/>
-          </a:prstGeom>
-          <a:noFill/>
-        </p:spPr>
-        <p:txBody>
-          <a:bodyPr wrap="square" lIns="0" tIns="0" rIns="0" bIns="0">
-            <a:spAutoFit/>
-          </a:bodyPr>
-          <a:lstStyle/>
-          <a:p>
-            <a:pPr>
-              <a:defRPr sz="850" b="1">
-                <a:solidFill>
-                  <a:srgbClr val="4EA8DE"/>
-                </a:solidFill>
-                <a:latin typeface="Consolas"/>
-              </a:defRPr>
-            </a:pPr>
-            <a:r>
-              <a:t>BLOCK 1: LOCAL AI RUNTIME</a:t>
-            </a:r>
-          </a:p>
-          <a:p>
-            <a:pPr>
-              <a:spcBef>
-                <a:spcPts val="100"/>
-              </a:spcBef>
-            </a:pPr>
-            <a:r>
-              <a:rPr sz="740" b="1">
-                <a:solidFill>
-                  <a:srgbClr val="F5F3ED"/>
-                </a:solidFill>
-                <a:latin typeface="Segoe UI"/>
-              </a:rPr>
-              <a:t>• Model: </a:t>
-            </a:r>
-            <a:r>
-              <a:rPr sz="720">
-                <a:solidFill>
-                  <a:srgbClr val="94A3B8"/>
-                </a:solidFill>
-                <a:latin typeface="Segoe UI"/>
-              </a:rPr>
-              <a:t>RemoteCLIP ViT-B/32 (Local)</a:t>
-            </a:r>
-          </a:p>
-          <a:p>
-            <a:pPr>
-              <a:spcBef>
-                <a:spcPts val="100"/>
-              </a:spcBef>
-            </a:pPr>
-            <a:r>
-              <a:rPr sz="740" b="1">
-                <a:solidFill>
-                  <a:srgbClr val="F5F3ED"/>
-                </a:solidFill>
-                <a:latin typeface="Segoe UI"/>
-              </a:rPr>
-              <a:t>• Index: </a:t>
-            </a:r>
-            <a:r>
-              <a:rPr sz="720">
-                <a:solidFill>
-                  <a:srgbClr val="94A3B8"/>
-                </a:solidFill>
-                <a:latin typeface="Segoe UI"/>
-              </a:rPr>
-              <a:t>In-Memory FAISS Flat L2</a:t>
-            </a:r>
-          </a:p>
-          <a:p>
-            <a:pPr>
-              <a:spcBef>
-                <a:spcPts val="100"/>
-              </a:spcBef>
-            </a:pPr>
-            <a:r>
-              <a:rPr sz="740" b="1">
-                <a:solidFill>
-                  <a:srgbClr val="F5F3ED"/>
-                </a:solidFill>
-                <a:latin typeface="Segoe UI"/>
-              </a:rPr>
-              <a:t>• Model Load: </a:t>
-            </a:r>
-            <a:r>
-              <a:rPr sz="720">
-                <a:solidFill>
-                  <a:srgbClr val="94A3B8"/>
-                </a:solidFill>
-                <a:latin typeface="Segoe UI"/>
-              </a:rPr>
-              <a:t>~3.3 seconds</a:t>
-            </a:r>
-          </a:p>
-          <a:p>
-            <a:pPr>
-              <a:spcBef>
-                <a:spcPts val="100"/>
-              </a:spcBef>
-            </a:pPr>
-            <a:r>
-              <a:rPr sz="740" b="1">
-                <a:solidFill>
-                  <a:srgbClr val="F5F3ED"/>
-                </a:solidFill>
-                <a:latin typeface="Segoe UI"/>
-              </a:rPr>
-              <a:t>• Image Embed: </a:t>
-            </a:r>
-            <a:r>
-              <a:rPr sz="720">
-                <a:solidFill>
-                  <a:srgbClr val="94A3B8"/>
-                </a:solidFill>
-                <a:latin typeface="Segoe UI"/>
-              </a:rPr>
-              <a:t>~78 ms / image</a:t>
-            </a:r>
-          </a:p>
-          <a:p>
-            <a:pPr>
-              <a:spcBef>
-                <a:spcPts val="100"/>
-              </a:spcBef>
-            </a:pPr>
-            <a:r>
-              <a:rPr sz="740" b="1">
-                <a:solidFill>
-                  <a:srgbClr val="F5F3ED"/>
-                </a:solidFill>
-                <a:latin typeface="Segoe UI"/>
-              </a:rPr>
-              <a:t>• Text Embed: </a:t>
-            </a:r>
-            <a:r>
-              <a:rPr sz="720">
-                <a:solidFill>
-                  <a:srgbClr val="94A3B8"/>
-                </a:solidFill>
-                <a:latin typeface="Segoe UI"/>
-              </a:rPr>
-              <a:t>~43–46 ms / query</a:t>
-            </a:r>
-          </a:p>
-          <a:p>
-            <a:pPr>
-              <a:spcBef>
-                <a:spcPts val="100"/>
-              </a:spcBef>
-            </a:pPr>
-            <a:r>
-              <a:rPr sz="740" b="1">
-                <a:solidFill>
-                  <a:srgbClr val="F5F3ED"/>
-                </a:solidFill>
-                <a:latin typeface="Segoe UI"/>
-              </a:rPr>
-              <a:t>• FAISS Search: </a:t>
-            </a:r>
-            <a:r>
-              <a:rPr sz="720">
-                <a:solidFill>
-                  <a:srgbClr val="94A3B8"/>
-                </a:solidFill>
-                <a:latin typeface="Segoe UI"/>
-              </a:rPr>
-              <a:t>~1.5–2 ms / query</a:t>
-            </a:r>
-          </a:p>
-          <a:p>
-            <a:pPr>
-              <a:spcBef>
-                <a:spcPts val="100"/>
-              </a:spcBef>
-            </a:pPr>
-            <a:r>
-              <a:rPr sz="740" b="1">
-                <a:solidFill>
-                  <a:srgbClr val="F5F3ED"/>
-                </a:solidFill>
-                <a:latin typeface="Segoe UI"/>
-              </a:rPr>
-              <a:t>• RAM Delta: </a:t>
-            </a:r>
-            <a:r>
-              <a:rPr sz="720">
-                <a:solidFill>
-                  <a:srgbClr val="94A3B8"/>
-                </a:solidFill>
-                <a:latin typeface="Segoe UI"/>
-              </a:rPr>
-              <a:t>~774 MB footprint</a:t>
-            </a:r>
-          </a:p>
-        </p:txBody>
-      </p:sp>
-      <p:sp>
-        <p:nvSpPr>
-          <p:cNvPr id="10" name="Rounded Rectangle 9"/>
-          <p:cNvSpPr/>
-          <p:nvPr/>
-        </p:nvSpPr>
-        <p:spPr>
-          <a:xfrm>
-            <a:off x="3392424" y="1234440"/>
-            <a:ext cx="2606040" cy="1691640"/>
-          </a:xfrm>
-          <a:prstGeom prst="roundRect">
-            <a:avLst/>
-          </a:prstGeom>
-          <a:solidFill>
-            <a:srgbClr val="111724"/>
-          </a:solidFill>
-          <a:ln w="12700">
-            <a:solidFill>
-              <a:srgbClr val="52B788"/>
-            </a:solidFill>
-          </a:ln>
-        </p:spPr>
-        <p:style>
-          <a:lnRef idx="1">
-            <a:schemeClr val="accent1"/>
-          </a:lnRef>
-          <a:fillRef idx="3">
-            <a:schemeClr val="accent1"/>
-          </a:fillRef>
-          <a:effectRef idx="2">
-            <a:schemeClr val="accent1"/>
-          </a:effectRef>
-          <a:fontRef idx="minor">
-            <a:schemeClr val="lt1"/>
-          </a:fontRef>
-        </p:style>
-        <p:txBody>
-          <a:bodyPr rtlCol="0" anchor="ctr"/>
-          <a:lstStyle/>
-          <a:p>
-            <a:pPr algn="ctr"/>
-          </a:p>
-        </p:txBody>
-      </p:sp>
-      <p:sp>
-        <p:nvSpPr>
-          <p:cNvPr id="11" name="TextBox 10"/>
-          <p:cNvSpPr txBox="1"/>
-          <p:nvPr/>
-        </p:nvSpPr>
-        <p:spPr>
-          <a:xfrm>
-            <a:off x="3502152" y="1325880"/>
-            <a:ext cx="2386584" cy="1508760"/>
-          </a:xfrm>
-          <a:prstGeom prst="rect">
-            <a:avLst/>
-          </a:prstGeom>
-          <a:noFill/>
-        </p:spPr>
-        <p:txBody>
-          <a:bodyPr wrap="square" lIns="0" tIns="0" rIns="0" bIns="0">
-            <a:spAutoFit/>
-          </a:bodyPr>
-          <a:lstStyle/>
-          <a:p>
-            <a:pPr>
-              <a:defRPr sz="850" b="1">
-                <a:solidFill>
-                  <a:srgbClr val="52B788"/>
-                </a:solidFill>
-                <a:latin typeface="Consolas"/>
-              </a:defRPr>
-            </a:pPr>
-            <a:r>
-              <a:t>BLOCK 2: REAL SATELLITE DATA</a:t>
-            </a:r>
-          </a:p>
-          <a:p>
-            <a:pPr>
-              <a:spcBef>
-                <a:spcPts val="100"/>
-              </a:spcBef>
-            </a:pPr>
-            <a:r>
-              <a:rPr sz="740" b="1">
-                <a:solidFill>
-                  <a:srgbClr val="F5F3ED"/>
-                </a:solidFill>
-                <a:latin typeface="Segoe UI"/>
-              </a:rPr>
-              <a:t>• Sensor: </a:t>
-            </a:r>
-            <a:r>
-              <a:rPr sz="720">
-                <a:solidFill>
-                  <a:srgbClr val="94A3B8"/>
-                </a:solidFill>
-                <a:latin typeface="Segoe UI"/>
-              </a:rPr>
-              <a:t>ESA Sentinel-2A Level-2A</a:t>
-            </a:r>
-          </a:p>
-          <a:p>
-            <a:pPr>
-              <a:spcBef>
-                <a:spcPts val="100"/>
-              </a:spcBef>
-            </a:pPr>
-            <a:r>
-              <a:rPr sz="740" b="1">
-                <a:solidFill>
-                  <a:srgbClr val="F5F3ED"/>
-                </a:solidFill>
-                <a:latin typeface="Segoe UI"/>
-              </a:rPr>
-              <a:t>• Reflectance: </a:t>
-            </a:r>
-            <a:r>
-              <a:rPr sz="720">
-                <a:solidFill>
-                  <a:srgbClr val="94A3B8"/>
-                </a:solidFill>
-                <a:latin typeface="Segoe UI"/>
-              </a:rPr>
-              <a:t>Bottom-Of-Atmosphere (BOA)</a:t>
-            </a:r>
-          </a:p>
-          <a:p>
-            <a:pPr>
-              <a:spcBef>
-                <a:spcPts val="100"/>
-              </a:spcBef>
-            </a:pPr>
-            <a:r>
-              <a:rPr sz="740" b="1">
-                <a:solidFill>
-                  <a:srgbClr val="F5F3ED"/>
-                </a:solidFill>
-                <a:latin typeface="Segoe UI"/>
-              </a:rPr>
-              <a:t>• Bands: </a:t>
-            </a:r>
-            <a:r>
-              <a:rPr sz="720">
-                <a:solidFill>
-                  <a:srgbClr val="94A3B8"/>
-                </a:solidFill>
-                <a:latin typeface="Segoe UI"/>
-              </a:rPr>
-              <a:t>B02, B03, B04, B08 (10m GSD)</a:t>
-            </a:r>
-          </a:p>
-          <a:p>
-            <a:pPr>
-              <a:spcBef>
-                <a:spcPts val="100"/>
-              </a:spcBef>
-            </a:pPr>
-            <a:r>
-              <a:rPr sz="740" b="1">
-                <a:solidFill>
-                  <a:srgbClr val="F5F3ED"/>
-                </a:solidFill>
-                <a:latin typeface="Segoe UI"/>
-              </a:rPr>
-              <a:t>• Tile / CRS: </a:t>
-            </a:r>
-            <a:r>
-              <a:rPr sz="720">
-                <a:solidFill>
-                  <a:srgbClr val="94A3B8"/>
-                </a:solidFill>
-                <a:latin typeface="Segoe UI"/>
-              </a:rPr>
-              <a:t>MGRS 43RGM / EPSG:32643</a:t>
-            </a:r>
-          </a:p>
-          <a:p>
-            <a:pPr>
-              <a:spcBef>
-                <a:spcPts val="100"/>
-              </a:spcBef>
-            </a:pPr>
-            <a:r>
-              <a:rPr sz="740" b="1">
-                <a:solidFill>
-                  <a:srgbClr val="F5F3ED"/>
-                </a:solidFill>
-                <a:latin typeface="Segoe UI"/>
-              </a:rPr>
-              <a:t>• Tile Window: </a:t>
-            </a:r>
-            <a:r>
-              <a:rPr sz="720">
-                <a:solidFill>
-                  <a:srgbClr val="94A3B8"/>
-                </a:solidFill>
-                <a:latin typeface="Segoe UI"/>
-              </a:rPr>
-              <a:t>512×512 (262,144 valid px)</a:t>
-            </a:r>
-          </a:p>
-          <a:p>
-            <a:pPr>
-              <a:spcBef>
-                <a:spcPts val="100"/>
-              </a:spcBef>
-            </a:pPr>
-            <a:r>
-              <a:rPr sz="740" b="1">
-                <a:solidFill>
-                  <a:srgbClr val="F5F3ED"/>
-                </a:solidFill>
-                <a:latin typeface="Segoe UI"/>
-              </a:rPr>
-              <a:t>• Location: </a:t>
-            </a:r>
-            <a:r>
-              <a:rPr sz="720">
-                <a:solidFill>
-                  <a:srgbClr val="94A3B8"/>
-                </a:solidFill>
-                <a:latin typeface="Segoe UI"/>
-              </a:rPr>
-              <a:t>NCR / Greater Noida basin</a:t>
-            </a:r>
-          </a:p>
-          <a:p>
-            <a:pPr>
-              <a:spcBef>
-                <a:spcPts val="100"/>
-              </a:spcBef>
-            </a:pPr>
-            <a:r>
-              <a:rPr sz="740" b="1">
-                <a:solidFill>
-                  <a:srgbClr val="F5F3ED"/>
-                </a:solidFill>
-                <a:latin typeface="Segoe UI"/>
-              </a:rPr>
-              <a:t>• SCL Masking: </a:t>
-            </a:r>
-            <a:r>
-              <a:rPr sz="720">
-                <a:solidFill>
-                  <a:srgbClr val="94A3B8"/>
-                </a:solidFill>
-                <a:latin typeface="Segoe UI"/>
-              </a:rPr>
-              <a:t>Cloud, shadow &amp; snow filtering</a:t>
-            </a:r>
-          </a:p>
-        </p:txBody>
-      </p:sp>
-      <p:sp>
-        <p:nvSpPr>
-          <p:cNvPr id="12" name="Rounded Rectangle 11"/>
-          <p:cNvSpPr/>
-          <p:nvPr/>
-        </p:nvSpPr>
-        <p:spPr>
-          <a:xfrm>
-            <a:off x="6190488" y="1234440"/>
-            <a:ext cx="2606040" cy="1691640"/>
+            <a:off x="594360" y="1188720"/>
+            <a:ext cx="2926080" cy="4617720"/>
           </a:xfrm>
           <a:prstGeom prst="roundRect">
             <a:avLst/>
@@ -7196,14 +8378,14 @@
       </p:sp>
       <p:sp>
         <p:nvSpPr>
-          <p:cNvPr id="13" name="TextBox 12"/>
+          <p:cNvPr id="9" name="TextBox 8"/>
           <p:cNvSpPr txBox="1"/>
           <p:nvPr/>
         </p:nvSpPr>
         <p:spPr>
           <a:xfrm>
-            <a:off x="6300216" y="1325880"/>
-            <a:ext cx="2386584" cy="1508760"/>
+            <a:off x="731520" y="1298448"/>
+            <a:ext cx="2651760" cy="320040"/>
           </a:xfrm>
           <a:prstGeom prst="rect">
             <a:avLst/>
@@ -7211,13 +8393,13 @@
           <a:noFill/>
         </p:spPr>
         <p:txBody>
-          <a:bodyPr wrap="square" lIns="0" tIns="0" rIns="0" bIns="0">
+          <a:bodyPr wrap="none" lIns="0" tIns="0" rIns="0" bIns="0">
             <a:spAutoFit/>
           </a:bodyPr>
           <a:lstStyle/>
           <a:p>
             <a:pPr>
-              <a:defRPr sz="850" b="1">
+              <a:defRPr sz="900" b="1">
                 <a:solidFill>
                   <a:srgbClr val="C5A869"/>
                 </a:solidFill>
@@ -7225,206 +8407,31 @@
               </a:defRPr>
             </a:pPr>
             <a:r>
-              <a:t>BLOCK 3: SOVEREIGN &amp; OFFLINE</a:t>
-            </a:r>
-          </a:p>
-          <a:p>
-            <a:pPr>
-              <a:spcBef>
-                <a:spcPts val="100"/>
-              </a:spcBef>
-            </a:pPr>
-            <a:r>
-              <a:rPr sz="740" b="1">
-                <a:solidFill>
-                  <a:srgbClr val="F5F3ED"/>
-                </a:solidFill>
-                <a:latin typeface="Segoe UI"/>
-              </a:rPr>
-              <a:t>• Offline Mode: </a:t>
-            </a:r>
-            <a:r>
-              <a:rPr sz="720">
-                <a:solidFill>
-                  <a:srgbClr val="94A3B8"/>
-                </a:solidFill>
-                <a:latin typeface="Segoe UI"/>
-              </a:rPr>
-              <a:t>Validated air-gapped runtime</a:t>
-            </a:r>
-          </a:p>
-          <a:p>
-            <a:pPr>
-              <a:spcBef>
-                <a:spcPts val="100"/>
-              </a:spcBef>
-            </a:pPr>
-            <a:r>
-              <a:rPr sz="740" b="1">
-                <a:solidFill>
-                  <a:srgbClr val="F5F3ED"/>
-                </a:solidFill>
-                <a:latin typeface="Segoe UI"/>
-              </a:rPr>
-              <a:t>• Flags Tested: </a:t>
-            </a:r>
-            <a:r>
-              <a:rPr sz="720">
-                <a:solidFill>
-                  <a:srgbClr val="94A3B8"/>
-                </a:solidFill>
-                <a:latin typeface="Segoe UI"/>
-              </a:rPr>
-              <a:t>HF_HUB_OFFLINE=1</a:t>
-            </a:r>
-          </a:p>
-          <a:p>
-            <a:pPr>
-              <a:spcBef>
-                <a:spcPts val="100"/>
-              </a:spcBef>
-            </a:pPr>
-            <a:r>
-              <a:rPr sz="740" b="1">
-                <a:solidFill>
-                  <a:srgbClr val="F5F3ED"/>
-                </a:solidFill>
-                <a:latin typeface="Segoe UI"/>
-              </a:rPr>
-              <a:t>• Transformers: </a:t>
-            </a:r>
-            <a:r>
-              <a:rPr sz="720">
-                <a:solidFill>
-                  <a:srgbClr val="94A3B8"/>
-                </a:solidFill>
-                <a:latin typeface="Segoe UI"/>
-              </a:rPr>
-              <a:t>TRANSFORMERS_OFFLINE=1</a:t>
-            </a:r>
-          </a:p>
-          <a:p>
-            <a:pPr>
-              <a:spcBef>
-                <a:spcPts val="100"/>
-              </a:spcBef>
-            </a:pPr>
-            <a:r>
-              <a:rPr sz="740" b="1">
-                <a:solidFill>
-                  <a:srgbClr val="F5F3ED"/>
-                </a:solidFill>
-                <a:latin typeface="Segoe UI"/>
-              </a:rPr>
-              <a:t>• Network Egress: </a:t>
-            </a:r>
-            <a:r>
-              <a:rPr sz="720">
-                <a:solidFill>
-                  <a:srgbClr val="94A3B8"/>
-                </a:solidFill>
-                <a:latin typeface="Segoe UI"/>
-              </a:rPr>
-              <a:t>ZERO runtime external calls</a:t>
-            </a:r>
-          </a:p>
-          <a:p>
-            <a:pPr>
-              <a:spcBef>
-                <a:spcPts val="100"/>
-              </a:spcBef>
-            </a:pPr>
-            <a:r>
-              <a:rPr sz="740" b="1">
-                <a:solidFill>
-                  <a:srgbClr val="F5F3ED"/>
-                </a:solidFill>
-                <a:latin typeface="Segoe UI"/>
-              </a:rPr>
-              <a:t>• Data Residency: </a:t>
-            </a:r>
-            <a:r>
-              <a:rPr sz="720">
-                <a:solidFill>
-                  <a:srgbClr val="94A3B8"/>
-                </a:solidFill>
-                <a:latin typeface="Segoe UI"/>
-              </a:rPr>
-              <a:t>100% on-premises storage</a:t>
-            </a:r>
-          </a:p>
-          <a:p>
-            <a:pPr>
-              <a:spcBef>
-                <a:spcPts val="100"/>
-              </a:spcBef>
-            </a:pPr>
-            <a:r>
-              <a:rPr sz="740" b="1">
-                <a:solidFill>
-                  <a:srgbClr val="F5F3ED"/>
-                </a:solidFill>
-                <a:latin typeface="Segoe UI"/>
-              </a:rPr>
-              <a:t>• Target Enclave: </a:t>
-            </a:r>
-            <a:r>
-              <a:rPr sz="720">
-                <a:solidFill>
-                  <a:srgbClr val="94A3B8"/>
-                </a:solidFill>
-                <a:latin typeface="Segoe UI"/>
-              </a:rPr>
-              <a:t>Air-gapped SCIF workstation</a:t>
-            </a:r>
-          </a:p>
-          <a:p>
-            <a:pPr>
-              <a:spcBef>
-                <a:spcPts val="100"/>
-              </a:spcBef>
-            </a:pPr>
-            <a:r>
-              <a:rPr sz="740" b="1">
-                <a:solidFill>
-                  <a:srgbClr val="F5F3ED"/>
-                </a:solidFill>
-                <a:latin typeface="Segoe UI"/>
-              </a:rPr>
-              <a:t>• Security Trail: </a:t>
-            </a:r>
-            <a:r>
-              <a:rPr sz="720">
-                <a:solidFill>
-                  <a:srgbClr val="94A3B8"/>
-                </a:solidFill>
-                <a:latin typeface="Segoe UI"/>
-              </a:rPr>
-              <a:t>Cryptographic SHA-256 logs</a:t>
-            </a:r>
-          </a:p>
-        </p:txBody>
-      </p:sp>
-      <p:sp>
-        <p:nvSpPr>
-          <p:cNvPr id="14" name="Rounded Rectangle 13"/>
+              <a:t>TECHNICAL FEASIBILITY</a:t>
+            </a:r>
+          </a:p>
+        </p:txBody>
+      </p:sp>
+      <p:sp>
+        <p:nvSpPr>
+          <p:cNvPr id="10" name="Rounded Rectangle 9"/>
           <p:cNvSpPr/>
           <p:nvPr/>
         </p:nvSpPr>
         <p:spPr>
           <a:xfrm>
-            <a:off x="8988552" y="1234440"/>
-            <a:ext cx="2606040" cy="1691640"/>
+            <a:off x="731520" y="1691640"/>
+            <a:ext cx="2651760" cy="1261872"/>
           </a:xfrm>
           <a:prstGeom prst="roundRect">
             <a:avLst/>
           </a:prstGeom>
           <a:solidFill>
-            <a:srgbClr val="111724"/>
+            <a:srgbClr val="171F30"/>
           </a:solidFill>
           <a:ln w="12700">
             <a:solidFill>
-              <a:srgbClr val="F5F3ED"/>
+              <a:srgbClr val="25324A"/>
             </a:solidFill>
           </a:ln>
         </p:spPr>
@@ -7452,14 +8459,14 @@
       </p:sp>
       <p:sp>
         <p:nvSpPr>
-          <p:cNvPr id="15" name="TextBox 14"/>
+          <p:cNvPr id="11" name="TextBox 10"/>
           <p:cNvSpPr txBox="1"/>
           <p:nvPr/>
         </p:nvSpPr>
         <p:spPr>
           <a:xfrm>
-            <a:off x="9098280" y="1325880"/>
-            <a:ext cx="2386584" cy="1508760"/>
+            <a:off x="822960" y="1746504"/>
+            <a:ext cx="2468880" cy="1152144"/>
           </a:xfrm>
           <a:prstGeom prst="rect">
             <a:avLst/>
@@ -7473,190 +8480,477 @@
           <a:lstStyle/>
           <a:p>
             <a:pPr>
-              <a:defRPr sz="850" b="1">
-                <a:solidFill>
-                  <a:srgbClr val="F5F3ED"/>
+              <a:defRPr sz="760" b="1">
+                <a:solidFill>
+                  <a:srgbClr val="4EA8DE"/>
                 </a:solidFill>
                 <a:latin typeface="Consolas"/>
               </a:defRPr>
             </a:pPr>
             <a:r>
-              <a:t>BLOCK 4: SOFTWARE HEALTH</a:t>
-            </a:r>
-          </a:p>
+              <a:t>BLOCK 1: LOCAL AI RUNTIME</a:t>
+            </a:r>
+          </a:p>
+          <a:p>
+            <a:r>
+              <a:rPr sz="700" b="1">
+                <a:solidFill>
+                  <a:srgbClr val="F5F3ED"/>
+                </a:solidFill>
+                <a:latin typeface="Segoe UI"/>
+              </a:rPr>
+              <a:t>• Model Checkpoint: </a:t>
+            </a:r>
+            <a:r>
+              <a:rPr sz="680">
+                <a:solidFill>
+                  <a:srgbClr val="94A3B8"/>
+                </a:solidFill>
+                <a:latin typeface="Segoe UI"/>
+              </a:rPr>
+              <a:t>RemoteCLIP ViT-B-32 (605 MB)</a:t>
+            </a:r>
+          </a:p>
+          <a:p>
+            <a:r>
+              <a:rPr sz="700" b="1">
+                <a:solidFill>
+                  <a:srgbClr val="F5F3ED"/>
+                </a:solidFill>
+                <a:latin typeface="Segoe UI"/>
+              </a:rPr>
+              <a:t>• Host Memory: </a:t>
+            </a:r>
+            <a:r>
+              <a:rPr sz="680">
+                <a:solidFill>
+                  <a:srgbClr val="94A3B8"/>
+                </a:solidFill>
+                <a:latin typeface="Segoe UI"/>
+              </a:rPr>
+              <a:t>8–16 GB RAM (CPU sufficient)</a:t>
+            </a:r>
+          </a:p>
+          <a:p>
+            <a:r>
+              <a:rPr sz="700" b="1">
+                <a:solidFill>
+                  <a:srgbClr val="F5F3ED"/>
+                </a:solidFill>
+                <a:latin typeface="Segoe UI"/>
+              </a:rPr>
+              <a:t>• Vector Index: </a:t>
+            </a:r>
+            <a:r>
+              <a:rPr sz="680">
+                <a:solidFill>
+                  <a:srgbClr val="94A3B8"/>
+                </a:solidFill>
+                <a:latin typeface="Segoe UI"/>
+              </a:rPr>
+              <a:t>FAISS CPU IndexIDMap(FlatIP)</a:t>
+            </a:r>
+          </a:p>
+          <a:p>
+            <a:r>
+              <a:rPr sz="700" b="1">
+                <a:solidFill>
+                  <a:srgbClr val="F5F3ED"/>
+                </a:solidFill>
+                <a:latin typeface="Segoe UI"/>
+              </a:rPr>
+              <a:t>• Index Latency: </a:t>
+            </a:r>
+            <a:r>
+              <a:rPr sz="680">
+                <a:solidFill>
+                  <a:srgbClr val="94A3B8"/>
+                </a:solidFill>
+                <a:latin typeface="Segoe UI"/>
+              </a:rPr>
+              <a:t>2.0 ms per 24-tile scan</a:t>
+            </a:r>
+          </a:p>
+          <a:p>
+            <a:r>
+              <a:rPr sz="700" b="1">
+                <a:solidFill>
+                  <a:srgbClr val="F5F3ED"/>
+                </a:solidFill>
+                <a:latin typeface="Segoe UI"/>
+              </a:rPr>
+              <a:t>• Total Inference: </a:t>
+            </a:r>
+            <a:r>
+              <a:rPr sz="680">
+                <a:solidFill>
+                  <a:srgbClr val="94A3B8"/>
+                </a:solidFill>
+                <a:latin typeface="Segoe UI"/>
+              </a:rPr>
+              <a:t>66.1 ms end-to-end query</a:t>
+            </a:r>
+          </a:p>
+        </p:txBody>
+      </p:sp>
+      <p:sp>
+        <p:nvSpPr>
+          <p:cNvPr id="12" name="Rounded Rectangle 11"/>
+          <p:cNvSpPr/>
+          <p:nvPr/>
+        </p:nvSpPr>
+        <p:spPr>
+          <a:xfrm>
+            <a:off x="731520" y="3063240"/>
+            <a:ext cx="2651760" cy="1261872"/>
+          </a:xfrm>
+          <a:prstGeom prst="roundRect">
+            <a:avLst/>
+          </a:prstGeom>
+          <a:solidFill>
+            <a:srgbClr val="171F30"/>
+          </a:solidFill>
+          <a:ln w="12700">
+            <a:solidFill>
+              <a:srgbClr val="25324A"/>
+            </a:solidFill>
+          </a:ln>
+        </p:spPr>
+        <p:style>
+          <a:lnRef idx="1">
+            <a:schemeClr val="accent1"/>
+          </a:lnRef>
+          <a:fillRef idx="3">
+            <a:schemeClr val="accent1"/>
+          </a:fillRef>
+          <a:effectRef idx="2">
+            <a:schemeClr val="accent1"/>
+          </a:effectRef>
+          <a:fontRef idx="minor">
+            <a:schemeClr val="lt1"/>
+          </a:fontRef>
+        </p:style>
+        <p:txBody>
+          <a:bodyPr rtlCol="0" anchor="ctr"/>
+          <a:lstStyle/>
+          <a:p>
+            <a:pPr algn="ctr"/>
+          </a:p>
+        </p:txBody>
+      </p:sp>
+      <p:sp>
+        <p:nvSpPr>
+          <p:cNvPr id="13" name="TextBox 12"/>
+          <p:cNvSpPr txBox="1"/>
+          <p:nvPr/>
+        </p:nvSpPr>
+        <p:spPr>
+          <a:xfrm>
+            <a:off x="822960" y="3118104"/>
+            <a:ext cx="2468880" cy="1152144"/>
+          </a:xfrm>
+          <a:prstGeom prst="rect">
+            <a:avLst/>
+          </a:prstGeom>
+          <a:noFill/>
+        </p:spPr>
+        <p:txBody>
+          <a:bodyPr wrap="square" lIns="0" tIns="0" rIns="0" bIns="0">
+            <a:spAutoFit/>
+          </a:bodyPr>
+          <a:lstStyle/>
           <a:p>
             <a:pPr>
-              <a:spcBef>
-                <a:spcPts val="100"/>
-              </a:spcBef>
+              <a:defRPr sz="760" b="1">
+                <a:solidFill>
+                  <a:srgbClr val="52B788"/>
+                </a:solidFill>
+                <a:latin typeface="Consolas"/>
+              </a:defRPr>
             </a:pPr>
             <a:r>
-              <a:rPr sz="740" b="1">
+              <a:t>BLOCK 2: REAL SATELLITE DATA</a:t>
+            </a:r>
+          </a:p>
+          <a:p>
+            <a:r>
+              <a:rPr sz="700" b="1">
                 <a:solidFill>
                   <a:srgbClr val="F5F3ED"/>
                 </a:solidFill>
                 <a:latin typeface="Segoe UI"/>
               </a:rPr>
-              <a:t>• Test Suite: </a:t>
-            </a:r>
-            <a:r>
-              <a:rPr sz="720">
+              <a:t>• Sensor: </a:t>
+            </a:r>
+            <a:r>
+              <a:rPr sz="680">
                 <a:solidFill>
                   <a:srgbClr val="94A3B8"/>
                 </a:solidFill>
                 <a:latin typeface="Segoe UI"/>
               </a:rPr>
-              <a:t>122 / 122 Tests Passing</a:t>
-            </a:r>
-          </a:p>
+              <a:t>ESA Copernicus Sentinel-2 MSI</a:t>
+            </a:r>
+          </a:p>
+          <a:p>
+            <a:r>
+              <a:rPr sz="700" b="1">
+                <a:solidFill>
+                  <a:srgbClr val="F5F3ED"/>
+                </a:solidFill>
+                <a:latin typeface="Segoe UI"/>
+              </a:rPr>
+              <a:t>• Level &amp; Bands: </a:t>
+            </a:r>
+            <a:r>
+              <a:rPr sz="680">
+                <a:solidFill>
+                  <a:srgbClr val="94A3B8"/>
+                </a:solidFill>
+                <a:latin typeface="Segoe UI"/>
+              </a:rPr>
+              <a:t>Level-2A BOA (B02, B03, B04, B08)</a:t>
+            </a:r>
+          </a:p>
+          <a:p>
+            <a:r>
+              <a:rPr sz="700" b="1">
+                <a:solidFill>
+                  <a:srgbClr val="F5F3ED"/>
+                </a:solidFill>
+                <a:latin typeface="Segoe UI"/>
+              </a:rPr>
+              <a:t>• Grid Standard: </a:t>
+            </a:r>
+            <a:r>
+              <a:rPr sz="680">
+                <a:solidFill>
+                  <a:srgbClr val="94A3B8"/>
+                </a:solidFill>
+                <a:latin typeface="Segoe UI"/>
+              </a:rPr>
+              <a:t>MGRS 43RGM / EPSG:32643 UTM</a:t>
+            </a:r>
+          </a:p>
+          <a:p>
+            <a:r>
+              <a:rPr sz="700" b="1">
+                <a:solidFill>
+                  <a:srgbClr val="F5F3ED"/>
+                </a:solidFill>
+                <a:latin typeface="Segoe UI"/>
+              </a:rPr>
+              <a:t>• Spatial Resolution: </a:t>
+            </a:r>
+            <a:r>
+              <a:rPr sz="680">
+                <a:solidFill>
+                  <a:srgbClr val="94A3B8"/>
+                </a:solidFill>
+                <a:latin typeface="Segoe UI"/>
+              </a:rPr>
+              <a:t>10m Ground Sample Distance</a:t>
+            </a:r>
+          </a:p>
+          <a:p>
+            <a:r>
+              <a:rPr sz="700" b="1">
+                <a:solidFill>
+                  <a:srgbClr val="F5F3ED"/>
+                </a:solidFill>
+                <a:latin typeface="Segoe UI"/>
+              </a:rPr>
+              <a:t>• Cloud Handling: </a:t>
+            </a:r>
+            <a:r>
+              <a:rPr sz="680">
+                <a:solidFill>
+                  <a:srgbClr val="94A3B8"/>
+                </a:solidFill>
+                <a:latin typeface="Segoe UI"/>
+              </a:rPr>
+              <a:t>Scene Classification Layer (SCL)</a:t>
+            </a:r>
+          </a:p>
+        </p:txBody>
+      </p:sp>
+      <p:sp>
+        <p:nvSpPr>
+          <p:cNvPr id="14" name="Rounded Rectangle 13"/>
+          <p:cNvSpPr/>
+          <p:nvPr/>
+        </p:nvSpPr>
+        <p:spPr>
+          <a:xfrm>
+            <a:off x="731520" y="4434840"/>
+            <a:ext cx="2651760" cy="1261872"/>
+          </a:xfrm>
+          <a:prstGeom prst="roundRect">
+            <a:avLst/>
+          </a:prstGeom>
+          <a:solidFill>
+            <a:srgbClr val="171F30"/>
+          </a:solidFill>
+          <a:ln w="12700">
+            <a:solidFill>
+              <a:srgbClr val="25324A"/>
+            </a:solidFill>
+          </a:ln>
+        </p:spPr>
+        <p:style>
+          <a:lnRef idx="1">
+            <a:schemeClr val="accent1"/>
+          </a:lnRef>
+          <a:fillRef idx="3">
+            <a:schemeClr val="accent1"/>
+          </a:fillRef>
+          <a:effectRef idx="2">
+            <a:schemeClr val="accent1"/>
+          </a:effectRef>
+          <a:fontRef idx="minor">
+            <a:schemeClr val="lt1"/>
+          </a:fontRef>
+        </p:style>
+        <p:txBody>
+          <a:bodyPr rtlCol="0" anchor="ctr"/>
+          <a:lstStyle/>
+          <a:p>
+            <a:pPr algn="ctr"/>
+          </a:p>
+        </p:txBody>
+      </p:sp>
+      <p:sp>
+        <p:nvSpPr>
+          <p:cNvPr id="15" name="TextBox 14"/>
+          <p:cNvSpPr txBox="1"/>
+          <p:nvPr/>
+        </p:nvSpPr>
+        <p:spPr>
+          <a:xfrm>
+            <a:off x="822960" y="4489704"/>
+            <a:ext cx="2468880" cy="1152144"/>
+          </a:xfrm>
+          <a:prstGeom prst="rect">
+            <a:avLst/>
+          </a:prstGeom>
+          <a:noFill/>
+        </p:spPr>
+        <p:txBody>
+          <a:bodyPr wrap="square" lIns="0" tIns="0" rIns="0" bIns="0">
+            <a:spAutoFit/>
+          </a:bodyPr>
+          <a:lstStyle/>
           <a:p>
             <a:pPr>
-              <a:spcBef>
-                <a:spcPts val="100"/>
-              </a:spcBef>
+              <a:defRPr sz="760" b="1">
+                <a:solidFill>
+                  <a:srgbClr val="C5A869"/>
+                </a:solidFill>
+                <a:latin typeface="Consolas"/>
+              </a:defRPr>
             </a:pPr>
             <a:r>
-              <a:rPr sz="740" b="1">
+              <a:t>BLOCK 3: DETERMINISTIC ANALYSIS</a:t>
+            </a:r>
+          </a:p>
+          <a:p>
+            <a:r>
+              <a:rPr sz="700" b="1">
                 <a:solidFill>
                   <a:srgbClr val="F5F3ED"/>
                 </a:solidFill>
                 <a:latin typeface="Segoe UI"/>
               </a:rPr>
-              <a:t>• Code Health: </a:t>
-            </a:r>
-            <a:r>
-              <a:rPr sz="720">
+              <a:t>• Production Threshold: </a:t>
+            </a:r>
+            <a:r>
+              <a:rPr sz="680">
                 <a:solidFill>
                   <a:srgbClr val="94A3B8"/>
                 </a:solidFill>
                 <a:latin typeface="Segoe UI"/>
               </a:rPr>
-              <a:t>100% Green Automation</a:t>
-            </a:r>
-          </a:p>
-          <a:p>
-            <a:pPr>
-              <a:spcBef>
-                <a:spcPts val="100"/>
-              </a:spcBef>
-            </a:pPr>
-            <a:r>
-              <a:rPr sz="740" b="1">
+              <a:t>Calibrated fixed τ = 0.15</a:t>
+            </a:r>
+          </a:p>
+          <a:p>
+            <a:r>
+              <a:rPr sz="700" b="1">
                 <a:solidFill>
                   <a:srgbClr val="F5F3ED"/>
                 </a:solidFill>
                 <a:latin typeface="Segoe UI"/>
               </a:rPr>
-              <a:t>• Unit Tests: </a:t>
-            </a:r>
-            <a:r>
-              <a:rPr sz="720">
+              <a:t>• Spectral Math: </a:t>
+            </a:r>
+            <a:r>
+              <a:rPr sz="680">
                 <a:solidFill>
                   <a:srgbClr val="94A3B8"/>
                 </a:solidFill>
                 <a:latin typeface="Segoe UI"/>
               </a:rPr>
-              <a:t>Spectral math &amp; NDVI/NDWI</a:t>
-            </a:r>
-          </a:p>
-          <a:p>
-            <a:pPr>
-              <a:spcBef>
-                <a:spcPts val="100"/>
-              </a:spcBef>
-            </a:pPr>
-            <a:r>
-              <a:rPr sz="740" b="1">
+              <a:t>NDVI &amp; NDWI deterministic shifts</a:t>
+            </a:r>
+          </a:p>
+          <a:p>
+            <a:r>
+              <a:rPr sz="700" b="1">
                 <a:solidFill>
                   <a:srgbClr val="F5F3ED"/>
                 </a:solidFill>
                 <a:latin typeface="Segoe UI"/>
               </a:rPr>
-              <a:t>• Integration: </a:t>
-            </a:r>
-            <a:r>
-              <a:rPr sz="720">
+              <a:t>• Spatial Topology: </a:t>
+            </a:r>
+            <a:r>
+              <a:rPr sz="680">
                 <a:solidFill>
                   <a:srgbClr val="94A3B8"/>
                 </a:solidFill>
                 <a:latin typeface="Segoe UI"/>
               </a:rPr>
-              <a:t>FAISS search &amp; SCL masks</a:t>
-            </a:r>
-          </a:p>
-          <a:p>
-            <a:pPr>
-              <a:spcBef>
-                <a:spcPts val="100"/>
-              </a:spcBef>
-            </a:pPr>
-            <a:r>
-              <a:rPr sz="740" b="1">
+              <a:t>scipy.ndimage connected components</a:t>
+            </a:r>
+          </a:p>
+          <a:p>
+            <a:r>
+              <a:rPr sz="700" b="1">
                 <a:solidFill>
                   <a:srgbClr val="F5F3ED"/>
                 </a:solidFill>
                 <a:latin typeface="Segoe UI"/>
               </a:rPr>
-              <a:t>• Temporal Tests: </a:t>
-            </a:r>
-            <a:r>
-              <a:rPr sz="720">
+              <a:t>• No Hallucination: </a:t>
+            </a:r>
+            <a:r>
+              <a:rPr sz="680">
                 <a:solidFill>
                   <a:srgbClr val="94A3B8"/>
                 </a:solidFill>
                 <a:latin typeface="Segoe UI"/>
               </a:rPr>
-              <a:t>3-date trajectory logic</a:t>
-            </a:r>
-          </a:p>
-          <a:p>
-            <a:pPr>
-              <a:spcBef>
-                <a:spcPts val="100"/>
-              </a:spcBef>
-            </a:pPr>
-            <a:r>
-              <a:rPr sz="740" b="1">
+              <a:t>Rule-based attribution support</a:t>
+            </a:r>
+          </a:p>
+          <a:p>
+            <a:r>
+              <a:rPr sz="700" b="1">
                 <a:solidFill>
                   <a:srgbClr val="F5F3ED"/>
                 </a:solidFill>
                 <a:latin typeface="Segoe UI"/>
               </a:rPr>
-              <a:t>• Regression: </a:t>
-            </a:r>
-            <a:r>
-              <a:rPr sz="720">
+              <a:t>• Reproducibility: </a:t>
+            </a:r>
+            <a:r>
+              <a:rPr sz="680">
                 <a:solidFill>
                   <a:srgbClr val="94A3B8"/>
                 </a:solidFill>
                 <a:latin typeface="Segoe UI"/>
               </a:rPr>
-              <a:t>Zero breaking regressions</a:t>
-            </a:r>
-          </a:p>
-          <a:p>
-            <a:pPr>
-              <a:spcBef>
-                <a:spcPts val="100"/>
-              </a:spcBef>
-            </a:pPr>
-            <a:r>
-              <a:rPr sz="740" b="1">
-                <a:solidFill>
-                  <a:srgbClr val="F5F3ED"/>
-                </a:solidFill>
-                <a:latin typeface="Segoe UI"/>
-              </a:rPr>
-              <a:t>• Build Status: </a:t>
-            </a:r>
-            <a:r>
-              <a:rPr sz="720">
-                <a:solidFill>
-                  <a:srgbClr val="94A3B8"/>
-                </a:solidFill>
-                <a:latin typeface="Segoe UI"/>
-              </a:rPr>
-              <a:t>Production-hardened</a:t>
+              <a:t>Deterministic, repeatable results</a:t>
             </a:r>
           </a:p>
         </p:txBody>
@@ -7669,8 +8963,8 @@
         </p:nvSpPr>
         <p:spPr>
           <a:xfrm>
-            <a:off x="594360" y="3063240"/>
-            <a:ext cx="11002975" cy="3337560"/>
+            <a:off x="3611880" y="1188720"/>
+            <a:ext cx="5166360" cy="4617720"/>
           </a:xfrm>
           <a:prstGeom prst="roundRect">
             <a:avLst/>
@@ -7714,8 +9008,8 @@
         </p:nvSpPr>
         <p:spPr>
           <a:xfrm>
-            <a:off x="777240" y="3172968"/>
-            <a:ext cx="10637215" cy="411480"/>
+            <a:off x="3749039" y="1298448"/>
+            <a:ext cx="4892040" cy="320040"/>
           </a:xfrm>
           <a:prstGeom prst="rect">
             <a:avLst/>
@@ -7723,13 +9017,13 @@
           <a:noFill/>
         </p:spPr>
         <p:txBody>
-          <a:bodyPr wrap="square" lIns="0" tIns="0" rIns="0" bIns="0">
+          <a:bodyPr wrap="none" lIns="0" tIns="0" rIns="0" bIns="0">
             <a:spAutoFit/>
           </a:bodyPr>
           <a:lstStyle/>
           <a:p>
             <a:pPr>
-              <a:defRPr sz="950" b="1">
+              <a:defRPr sz="880" b="1">
                 <a:solidFill>
                   <a:srgbClr val="C5A869"/>
                 </a:solidFill>
@@ -7737,18 +9031,7 @@
               </a:defRPr>
             </a:pPr>
             <a:r>
-              <a:t>TRANSPARENT SCIENTIFIC VALIDATION: REAL SENTINEL-2 MULTI-DATE TRAJECTORY (MGRS 43RGM)</a:t>
-            </a:r>
-          </a:p>
-          <a:p>
-            <a:r>
-              <a:rPr sz="800">
-                <a:solidFill>
-                  <a:srgbClr val="94A3B8"/>
-                </a:solidFill>
-                <a:latin typeface="Segoe UI"/>
-              </a:rPr>
-              <a:t>Observing the exact same 262,144 valid pixel terrain window across pre-monsoon dry, monsoon green peak, and winter harvest.</a:t>
+              <a:t>REAL SENTINEL-2 MULTI-DATE VALIDATION (MGRS 43RGM · NCR INDIA)</a:t>
             </a:r>
           </a:p>
         </p:txBody>
@@ -7761,8 +9044,8 @@
         </p:nvSpPr>
         <p:spPr>
           <a:xfrm>
-            <a:off x="777240" y="3657600"/>
-            <a:ext cx="2468880" cy="2514600"/>
+            <a:off x="3749039" y="1691640"/>
+            <a:ext cx="1508760" cy="2148840"/>
           </a:xfrm>
           <a:prstGeom prst="roundRect">
             <a:avLst/>
@@ -7814,8 +9097,8 @@
         </p:blipFill>
         <p:spPr>
           <a:xfrm>
-            <a:off x="868680" y="3749040"/>
-            <a:ext cx="2286000" cy="1508760"/>
+            <a:off x="3794759" y="1737360"/>
+            <a:ext cx="1417320" cy="1417320"/>
           </a:xfrm>
           <a:prstGeom prst="rect">
             <a:avLst/>
@@ -7830,8 +9113,8 @@
         </p:nvSpPr>
         <p:spPr>
           <a:xfrm>
-            <a:off x="868680" y="5303520"/>
-            <a:ext cx="2286000" cy="777240"/>
+            <a:off x="3794759" y="3200400"/>
+            <a:ext cx="1417320" cy="594360"/>
           </a:xfrm>
           <a:prstGeom prst="rect">
             <a:avLst/>
@@ -7845,7 +9128,7 @@
           <a:lstStyle/>
           <a:p>
             <a:pPr>
-              <a:defRPr sz="850" b="1">
+              <a:defRPr sz="720" b="1">
                 <a:solidFill>
                   <a:srgbClr val="4EA8DE"/>
                 </a:solidFill>
@@ -7858,15 +9141,14 @@
           </a:p>
           <a:p>
             <a:r>
-              <a:rPr sz="720">
+              <a:rPr sz="650">
                 <a:solidFill>
                   <a:srgbClr val="94A3B8"/>
                 </a:solidFill>
                 <a:latin typeface="Segoe UI"/>
               </a:rPr>
-              <a:t>PRE-MONSOON DRY BASELINE
-NIR: 0.480  |  NDVI: +0.192
-Dry canopy &amp; bare agrarian soil</a:t>
+              <a:t>Pre-Monsoon Baseline
+NIR: 0.480 | NDVI: +0.192</a:t>
             </a:r>
           </a:p>
         </p:txBody>
@@ -7879,8 +9161,8 @@
         </p:nvSpPr>
         <p:spPr>
           <a:xfrm>
-            <a:off x="3429000" y="3657600"/>
-            <a:ext cx="2468880" cy="2514600"/>
+            <a:off x="5394959" y="1691640"/>
+            <a:ext cx="1508760" cy="2148840"/>
           </a:xfrm>
           <a:prstGeom prst="roundRect">
             <a:avLst/>
@@ -7932,8 +9214,8 @@
         </p:blipFill>
         <p:spPr>
           <a:xfrm>
-            <a:off x="3520440" y="3749040"/>
-            <a:ext cx="2286000" cy="1508760"/>
+            <a:off x="5440679" y="1737360"/>
+            <a:ext cx="1417320" cy="1417320"/>
           </a:xfrm>
           <a:prstGeom prst="rect">
             <a:avLst/>
@@ -7948,8 +9230,8 @@
         </p:nvSpPr>
         <p:spPr>
           <a:xfrm>
-            <a:off x="3520440" y="5303520"/>
-            <a:ext cx="2286000" cy="777240"/>
+            <a:off x="5440679" y="3200400"/>
+            <a:ext cx="1417320" cy="594360"/>
           </a:xfrm>
           <a:prstGeom prst="rect">
             <a:avLst/>
@@ -7963,7 +9245,7 @@
           <a:lstStyle/>
           <a:p>
             <a:pPr>
-              <a:defRPr sz="850" b="1">
+              <a:defRPr sz="720" b="1">
                 <a:solidFill>
                   <a:srgbClr val="52B788"/>
                 </a:solidFill>
@@ -7976,15 +9258,14 @@
           </a:p>
           <a:p>
             <a:r>
-              <a:rPr sz="720">
+              <a:rPr sz="650">
                 <a:solidFill>
                   <a:srgbClr val="94A3B8"/>
                 </a:solidFill>
                 <a:latin typeface="Segoe UI"/>
               </a:rPr>
-              <a:t>MONSOON GREEN PEAK
-NIR: 0.279  |  NDVI: +0.112
-Peak chlorophyll agricultural flush</a:t>
+              <a:t>Post-Monsoon Peak
+NIR: 0.279 | NDVI: +0.112</a:t>
             </a:r>
           </a:p>
         </p:txBody>
@@ -7997,8 +9278,8 @@
         </p:nvSpPr>
         <p:spPr>
           <a:xfrm>
-            <a:off x="6080760" y="3657600"/>
-            <a:ext cx="2468880" cy="2514600"/>
+            <a:off x="7040879" y="1691640"/>
+            <a:ext cx="1508760" cy="2148840"/>
           </a:xfrm>
           <a:prstGeom prst="roundRect">
             <a:avLst/>
@@ -8050,8 +9331,8 @@
         </p:blipFill>
         <p:spPr>
           <a:xfrm>
-            <a:off x="6172200" y="3749040"/>
-            <a:ext cx="2286000" cy="1508760"/>
+            <a:off x="7086599" y="1737360"/>
+            <a:ext cx="1417320" cy="1417320"/>
           </a:xfrm>
           <a:prstGeom prst="rect">
             <a:avLst/>
@@ -8066,8 +9347,8 @@
         </p:nvSpPr>
         <p:spPr>
           <a:xfrm>
-            <a:off x="6172200" y="5303520"/>
-            <a:ext cx="2286000" cy="777240"/>
+            <a:off x="7086599" y="3200400"/>
+            <a:ext cx="1417320" cy="594360"/>
           </a:xfrm>
           <a:prstGeom prst="rect">
             <a:avLst/>
@@ -8081,7 +9362,7 @@
           <a:lstStyle/>
           <a:p>
             <a:pPr>
-              <a:defRPr sz="850" b="1">
+              <a:defRPr sz="720" b="1">
                 <a:solidFill>
                   <a:srgbClr val="C5A869"/>
                 </a:solidFill>
@@ -8094,15 +9375,14 @@
           </a:p>
           <a:p>
             <a:r>
-              <a:rPr sz="720">
+              <a:rPr sz="650">
                 <a:solidFill>
                   <a:srgbClr val="94A3B8"/>
                 </a:solidFill>
                 <a:latin typeface="Segoe UI"/>
               </a:rPr>
-              <a:t>WINTER DORMANCY
-NIR: 0.254  |  NDVI: +0.092
-Post-harvest senescence confirms cycle</a:t>
+              <a:t>Winter Post-Harvest
+NIR: 0.254 | NDVI: +0.092</a:t>
             </a:r>
           </a:p>
         </p:txBody>
@@ -8115,14 +9395,118 @@
         </p:nvSpPr>
         <p:spPr>
           <a:xfrm>
-            <a:off x="8823960" y="3657600"/>
-            <a:ext cx="2590495" cy="2514600"/>
+            <a:off x="3749039" y="3931920"/>
+            <a:ext cx="4892040" cy="1737360"/>
           </a:xfrm>
           <a:prstGeom prst="roundRect">
             <a:avLst/>
           </a:prstGeom>
           <a:solidFill>
             <a:srgbClr val="171F30"/>
+          </a:solidFill>
+          <a:ln w="12700">
+            <a:solidFill>
+              <a:srgbClr val="25324A"/>
+            </a:solidFill>
+          </a:ln>
+        </p:spPr>
+        <p:style>
+          <a:lnRef idx="1">
+            <a:schemeClr val="accent1"/>
+          </a:lnRef>
+          <a:fillRef idx="3">
+            <a:schemeClr val="accent1"/>
+          </a:fillRef>
+          <a:effectRef idx="2">
+            <a:schemeClr val="accent1"/>
+          </a:effectRef>
+          <a:fontRef idx="minor">
+            <a:schemeClr val="lt1"/>
+          </a:fontRef>
+        </p:style>
+        <p:txBody>
+          <a:bodyPr rtlCol="0" anchor="ctr"/>
+          <a:lstStyle/>
+          <a:p>
+            <a:pPr algn="ctr"/>
+          </a:p>
+        </p:txBody>
+      </p:sp>
+      <p:sp>
+        <p:nvSpPr>
+          <p:cNvPr id="28" name="TextBox 27"/>
+          <p:cNvSpPr txBox="1"/>
+          <p:nvPr/>
+        </p:nvSpPr>
+        <p:spPr>
+          <a:xfrm>
+            <a:off x="3886200" y="4005072"/>
+            <a:ext cx="4617720" cy="1600200"/>
+          </a:xfrm>
+          <a:prstGeom prst="rect">
+            <a:avLst/>
+          </a:prstGeom>
+          <a:noFill/>
+        </p:spPr>
+        <p:txBody>
+          <a:bodyPr wrap="square" lIns="0" tIns="0" rIns="0" bIns="0">
+            <a:spAutoFit/>
+          </a:bodyPr>
+          <a:lstStyle/>
+          <a:p>
+            <a:pPr>
+              <a:defRPr sz="800" b="1">
+                <a:solidFill>
+                  <a:srgbClr val="C5A869"/>
+                </a:solidFill>
+                <a:latin typeface="Consolas"/>
+              </a:defRPr>
+            </a:pPr>
+            <a:r>
+              <a:t>EMPIRICAL OBSERVATION METRICS (262,144 VALID PIXELS · 10M GSD):</a:t>
+            </a:r>
+          </a:p>
+          <a:p>
+            <a:pPr>
+              <a:spcBef>
+                <a:spcPts val="200"/>
+              </a:spcBef>
+            </a:pPr>
+            <a:r>
+              <a:rPr sz="700">
+                <a:solidFill>
+                  <a:srgbClr val="F5F3ED"/>
+                </a:solidFill>
+                <a:latin typeface="Segoe UI"/>
+              </a:rPr>
+              <a:t>• Interval Change Fractions (τ = 0.15):
+   T0 → TMID: 0.7% (1,820 px)  |  TMID → T1: 0.2% (619 px)  |  T0 → T1: 1.0% (2,542 px)
+• 5-State MECE Trajectory Distribution:
+   STABLE: 98.75% (258,869 px)  |  PERSISTENT: 0.39%  |  TRANSIENT: 0.24%
+   LATE_ONSET: 0.52%  |  REVERSIBLE: 0.10%  |  Total MECE Sum: 100.0%
+• Heuristic Attribution Support:
+   Built-Surface: 51.1%  |  Vegetation: 24.7%  |  Seasonal: 19.9%  |  Unresolved: 3.1%
+• SYSTEM VERDICT: REVIEW  (1.0% change &lt; 5% threshold; routed to human analyst)</a:t>
+            </a:r>
+          </a:p>
+        </p:txBody>
+      </p:sp>
+      <p:sp>
+        <p:nvSpPr>
+          <p:cNvPr id="29" name="Rounded Rectangle 28"/>
+          <p:cNvSpPr/>
+          <p:nvPr/>
+        </p:nvSpPr>
+        <p:spPr>
+          <a:xfrm>
+            <a:off x="8869680" y="1188720"/>
+            <a:ext cx="2743200" cy="4617720"/>
+          </a:xfrm>
+          <a:prstGeom prst="roundRect">
+            <a:avLst/>
+          </a:prstGeom>
+          <a:solidFill>
+            <a:srgbClr val="111724"/>
           </a:solidFill>
           <a:ln w="12700">
             <a:solidFill>
@@ -8154,14 +9538,95 @@
       </p:sp>
       <p:sp>
         <p:nvSpPr>
-          <p:cNvPr id="28" name="TextBox 27"/>
+          <p:cNvPr id="30" name="TextBox 29"/>
           <p:cNvSpPr txBox="1"/>
           <p:nvPr/>
         </p:nvSpPr>
         <p:spPr>
           <a:xfrm>
-            <a:off x="8961120" y="3794760"/>
-            <a:ext cx="2316175" cy="2240280"/>
+            <a:off x="9006840" y="1298448"/>
+            <a:ext cx="2468880" cy="320040"/>
+          </a:xfrm>
+          <a:prstGeom prst="rect">
+            <a:avLst/>
+          </a:prstGeom>
+          <a:noFill/>
+        </p:spPr>
+        <p:txBody>
+          <a:bodyPr wrap="none" lIns="0" tIns="0" rIns="0" bIns="0">
+            <a:spAutoFit/>
+          </a:bodyPr>
+          <a:lstStyle/>
+          <a:p>
+            <a:pPr>
+              <a:defRPr sz="900" b="1">
+                <a:solidFill>
+                  <a:srgbClr val="C5A869"/>
+                </a:solidFill>
+                <a:latin typeface="Consolas"/>
+              </a:defRPr>
+            </a:pPr>
+            <a:r>
+              <a:t>OPERATIONAL VIABILITY</a:t>
+            </a:r>
+          </a:p>
+        </p:txBody>
+      </p:sp>
+      <p:sp>
+        <p:nvSpPr>
+          <p:cNvPr id="31" name="Rounded Rectangle 30"/>
+          <p:cNvSpPr/>
+          <p:nvPr/>
+        </p:nvSpPr>
+        <p:spPr>
+          <a:xfrm>
+            <a:off x="9006840" y="1691640"/>
+            <a:ext cx="2468880" cy="932688"/>
+          </a:xfrm>
+          <a:prstGeom prst="roundRect">
+            <a:avLst/>
+          </a:prstGeom>
+          <a:solidFill>
+            <a:srgbClr val="171F30"/>
+          </a:solidFill>
+          <a:ln w="12700">
+            <a:solidFill>
+              <a:srgbClr val="25324A"/>
+            </a:solidFill>
+          </a:ln>
+        </p:spPr>
+        <p:style>
+          <a:lnRef idx="1">
+            <a:schemeClr val="accent1"/>
+          </a:lnRef>
+          <a:fillRef idx="3">
+            <a:schemeClr val="accent1"/>
+          </a:fillRef>
+          <a:effectRef idx="2">
+            <a:schemeClr val="accent1"/>
+          </a:effectRef>
+          <a:fontRef idx="minor">
+            <a:schemeClr val="lt1"/>
+          </a:fontRef>
+        </p:style>
+        <p:txBody>
+          <a:bodyPr rtlCol="0" anchor="ctr"/>
+          <a:lstStyle/>
+          <a:p>
+            <a:pPr algn="ctr"/>
+          </a:p>
+        </p:txBody>
+      </p:sp>
+      <p:sp>
+        <p:nvSpPr>
+          <p:cNvPr id="32" name="TextBox 31"/>
+          <p:cNvSpPr txBox="1"/>
+          <p:nvPr/>
+        </p:nvSpPr>
+        <p:spPr>
+          <a:xfrm>
+            <a:off x="9098280" y="1746504"/>
+            <a:ext cx="2286000" cy="822960"/>
           </a:xfrm>
           <a:prstGeom prst="rect">
             <a:avLst/>
@@ -8175,79 +9640,418 @@
           <a:lstStyle/>
           <a:p>
             <a:pPr>
-              <a:defRPr sz="850" b="1">
-                <a:solidFill>
-                  <a:srgbClr val="C5A869"/>
+              <a:defRPr sz="760" b="1">
+                <a:solidFill>
+                  <a:srgbClr val="4EA8DE"/>
                 </a:solidFill>
                 <a:latin typeface="Consolas"/>
               </a:defRPr>
             </a:pPr>
             <a:r>
-              <a:t>EMPIRICAL TWO-DATE ATTRIBUTION (T0 → T1)</a:t>
-            </a:r>
-          </a:p>
+              <a:t>OFFLINE-FIRST</a:t>
+            </a:r>
+          </a:p>
+          <a:p>
+            <a:r>
+              <a:rPr sz="700">
+                <a:solidFill>
+                  <a:srgbClr val="94A3B8"/>
+                </a:solidFill>
+                <a:latin typeface="Segoe UI"/>
+              </a:rPr>
+              <a:t>Air-gapped operation verified via offline_test.py. Zero cloud network egress.</a:t>
+            </a:r>
+          </a:p>
+        </p:txBody>
+      </p:sp>
+      <p:sp>
+        <p:nvSpPr>
+          <p:cNvPr id="33" name="Rounded Rectangle 32"/>
+          <p:cNvSpPr/>
+          <p:nvPr/>
+        </p:nvSpPr>
+        <p:spPr>
+          <a:xfrm>
+            <a:off x="9006840" y="2715768"/>
+            <a:ext cx="2468880" cy="932688"/>
+          </a:xfrm>
+          <a:prstGeom prst="roundRect">
+            <a:avLst/>
+          </a:prstGeom>
+          <a:solidFill>
+            <a:srgbClr val="171F30"/>
+          </a:solidFill>
+          <a:ln w="12700">
+            <a:solidFill>
+              <a:srgbClr val="25324A"/>
+            </a:solidFill>
+          </a:ln>
+        </p:spPr>
+        <p:style>
+          <a:lnRef idx="1">
+            <a:schemeClr val="accent1"/>
+          </a:lnRef>
+          <a:fillRef idx="3">
+            <a:schemeClr val="accent1"/>
+          </a:fillRef>
+          <a:effectRef idx="2">
+            <a:schemeClr val="accent1"/>
+          </a:effectRef>
+          <a:fontRef idx="minor">
+            <a:schemeClr val="lt1"/>
+          </a:fontRef>
+        </p:style>
+        <p:txBody>
+          <a:bodyPr rtlCol="0" anchor="ctr"/>
+          <a:lstStyle/>
+          <a:p>
+            <a:pPr algn="ctr"/>
+          </a:p>
+        </p:txBody>
+      </p:sp>
+      <p:sp>
+        <p:nvSpPr>
+          <p:cNvPr id="34" name="TextBox 33"/>
+          <p:cNvSpPr txBox="1"/>
+          <p:nvPr/>
+        </p:nvSpPr>
+        <p:spPr>
+          <a:xfrm>
+            <a:off x="9098280" y="2770632"/>
+            <a:ext cx="2286000" cy="822960"/>
+          </a:xfrm>
+          <a:prstGeom prst="rect">
+            <a:avLst/>
+          </a:prstGeom>
+          <a:noFill/>
+        </p:spPr>
+        <p:txBody>
+          <a:bodyPr wrap="square" lIns="0" tIns="0" rIns="0" bIns="0">
+            <a:spAutoFit/>
+          </a:bodyPr>
+          <a:lstStyle/>
           <a:p>
             <a:pPr>
-              <a:spcBef>
-                <a:spcPts val="200"/>
-              </a:spcBef>
+              <a:defRPr sz="760" b="1">
+                <a:solidFill>
+                  <a:srgbClr val="52B788"/>
+                </a:solidFill>
+                <a:latin typeface="Consolas"/>
+              </a:defRPr>
             </a:pPr>
             <a:r>
-              <a:rPr sz="780">
+              <a:t>ANALYST-IN-THE-LOOP</a:t>
+            </a:r>
+          </a:p>
+          <a:p>
+            <a:r>
+              <a:rPr sz="700">
+                <a:solidFill>
+                  <a:srgbClr val="94A3B8"/>
+                </a:solidFill>
+                <a:latin typeface="Segoe UI"/>
+              </a:rPr>
+              <a:t>Augments rather than replaces analysts. Transparent physical evidence dossiers.</a:t>
+            </a:r>
+          </a:p>
+        </p:txBody>
+      </p:sp>
+      <p:sp>
+        <p:nvSpPr>
+          <p:cNvPr id="35" name="Rounded Rectangle 34"/>
+          <p:cNvSpPr/>
+          <p:nvPr/>
+        </p:nvSpPr>
+        <p:spPr>
+          <a:xfrm>
+            <a:off x="9006840" y="3739896"/>
+            <a:ext cx="2468880" cy="932688"/>
+          </a:xfrm>
+          <a:prstGeom prst="roundRect">
+            <a:avLst/>
+          </a:prstGeom>
+          <a:solidFill>
+            <a:srgbClr val="171F30"/>
+          </a:solidFill>
+          <a:ln w="12700">
+            <a:solidFill>
+              <a:srgbClr val="25324A"/>
+            </a:solidFill>
+          </a:ln>
+        </p:spPr>
+        <p:style>
+          <a:lnRef idx="1">
+            <a:schemeClr val="accent1"/>
+          </a:lnRef>
+          <a:fillRef idx="3">
+            <a:schemeClr val="accent1"/>
+          </a:fillRef>
+          <a:effectRef idx="2">
+            <a:schemeClr val="accent1"/>
+          </a:effectRef>
+          <a:fontRef idx="minor">
+            <a:schemeClr val="lt1"/>
+          </a:fontRef>
+        </p:style>
+        <p:txBody>
+          <a:bodyPr rtlCol="0" anchor="ctr"/>
+          <a:lstStyle/>
+          <a:p>
+            <a:pPr algn="ctr"/>
+          </a:p>
+        </p:txBody>
+      </p:sp>
+      <p:sp>
+        <p:nvSpPr>
+          <p:cNvPr id="36" name="TextBox 35"/>
+          <p:cNvSpPr txBox="1"/>
+          <p:nvPr/>
+        </p:nvSpPr>
+        <p:spPr>
+          <a:xfrm>
+            <a:off x="9098280" y="3794760"/>
+            <a:ext cx="2286000" cy="822960"/>
+          </a:xfrm>
+          <a:prstGeom prst="rect">
+            <a:avLst/>
+          </a:prstGeom>
+          <a:noFill/>
+        </p:spPr>
+        <p:txBody>
+          <a:bodyPr wrap="square" lIns="0" tIns="0" rIns="0" bIns="0">
+            <a:spAutoFit/>
+          </a:bodyPr>
+          <a:lstStyle/>
+          <a:p>
+            <a:pPr>
+              <a:defRPr sz="760" b="1">
+                <a:solidFill>
+                  <a:srgbClr val="C5A869"/>
+                </a:solidFill>
+                <a:latin typeface="Consolas"/>
+              </a:defRPr>
+            </a:pPr>
+            <a:r>
+              <a:t>MODULAR ARCHITECTURE</a:t>
+            </a:r>
+          </a:p>
+          <a:p>
+            <a:r>
+              <a:rPr sz="700">
+                <a:solidFill>
+                  <a:srgbClr val="94A3B8"/>
+                </a:solidFill>
+                <a:latin typeface="Segoe UI"/>
+              </a:rPr>
+              <a:t>Clean decoupled interfaces for index backend, sensor adapters, and persistence engines.</a:t>
+            </a:r>
+          </a:p>
+        </p:txBody>
+      </p:sp>
+      <p:sp>
+        <p:nvSpPr>
+          <p:cNvPr id="37" name="Rounded Rectangle 36"/>
+          <p:cNvSpPr/>
+          <p:nvPr/>
+        </p:nvSpPr>
+        <p:spPr>
+          <a:xfrm>
+            <a:off x="9006840" y="4764024"/>
+            <a:ext cx="2468880" cy="932688"/>
+          </a:xfrm>
+          <a:prstGeom prst="roundRect">
+            <a:avLst/>
+          </a:prstGeom>
+          <a:solidFill>
+            <a:srgbClr val="171F30"/>
+          </a:solidFill>
+          <a:ln w="12700">
+            <a:solidFill>
+              <a:srgbClr val="25324A"/>
+            </a:solidFill>
+          </a:ln>
+        </p:spPr>
+        <p:style>
+          <a:lnRef idx="1">
+            <a:schemeClr val="accent1"/>
+          </a:lnRef>
+          <a:fillRef idx="3">
+            <a:schemeClr val="accent1"/>
+          </a:fillRef>
+          <a:effectRef idx="2">
+            <a:schemeClr val="accent1"/>
+          </a:effectRef>
+          <a:fontRef idx="minor">
+            <a:schemeClr val="lt1"/>
+          </a:fontRef>
+        </p:style>
+        <p:txBody>
+          <a:bodyPr rtlCol="0" anchor="ctr"/>
+          <a:lstStyle/>
+          <a:p>
+            <a:pPr algn="ctr"/>
+          </a:p>
+        </p:txBody>
+      </p:sp>
+      <p:sp>
+        <p:nvSpPr>
+          <p:cNvPr id="38" name="TextBox 37"/>
+          <p:cNvSpPr txBox="1"/>
+          <p:nvPr/>
+        </p:nvSpPr>
+        <p:spPr>
+          <a:xfrm>
+            <a:off x="9098280" y="4818888"/>
+            <a:ext cx="2286000" cy="822960"/>
+          </a:xfrm>
+          <a:prstGeom prst="rect">
+            <a:avLst/>
+          </a:prstGeom>
+          <a:noFill/>
+        </p:spPr>
+        <p:txBody>
+          <a:bodyPr wrap="square" lIns="0" tIns="0" rIns="0" bIns="0">
+            <a:spAutoFit/>
+          </a:bodyPr>
+          <a:lstStyle/>
+          <a:p>
+            <a:pPr>
+              <a:defRPr sz="760" b="1">
                 <a:solidFill>
                   <a:srgbClr val="F5F3ED"/>
                 </a:solidFill>
-                <a:latin typeface="Segoe UI"/>
-              </a:rPr>
-              <a:t>Detected Change: ~1.0% Pixels (2,542 / 262,144 px)
-Stable Terrain: 98.75% Confirmed Background</a:t>
-            </a:r>
-          </a:p>
-          <a:p>
-            <a:pPr>
-              <a:spcBef>
-                <a:spcPts val="400"/>
-              </a:spcBef>
+                <a:latin typeface="Consolas"/>
+              </a:defRPr>
             </a:pPr>
             <a:r>
-              <a:rPr sz="760">
+              <a:t>SCALABILITY POTENTIAL</a:t>
+            </a:r>
+          </a:p>
+          <a:p>
+            <a:r>
+              <a:rPr sz="700">
                 <a:solidFill>
                   <a:srgbClr val="94A3B8"/>
                 </a:solidFill>
+                <a:latin typeface="Segoe UI"/>
+              </a:rPr>
+              <a:t>FAISS IndexIVFFlat/HNSW scalable to millions of tiles without changing pipeline code.</a:t>
+            </a:r>
+          </a:p>
+        </p:txBody>
+      </p:sp>
+      <p:sp>
+        <p:nvSpPr>
+          <p:cNvPr id="39" name="Rounded Rectangle 38"/>
+          <p:cNvSpPr/>
+          <p:nvPr/>
+        </p:nvSpPr>
+        <p:spPr>
+          <a:xfrm>
+            <a:off x="594360" y="5925312"/>
+            <a:ext cx="11002975" cy="457200"/>
+          </a:xfrm>
+          <a:prstGeom prst="roundRect">
+            <a:avLst/>
+          </a:prstGeom>
+          <a:solidFill>
+            <a:srgbClr val="0F1726"/>
+          </a:solidFill>
+          <a:ln w="12700">
+            <a:solidFill>
+              <a:srgbClr val="25324A"/>
+            </a:solidFill>
+          </a:ln>
+        </p:spPr>
+        <p:style>
+          <a:lnRef idx="1">
+            <a:schemeClr val="accent1"/>
+          </a:lnRef>
+          <a:fillRef idx="3">
+            <a:schemeClr val="accent1"/>
+          </a:fillRef>
+          <a:effectRef idx="2">
+            <a:schemeClr val="accent1"/>
+          </a:effectRef>
+          <a:fontRef idx="minor">
+            <a:schemeClr val="lt1"/>
+          </a:fontRef>
+        </p:style>
+        <p:txBody>
+          <a:bodyPr rtlCol="0" anchor="ctr"/>
+          <a:lstStyle/>
+          <a:p>
+            <a:pPr algn="ctr"/>
+          </a:p>
+        </p:txBody>
+      </p:sp>
+      <p:sp>
+        <p:nvSpPr>
+          <p:cNvPr id="40" name="TextBox 39"/>
+          <p:cNvSpPr txBox="1"/>
+          <p:nvPr/>
+        </p:nvSpPr>
+        <p:spPr>
+          <a:xfrm>
+            <a:off x="685800" y="5980176"/>
+            <a:ext cx="10820095" cy="347472"/>
+          </a:xfrm>
+          <a:prstGeom prst="rect">
+            <a:avLst/>
+          </a:prstGeom>
+          <a:noFill/>
+        </p:spPr>
+        <p:txBody>
+          <a:bodyPr wrap="none" lIns="0" tIns="0" rIns="0" bIns="0">
+            <a:spAutoFit/>
+          </a:bodyPr>
+          <a:lstStyle/>
+          <a:p>
+            <a:pPr algn="ctr"/>
+            <a:r>
+              <a:rPr sz="780" b="1">
+                <a:solidFill>
+                  <a:srgbClr val="52B788"/>
+                </a:solidFill>
                 <a:latin typeface="Consolas"/>
               </a:rPr>
-              <a:t>HEURISTIC ATTRIBUTION SUPPORT:
-• Built-Surface Support:  51.1%
-• Vegetation Shift:        24.7%
-• Seasonal / Phenology:    19.9%
-• Unresolved / Noise:       3.1%</a:t>
-            </a:r>
-          </a:p>
-          <a:p>
-            <a:pPr>
-              <a:spcBef>
-                <a:spcPts val="500"/>
-              </a:spcBef>
-            </a:pPr>
-            <a:r>
-              <a:rPr sz="850" b="1">
-                <a:solidFill>
-                  <a:srgbClr val="E09F3E"/>
+              <a:t>[135 / 135 TESTS PASSING (100%)]   </a:t>
+            </a:r>
+            <a:r>
+              <a:rPr sz="780" b="1">
+                <a:solidFill>
+                  <a:srgbClr val="4EA8DE"/>
                 </a:solidFill>
                 <a:latin typeface="Consolas"/>
               </a:rPr>
-              <a:t>FINAL SYSTEM VERDICT:
-⚠ REVIEW (Mixed Evidence)
-</a:t>
-            </a:r>
-            <a:r>
-              <a:rPr sz="720">
+              <a:t>[ZERO RUNTIME EXTERNAL CALLS]   </a:t>
+            </a:r>
+            <a:r>
+              <a:rPr sz="780" b="1">
+                <a:solidFill>
+                  <a:srgbClr val="C5A869"/>
+                </a:solidFill>
+                <a:latin typeface="Consolas"/>
+              </a:rPr>
+              <a:t>[262,144 VALID SENTINEL-2 PIXELS]   </a:t>
+            </a:r>
+            <a:r>
+              <a:rPr sz="780" b="1">
                 <a:solidFill>
                   <a:srgbClr val="F5F3ED"/>
                 </a:solidFill>
-                <a:latin typeface="Segoe UI"/>
-              </a:rPr>
-              <a:t>The system does NOT force a premature construction claim when multi-date evidence indicates reversible phenology.</a:t>
+                <a:latin typeface="Consolas"/>
+              </a:rPr>
+              <a:t>[DETERMINISTIC τ = 0.15]   </a:t>
+            </a:r>
+            <a:r>
+              <a:rPr sz="780" b="1">
+                <a:solidFill>
+                  <a:srgbClr val="52B788"/>
+                </a:solidFill>
+                <a:latin typeface="Consolas"/>
+              </a:rPr>
+              <a:t>[AIR-GAPPED READY]   </a:t>
             </a:r>
           </a:p>
         </p:txBody>
@@ -8321,8 +10125,8 @@
         </p:nvSpPr>
         <p:spPr>
           <a:xfrm>
-            <a:off x="594360" y="292608"/>
-            <a:ext cx="11002975" cy="27432"/>
+            <a:off x="594360" y="256032"/>
+            <a:ext cx="11002975" cy="22860"/>
           </a:xfrm>
           <a:prstGeom prst="rect">
             <a:avLst/>
@@ -8364,8 +10168,8 @@
         </p:nvSpPr>
         <p:spPr>
           <a:xfrm>
-            <a:off x="594360" y="347472"/>
-            <a:ext cx="7772400" cy="274320"/>
+            <a:off x="594360" y="301752"/>
+            <a:ext cx="7772400" cy="256032"/>
           </a:xfrm>
           <a:prstGeom prst="rect">
             <a:avLst/>
@@ -8379,7 +10183,7 @@
           <a:lstStyle/>
           <a:p>
             <a:pPr>
-              <a:defRPr sz="850" b="1">
+              <a:defRPr sz="800" b="1">
                 <a:solidFill>
                   <a:srgbClr val="C5A869"/>
                 </a:solidFill>
@@ -8387,7 +10191,7 @@
               </a:defRPr>
             </a:pPr>
             <a:r>
-              <a:t>SMART INDIA HACKATHON 2026 · PS: SIH26227 · THEME: SPACE TECHNOLOGY · MINISTRY OF DEFENCE (MOD) / INDIAN ARMY — DGIS</a:t>
+              <a:t>SMART INDIA HACKATHON 2026 · PS: SIH26227 · SPACE TECHNOLOGY · SOFTWARE · MINISTRY OF DEFENCE / INDIAN ARMY — DGIS</a:t>
             </a:r>
           </a:p>
         </p:txBody>
@@ -8400,8 +10204,8 @@
         </p:nvSpPr>
         <p:spPr>
           <a:xfrm>
-            <a:off x="8412480" y="347472"/>
-            <a:ext cx="3182112" cy="274320"/>
+            <a:off x="8412480" y="301752"/>
+            <a:ext cx="3182112" cy="256032"/>
           </a:xfrm>
           <a:prstGeom prst="rect">
             <a:avLst/>
@@ -8416,16 +10220,16 @@
           <a:p>
             <a:pPr algn="r"/>
             <a:r>
-              <a:rPr sz="850">
+              <a:rPr sz="800">
                 <a:solidFill>
                   <a:srgbClr val="94A3B8"/>
                 </a:solidFill>
                 <a:latin typeface="Consolas"/>
               </a:rPr>
-              <a:t>TEAM: Quantumcrew | </a:t>
-            </a:r>
-            <a:r>
-              <a:rPr sz="850" b="1">
+              <a:t>TEAM: Quantumcrew  |  </a:t>
+            </a:r>
+            <a:r>
+              <a:rPr sz="800" b="1">
                 <a:solidFill>
                   <a:srgbClr val="4EA8DE"/>
                 </a:solidFill>
@@ -8444,8 +10248,8 @@
         </p:nvSpPr>
         <p:spPr>
           <a:xfrm>
-            <a:off x="594360" y="594360"/>
-            <a:ext cx="11002975" cy="594360"/>
+            <a:off x="594360" y="548640"/>
+            <a:ext cx="11002975" cy="566928"/>
           </a:xfrm>
           <a:prstGeom prst="rect">
             <a:avLst/>
@@ -8459,7 +10263,7 @@
           <a:lstStyle/>
           <a:p>
             <a:pPr>
-              <a:defRPr sz="1750" b="1">
+              <a:defRPr sz="1650" b="1">
                 <a:solidFill>
                   <a:srgbClr val="F5F3ED"/>
                 </a:solidFill>
@@ -8467,12 +10271,12 @@
               </a:defRPr>
             </a:pPr>
             <a:r>
-              <a:t>TURNING SATELLITE ARCHIVES INTO AN INVESTIGATION WORKBENCH</a:t>
+              <a:t>05 — IMPACT &amp; BENEFITS</a:t>
             </a:r>
           </a:p>
           <a:p>
             <a:pPr>
-              <a:defRPr sz="1000">
+              <a:defRPr sz="950">
                 <a:solidFill>
                   <a:srgbClr val="94A3B8"/>
                 </a:solidFill>
@@ -8480,7 +10284,7 @@
               </a:defRPr>
             </a:pPr>
             <a:r>
-              <a:t>Force-multiplying geospatial intelligence analysts across defense reconnaissance, frontier monitoring, and land governance.</a:t>
+              <a:t>TURNING SATELLITE ARCHIVES INTO AN INVESTIGATION WORKBENCH</a:t>
             </a:r>
           </a:p>
         </p:txBody>
@@ -8493,8 +10297,8 @@
         </p:nvSpPr>
         <p:spPr>
           <a:xfrm>
-            <a:off x="594360" y="6537960"/>
-            <a:ext cx="11002975" cy="228600"/>
+            <a:off x="594360" y="6565392"/>
+            <a:ext cx="11002975" cy="201168"/>
           </a:xfrm>
           <a:prstGeom prst="rect">
             <a:avLst/>
@@ -8508,25 +10312,25 @@
           <a:lstStyle/>
           <a:p>
             <a:r>
-              <a:rPr sz="800">
+              <a:rPr sz="780">
                 <a:solidFill>
                   <a:srgbClr val="64748B"/>
                 </a:solidFill>
                 <a:latin typeface="Segoe UI"/>
               </a:rPr>
-              <a:t>GEOAI — Evidence-Based Satellite Investigation Workstation  |  Ministry of Defence (MoD) / Indian Army — DGIS  |  SIH 2026 Submission</a:t>
-            </a:r>
-            <a:r>
-              <a:rPr sz="800">
+              <a:t>TERRAE — Earth Intelligence Satellite Investigation Console  |  Ministry of Defence / Indian Army — DGIS  |  SIH 2026 Submission</a:t>
+            </a:r>
+            <a:r>
+              <a:rPr sz="780">
                 <a:solidFill>
                   <a:srgbClr val="64748B"/>
                 </a:solidFill>
                 <a:latin typeface="Segoe UI"/>
               </a:rPr>
-              <a:t>                                                                    Live Console: </a:t>
-            </a:r>
-            <a:r>
-              <a:rPr sz="800">
+              <a:t>                                                         Live Console: </a:t>
+            </a:r>
+            <a:r>
+              <a:rPr sz="780">
                 <a:solidFill>
                   <a:srgbClr val="4EA8DE"/>
                 </a:solidFill>
@@ -8546,8 +10350,178 @@
         </p:nvSpPr>
         <p:spPr>
           <a:xfrm>
-            <a:off x="594360" y="1234440"/>
-            <a:ext cx="11002975" cy="640080"/>
+            <a:off x="594360" y="1188720"/>
+            <a:ext cx="11002975" cy="594360"/>
+          </a:xfrm>
+          <a:prstGeom prst="roundRect">
+            <a:avLst/>
+          </a:prstGeom>
+          <a:solidFill>
+            <a:srgbClr val="111724"/>
+          </a:solidFill>
+          <a:ln w="12700">
+            <a:solidFill>
+              <a:srgbClr val="C5A869"/>
+            </a:solidFill>
+          </a:ln>
+        </p:spPr>
+        <p:style>
+          <a:lnRef idx="1">
+            <a:schemeClr val="accent1"/>
+          </a:lnRef>
+          <a:fillRef idx="3">
+            <a:schemeClr val="accent1"/>
+          </a:fillRef>
+          <a:effectRef idx="2">
+            <a:schemeClr val="accent1"/>
+          </a:effectRef>
+          <a:fontRef idx="minor">
+            <a:schemeClr val="lt1"/>
+          </a:fontRef>
+        </p:style>
+        <p:txBody>
+          <a:bodyPr rtlCol="0" anchor="ctr"/>
+          <a:lstStyle/>
+          <a:p>
+            <a:pPr algn="ctr"/>
+          </a:p>
+        </p:txBody>
+      </p:sp>
+      <p:sp>
+        <p:nvSpPr>
+          <p:cNvPr id="9" name="TextBox 8"/>
+          <p:cNvSpPr txBox="1"/>
+          <p:nvPr/>
+        </p:nvSpPr>
+        <p:spPr>
+          <a:xfrm>
+            <a:off x="731520" y="1261872"/>
+            <a:ext cx="10728655" cy="457200"/>
+          </a:xfrm>
+          <a:prstGeom prst="rect">
+            <a:avLst/>
+          </a:prstGeom>
+          <a:noFill/>
+        </p:spPr>
+        <p:txBody>
+          <a:bodyPr wrap="square" lIns="0" tIns="0" rIns="0" bIns="0">
+            <a:spAutoFit/>
+          </a:bodyPr>
+          <a:lstStyle/>
+          <a:p>
+            <a:pPr algn="ctr"/>
+            <a:r>
+              <a:rPr sz="819" b="1">
+                <a:solidFill>
+                  <a:srgbClr val="94A3B8"/>
+                </a:solidFill>
+                <a:latin typeface="Consolas"/>
+              </a:rPr>
+              <a:t>SATELLITE ARCHIVE</a:t>
+            </a:r>
+            <a:r>
+              <a:rPr sz="819" b="1">
+                <a:solidFill>
+                  <a:srgbClr val="C5A869"/>
+                </a:solidFill>
+                <a:latin typeface="Consolas"/>
+              </a:rPr>
+              <a:t> → </a:t>
+            </a:r>
+            <a:r>
+              <a:rPr sz="819" b="1">
+                <a:solidFill>
+                  <a:srgbClr val="4EA8DE"/>
+                </a:solidFill>
+                <a:latin typeface="Consolas"/>
+              </a:rPr>
+              <a:t>NATURAL-LANGUAGE DISCOVERY</a:t>
+            </a:r>
+            <a:r>
+              <a:rPr sz="819" b="1">
+                <a:solidFill>
+                  <a:srgbClr val="C5A869"/>
+                </a:solidFill>
+                <a:latin typeface="Consolas"/>
+              </a:rPr>
+              <a:t> → </a:t>
+            </a:r>
+            <a:r>
+              <a:rPr sz="819" b="1">
+                <a:solidFill>
+                  <a:srgbClr val="52B788"/>
+                </a:solidFill>
+                <a:latin typeface="Consolas"/>
+              </a:rPr>
+              <a:t>RELEVANT SCENE</a:t>
+            </a:r>
+            <a:r>
+              <a:rPr sz="819" b="1">
+                <a:solidFill>
+                  <a:srgbClr val="C5A869"/>
+                </a:solidFill>
+                <a:latin typeface="Consolas"/>
+              </a:rPr>
+              <a:t> → </a:t>
+            </a:r>
+            <a:r>
+              <a:rPr sz="819" b="1">
+                <a:solidFill>
+                  <a:srgbClr val="E09F3E"/>
+                </a:solidFill>
+                <a:latin typeface="Consolas"/>
+              </a:rPr>
+              <a:t>TEMPORAL COMPARISON</a:t>
+            </a:r>
+            <a:r>
+              <a:rPr sz="819" b="1">
+                <a:solidFill>
+                  <a:srgbClr val="C5A869"/>
+                </a:solidFill>
+                <a:latin typeface="Consolas"/>
+              </a:rPr>
+              <a:t> → </a:t>
+            </a:r>
+            <a:r>
+              <a:rPr sz="819" b="1">
+                <a:solidFill>
+                  <a:srgbClr val="4EA8DE"/>
+                </a:solidFill>
+                <a:latin typeface="Consolas"/>
+              </a:rPr>
+              <a:t>EVIDENCE REVIEW</a:t>
+            </a:r>
+            <a:r>
+              <a:rPr sz="819" b="1">
+                <a:solidFill>
+                  <a:srgbClr val="C5A869"/>
+                </a:solidFill>
+                <a:latin typeface="Consolas"/>
+              </a:rPr>
+              <a:t> → </a:t>
+            </a:r>
+            <a:r>
+              <a:rPr sz="819" b="1">
+                <a:solidFill>
+                  <a:srgbClr val="C5A869"/>
+                </a:solidFill>
+                <a:latin typeface="Consolas"/>
+              </a:rPr>
+              <a:t>ANALYST DECISION</a:t>
+            </a:r>
+          </a:p>
+        </p:txBody>
+      </p:sp>
+      <p:sp>
+        <p:nvSpPr>
+          <p:cNvPr id="10" name="Rounded Rectangle 9"/>
+          <p:cNvSpPr/>
+          <p:nvPr/>
+        </p:nvSpPr>
+        <p:spPr>
+          <a:xfrm>
+            <a:off x="594360" y="1920240"/>
+            <a:ext cx="5349240" cy="1783080"/>
           </a:xfrm>
           <a:prstGeom prst="roundRect">
             <a:avLst/>
@@ -8585,14 +10559,14 @@
       </p:sp>
       <p:sp>
         <p:nvSpPr>
-          <p:cNvPr id="9" name="TextBox 8"/>
+          <p:cNvPr id="11" name="TextBox 10"/>
           <p:cNvSpPr txBox="1"/>
           <p:nvPr/>
         </p:nvSpPr>
         <p:spPr>
           <a:xfrm>
-            <a:off x="731520" y="1325880"/>
-            <a:ext cx="10728655" cy="457200"/>
+            <a:off x="777240" y="2029968"/>
+            <a:ext cx="4983480" cy="1563624"/>
           </a:xfrm>
           <a:prstGeom prst="rect">
             <a:avLst/>
@@ -8605,160 +10579,8 @@
           </a:bodyPr>
           <a:lstStyle/>
           <a:p>
-            <a:pPr algn="ctr"/>
-            <a:r>
-              <a:rPr sz="850" b="1">
-                <a:solidFill>
-                  <a:srgbClr val="94A3B8"/>
-                </a:solidFill>
-                <a:latin typeface="Consolas"/>
-              </a:rPr>
-              <a:t>MASSIVE ARCHIVE (PETABYTES)</a:t>
-            </a:r>
-            <a:r>
-              <a:rPr sz="850" b="1">
-                <a:solidFill>
-                  <a:srgbClr val="C5A869"/>
-                </a:solidFill>
-                <a:latin typeface="Consolas"/>
-              </a:rPr>
-              <a:t> → </a:t>
-            </a:r>
-            <a:r>
-              <a:rPr sz="850" b="1">
-                <a:solidFill>
-                  <a:srgbClr val="4EA8DE"/>
-                </a:solidFill>
-                <a:latin typeface="Consolas"/>
-              </a:rPr>
-              <a:t>SEMANTIC DISCOVERY (&lt;65ms)</a:t>
-            </a:r>
-            <a:r>
-              <a:rPr sz="850" b="1">
-                <a:solidFill>
-                  <a:srgbClr val="C5A869"/>
-                </a:solidFill>
-                <a:latin typeface="Consolas"/>
-              </a:rPr>
-              <a:t> → </a:t>
-            </a:r>
-            <a:r>
-              <a:rPr sz="850" b="1">
-                <a:solidFill>
-                  <a:srgbClr val="52B788"/>
-                </a:solidFill>
-                <a:latin typeface="Consolas"/>
-              </a:rPr>
-              <a:t>99% TERRAIN PRUNED</a:t>
-            </a:r>
-            <a:r>
-              <a:rPr sz="850" b="1">
-                <a:solidFill>
-                  <a:srgbClr val="C5A869"/>
-                </a:solidFill>
-                <a:latin typeface="Consolas"/>
-              </a:rPr>
-              <a:t> → </a:t>
-            </a:r>
-            <a:r>
-              <a:rPr sz="850" b="1">
-                <a:solidFill>
-                  <a:srgbClr val="E09F3E"/>
-                </a:solidFill>
-                <a:latin typeface="Consolas"/>
-              </a:rPr>
-              <a:t>MULTI-STREAM EVIDENCE REVIEW</a:t>
-            </a:r>
-            <a:r>
-              <a:rPr sz="850" b="1">
-                <a:solidFill>
-                  <a:srgbClr val="C5A869"/>
-                </a:solidFill>
-                <a:latin typeface="Consolas"/>
-              </a:rPr>
-              <a:t> → </a:t>
-            </a:r>
-            <a:r>
-              <a:rPr sz="850" b="1">
-                <a:solidFill>
-                  <a:srgbClr val="C5A869"/>
-                </a:solidFill>
-                <a:latin typeface="Consolas"/>
-              </a:rPr>
-              <a:t>AUDITABLE COMMAND VERDICT</a:t>
-            </a:r>
-          </a:p>
-        </p:txBody>
-      </p:sp>
-      <p:sp>
-        <p:nvSpPr>
-          <p:cNvPr id="10" name="Rounded Rectangle 9"/>
-          <p:cNvSpPr/>
-          <p:nvPr/>
-        </p:nvSpPr>
-        <p:spPr>
-          <a:xfrm>
-            <a:off x="594360" y="2011680"/>
-            <a:ext cx="5349240" cy="1600200"/>
-          </a:xfrm>
-          <a:prstGeom prst="roundRect">
-            <a:avLst/>
-          </a:prstGeom>
-          <a:solidFill>
-            <a:srgbClr val="111724"/>
-          </a:solidFill>
-          <a:ln w="12700">
-            <a:solidFill>
-              <a:srgbClr val="4EA8DE"/>
-            </a:solidFill>
-          </a:ln>
-        </p:spPr>
-        <p:style>
-          <a:lnRef idx="1">
-            <a:schemeClr val="accent1"/>
-          </a:lnRef>
-          <a:fillRef idx="3">
-            <a:schemeClr val="accent1"/>
-          </a:fillRef>
-          <a:effectRef idx="2">
-            <a:schemeClr val="accent1"/>
-          </a:effectRef>
-          <a:fontRef idx="minor">
-            <a:schemeClr val="lt1"/>
-          </a:fontRef>
-        </p:style>
-        <p:txBody>
-          <a:bodyPr rtlCol="0" anchor="ctr"/>
-          <a:lstStyle/>
-          <a:p>
-            <a:pPr algn="ctr"/>
-          </a:p>
-        </p:txBody>
-      </p:sp>
-      <p:sp>
-        <p:nvSpPr>
-          <p:cNvPr id="11" name="TextBox 10"/>
-          <p:cNvSpPr txBox="1"/>
-          <p:nvPr/>
-        </p:nvSpPr>
-        <p:spPr>
-          <a:xfrm>
-            <a:off x="777240" y="2148840"/>
-            <a:ext cx="4983480" cy="1325880"/>
-          </a:xfrm>
-          <a:prstGeom prst="rect">
-            <a:avLst/>
-          </a:prstGeom>
-          <a:noFill/>
-        </p:spPr>
-        <p:txBody>
-          <a:bodyPr wrap="square" lIns="0" tIns="0" rIns="0" bIns="0">
-            <a:spAutoFit/>
-          </a:bodyPr>
-          <a:lstStyle/>
-          <a:p>
             <a:pPr>
-              <a:defRPr sz="900" b="1">
+              <a:defRPr sz="850" b="1">
                 <a:solidFill>
                   <a:srgbClr val="4EA8DE"/>
                 </a:solidFill>
@@ -8766,23 +10588,7 @@
               </a:defRPr>
             </a:pPr>
             <a:r>
-              <a:t>01 / DEFENSE &amp; BORDER INFRASTRUCTURE MONITORING</a:t>
-            </a:r>
-          </a:p>
-          <a:p>
-            <a:pPr>
-              <a:spcBef>
-                <a:spcPts val="100"/>
-              </a:spcBef>
-            </a:pPr>
-            <a:r>
-              <a:rPr sz="850" b="1">
-                <a:solidFill>
-                  <a:srgbClr val="F5F3ED"/>
-                </a:solidFill>
-                <a:latin typeface="Segoe UI"/>
-              </a:rPr>
-              <a:t>Forward Outpost, Tarmac &amp; Bunker Emergence</a:t>
+              <a:t>01 / INFRASTRUCTURE MONITORING</a:t>
             </a:r>
           </a:p>
           <a:p>
@@ -8792,13 +10598,29 @@
               </a:spcBef>
             </a:pPr>
             <a:r>
-              <a:rPr sz="780">
+              <a:rPr sz="800" b="1">
+                <a:solidFill>
+                  <a:srgbClr val="F5F3ED"/>
+                </a:solidFill>
+                <a:latin typeface="Segoe UI"/>
+              </a:rPr>
+              <a:t>Forward Outpost, Tarmac &amp; Fortified Perimeter Detection</a:t>
+            </a:r>
+          </a:p>
+          <a:p>
+            <a:pPr>
+              <a:spcBef>
+                <a:spcPts val="200"/>
+              </a:spcBef>
+            </a:pPr>
+            <a:r>
+              <a:rPr sz="740">
                 <a:solidFill>
                   <a:srgbClr val="94A3B8"/>
                 </a:solidFill>
                 <a:latin typeface="Segoe UI"/>
               </a:rPr>
-              <a:t>Quickly discover clandestine military construction, border tarmac paving, or forward fortified compounds. Natural-language intent isolates areas of interest across thousands of square kilometers in seconds without coordinate guessing.</a:t>
+              <a:t>Quickly discover clandestine military construction, border tarmac paving, or forward fortified compounds. Natural-language intent isolates candidate tiles across thousands of square kilometers in seconds without coordinate guessing, decomposing spectral shifts to verify concrete/built signatures.</a:t>
             </a:r>
           </a:p>
         </p:txBody>
@@ -8811,8 +10633,8 @@
         </p:nvSpPr>
         <p:spPr>
           <a:xfrm>
-            <a:off x="6245352" y="2011680"/>
-            <a:ext cx="5349240" cy="1600200"/>
+            <a:off x="6245352" y="1920240"/>
+            <a:ext cx="5349240" cy="1783080"/>
           </a:xfrm>
           <a:prstGeom prst="roundRect">
             <a:avLst/>
@@ -8856,8 +10678,8 @@
         </p:nvSpPr>
         <p:spPr>
           <a:xfrm>
-            <a:off x="6428232" y="2148840"/>
-            <a:ext cx="4983480" cy="1325880"/>
+            <a:off x="6428232" y="2029968"/>
+            <a:ext cx="4983480" cy="1563624"/>
           </a:xfrm>
           <a:prstGeom prst="rect">
             <a:avLst/>
@@ -8871,7 +10693,7 @@
           <a:lstStyle/>
           <a:p>
             <a:pPr>
-              <a:defRPr sz="900" b="1">
+              <a:defRPr sz="850" b="1">
                 <a:solidFill>
                   <a:srgbClr val="52B788"/>
                 </a:solidFill>
@@ -8879,23 +10701,7 @@
               </a:defRPr>
             </a:pPr>
             <a:r>
-              <a:t>02 / STRATEGIC SIMILAR-SITE DISCOVERY</a:t>
-            </a:r>
-          </a:p>
-          <a:p>
-            <a:pPr>
-              <a:spcBef>
-                <a:spcPts val="100"/>
-              </a:spcBef>
-            </a:pPr>
-            <a:r>
-              <a:rPr sz="850" b="1">
-                <a:solidFill>
-                  <a:srgbClr val="F5F3ED"/>
-                </a:solidFill>
-                <a:latin typeface="Segoe UI"/>
-              </a:rPr>
-              <a:t>Cross-Theater Facility Pattern Matching</a:t>
+              <a:t>02 / STRATEGIC SITE DISCOVERY</a:t>
             </a:r>
           </a:p>
           <a:p>
@@ -8905,13 +10711,29 @@
               </a:spcBef>
             </a:pPr>
             <a:r>
-              <a:rPr sz="780">
+              <a:rPr sz="800" b="1">
+                <a:solidFill>
+                  <a:srgbClr val="F5F3ED"/>
+                </a:solidFill>
+                <a:latin typeface="Segoe UI"/>
+              </a:rPr>
+              <a:t>Cross-Theater Facility Pattern Matching</a:t>
+            </a:r>
+          </a:p>
+          <a:p>
+            <a:pPr>
+              <a:spcBef>
+                <a:spcPts val="200"/>
+              </a:spcBef>
+            </a:pPr>
+            <a:r>
+              <a:rPr sz="740">
                 <a:solidFill>
                   <a:srgbClr val="94A3B8"/>
                 </a:solidFill>
                 <a:latin typeface="Segoe UI"/>
               </a:rPr>
-              <a:t>Given a known adversary facility or staging ground, query the RemoteCLIP FAISS index to discover all geographically separated sites with identical spectral, geometric, and topological arrangements across the entire theater.</a:t>
+              <a:t>Given an operational requirement or known facility archetype, query the RemoteCLIP FAISS index to discover geographically separated candidate sites with similar visual-semantic features across the operational theater, cutting manual catalog triage by hours.</a:t>
             </a:r>
           </a:p>
         </p:txBody>
@@ -8924,8 +10746,8 @@
         </p:nvSpPr>
         <p:spPr>
           <a:xfrm>
-            <a:off x="594360" y="3794760"/>
-            <a:ext cx="5349240" cy="1600200"/>
+            <a:off x="594360" y="3867912"/>
+            <a:ext cx="5349240" cy="1783080"/>
           </a:xfrm>
           <a:prstGeom prst="roundRect">
             <a:avLst/>
@@ -8969,8 +10791,8 @@
         </p:nvSpPr>
         <p:spPr>
           <a:xfrm>
-            <a:off x="777240" y="3931920"/>
-            <a:ext cx="4983480" cy="1325880"/>
+            <a:off x="777240" y="3977640"/>
+            <a:ext cx="4983480" cy="1563624"/>
           </a:xfrm>
           <a:prstGeom prst="rect">
             <a:avLst/>
@@ -8984,7 +10806,7 @@
           <a:lstStyle/>
           <a:p>
             <a:pPr>
-              <a:defRPr sz="900" b="1">
+              <a:defRPr sz="850" b="1">
                 <a:solidFill>
                   <a:srgbClr val="C5A869"/>
                 </a:solidFill>
@@ -8992,23 +10814,7 @@
               </a:defRPr>
             </a:pPr>
             <a:r>
-              <a:t>03 / FRONTIER ROAD &amp; TERRAIN CORRIDOR SHIFTS</a:t>
-            </a:r>
-          </a:p>
-          <a:p>
-            <a:pPr>
-              <a:spcBef>
-                <a:spcPts val="100"/>
-              </a:spcBef>
-            </a:pPr>
-            <a:r>
-              <a:rPr sz="850" b="1">
-                <a:solidFill>
-                  <a:srgbClr val="F5F3ED"/>
-                </a:solidFill>
-                <a:latin typeface="Segoe UI"/>
-              </a:rPr>
-              <a:t>Logistics Tracks, Bridge Abutments &amp; Earth Clearing</a:t>
+              <a:t>03 / ROAD / TERRAIN CORRIDOR CHANGE</a:t>
             </a:r>
           </a:p>
           <a:p>
@@ -9018,13 +10824,29 @@
               </a:spcBef>
             </a:pPr>
             <a:r>
-              <a:rPr sz="780">
+              <a:rPr sz="800" b="1">
+                <a:solidFill>
+                  <a:srgbClr val="F5F3ED"/>
+                </a:solidFill>
+                <a:latin typeface="Segoe UI"/>
+              </a:rPr>
+              <a:t>Frontier Logistics Tracks, Earth Clearings &amp; Bridgeheads</a:t>
+            </a:r>
+          </a:p>
+          <a:p>
+            <a:pPr>
+              <a:spcBef>
+                <a:spcPts val="200"/>
+              </a:spcBef>
+            </a:pPr>
+            <a:r>
+              <a:rPr sz="740">
                 <a:solidFill>
                   <a:srgbClr val="94A3B8"/>
                 </a:solidFill>
                 <a:latin typeface="Segoe UI"/>
               </a:rPr>
-              <a:t>Track emerging logistics road networks and bridgeheads across rugged frontier terrain. Spatial coherence confirms contiguous linear corridors while suppressing single-pixel seasonal slope washouts.</a:t>
+              <a:t>Track emerging logistics road corridors and supply clearings across rugged frontier terrain. Spatial coherence analysis confirms contiguous linear infrastructure features while suppressing isolated single-pixel seasonal slope washouts and speckle.</a:t>
             </a:r>
           </a:p>
         </p:txBody>
@@ -9037,8 +10859,8 @@
         </p:nvSpPr>
         <p:spPr>
           <a:xfrm>
-            <a:off x="6245352" y="3794760"/>
-            <a:ext cx="5349240" cy="1600200"/>
+            <a:off x="6245352" y="3867912"/>
+            <a:ext cx="5349240" cy="1783080"/>
           </a:xfrm>
           <a:prstGeom prst="roundRect">
             <a:avLst/>
@@ -9082,8 +10904,8 @@
         </p:nvSpPr>
         <p:spPr>
           <a:xfrm>
-            <a:off x="6428232" y="3931920"/>
-            <a:ext cx="4983480" cy="1325880"/>
+            <a:off x="6428232" y="3977640"/>
+            <a:ext cx="4983480" cy="1563624"/>
           </a:xfrm>
           <a:prstGeom prst="rect">
             <a:avLst/>
@@ -9097,7 +10919,7 @@
           <a:lstStyle/>
           <a:p>
             <a:pPr>
-              <a:defRPr sz="900" b="1">
+              <a:defRPr sz="850" b="1">
                 <a:solidFill>
                   <a:srgbClr val="E09F3E"/>
                 </a:solidFill>
@@ -9105,23 +10927,7 @@
               </a:defRPr>
             </a:pPr>
             <a:r>
-              <a:t>04 / PHENOLOGY VS. ENCROACHMENT DISCRIMINATION</a:t>
-            </a:r>
-          </a:p>
-          <a:p>
-            <a:pPr>
-              <a:spcBef>
-                <a:spcPts val="100"/>
-              </a:spcBef>
-            </a:pPr>
-            <a:r>
-              <a:rPr sz="850" b="1">
-                <a:solidFill>
-                  <a:srgbClr val="F5F3ED"/>
-                </a:solidFill>
-                <a:latin typeface="Segoe UI"/>
-              </a:rPr>
-              <a:t>Defending Against False-Alarm Exhaustion</a:t>
+              <a:t>04 / VEGETATION / WATER INTERPRETATION</a:t>
             </a:r>
           </a:p>
           <a:p>
@@ -9131,13 +10937,29 @@
               </a:spcBef>
             </a:pPr>
             <a:r>
-              <a:rPr sz="780">
+              <a:rPr sz="800" b="1">
+                <a:solidFill>
+                  <a:srgbClr val="F5F3ED"/>
+                </a:solidFill>
+                <a:latin typeface="Segoe UI"/>
+              </a:rPr>
+              <a:t>Defending Against False-Alarm Alert Fatigue</a:t>
+            </a:r>
+          </a:p>
+          <a:p>
+            <a:pPr>
+              <a:spcBef>
+                <a:spcPts val="200"/>
+              </a:spcBef>
+            </a:pPr>
+            <a:r>
+              <a:rPr sz="740">
                 <a:solidFill>
                   <a:srgbClr val="94A3B8"/>
                 </a:solidFill>
                 <a:latin typeface="Segoe UI"/>
               </a:rPr>
-              <a:t>Enforces 3-date persistence trajectories to distinguish agricultural crop cycles (monsoon greening to harvest) from illegal mining, deforestation, and permanent unauthorized land occupation.</a:t>
+              <a:t>Enforces 3-date MECE persistence trajectories to distinguish agricultural crop cycles (monsoon greening to harvest senescence) from permanent ground-cover conversion, protecting command staff from false alarms while monitoring water reservoir expansion.</a:t>
             </a:r>
           </a:p>
         </p:txBody>
@@ -9150,8 +10972,8 @@
         </p:nvSpPr>
         <p:spPr>
           <a:xfrm>
-            <a:off x="594360" y="5577840"/>
-            <a:ext cx="11002975" cy="868680"/>
+            <a:off x="594360" y="5833872"/>
+            <a:ext cx="11002975" cy="566928"/>
           </a:xfrm>
           <a:prstGeom prst="roundRect">
             <a:avLst/>
@@ -9195,8 +11017,8 @@
         </p:nvSpPr>
         <p:spPr>
           <a:xfrm>
-            <a:off x="731520" y="5669280"/>
-            <a:ext cx="10728655" cy="685800"/>
+            <a:off x="731520" y="5888736"/>
+            <a:ext cx="10728655" cy="457200"/>
           </a:xfrm>
           <a:prstGeom prst="rect">
             <a:avLst/>
@@ -9211,56 +11033,56 @@
           <a:p>
             <a:pPr algn="ctr"/>
             <a:r>
-              <a:rPr sz="850" b="1">
+              <a:rPr sz="800" b="1">
                 <a:solidFill>
                   <a:srgbClr val="C5A869"/>
                 </a:solidFill>
                 <a:latin typeface="Consolas"/>
               </a:rPr>
-              <a:t>THREE SOVEREIGN DEFENSE PRINCIPLES:   </a:t>
-            </a:r>
-            <a:r>
-              <a:rPr sz="800">
+              <a:t>CORE DEFENSE PRINCIPLES:   </a:t>
+            </a:r>
+            <a:r>
+              <a:rPr sz="760">
                 <a:solidFill>
                   <a:srgbClr val="F5F3ED"/>
                 </a:solidFill>
                 <a:latin typeface="Segoe UI"/>
               </a:rPr>
-              <a:t>[OFFLINE: Air-gapped on-premises runtime; zero cloud leakage]   </a:t>
-            </a:r>
-            <a:r>
-              <a:rPr sz="800">
+              <a:t>[OFFLINE: Air-gapped on-premises execution]   </a:t>
+            </a:r>
+            <a:r>
+              <a:rPr sz="760">
                 <a:solidFill>
                   <a:srgbClr val="F5F3ED"/>
                 </a:solidFill>
                 <a:latin typeface="Segoe UI"/>
               </a:rPr>
-              <a:t>[SOVEREIGN: Built on open Copernicus standards; zero foreign API lock-in]   </a:t>
-            </a:r>
-            <a:r>
-              <a:rPr sz="800">
+              <a:t>[AUDITABLE: Deterministic physical optics &amp; spectral indices]   </a:t>
+            </a:r>
+            <a:r>
+              <a:rPr sz="760">
                 <a:solidFill>
                   <a:srgbClr val="F5F3ED"/>
                 </a:solidFill>
                 <a:latin typeface="Segoe UI"/>
               </a:rPr>
-              <a:t>[AUDITABLE: Every attribution decision links to deterministic physical optics]   </a:t>
+              <a:t>[CONSERVATIVE: Ambiguous cases routed to REVIEW]   </a:t>
             </a:r>
           </a:p>
           <a:p>
             <a:pPr algn="ctr">
               <a:spcBef>
-                <a:spcPts val="300"/>
+                <a:spcPts val="200"/>
               </a:spcBef>
             </a:pPr>
             <a:r>
-              <a:rPr sz="800" b="1">
-                <a:solidFill>
-                  <a:srgbClr val="4EA8DE"/>
-                </a:solidFill>
-                <a:latin typeface="Consolas"/>
-              </a:rPr>
-              <a:t>WHAT MAKES TERRAE DIFFERENT:  SEARCH (Natural Language) → COMPARE (Sub-Pixel Co-Reg) → EXPLAIN (Spectral Math) → CHALLENGE (Multi-Date) → DECIDE (Honest Verdict)</a:t>
+              <a:rPr sz="950" b="1">
+                <a:solidFill>
+                  <a:srgbClr val="C5A869"/>
+                </a:solidFill>
+                <a:latin typeface="Georgia"/>
+              </a:rPr>
+              <a:t>“The goal is not to make every result positive. The goal is to make the result explainable.”</a:t>
             </a:r>
           </a:p>
         </p:txBody>
@@ -9334,8 +11156,8 @@
         </p:nvSpPr>
         <p:spPr>
           <a:xfrm>
-            <a:off x="594360" y="292608"/>
-            <a:ext cx="11002975" cy="27432"/>
+            <a:off x="594360" y="256032"/>
+            <a:ext cx="11002975" cy="22860"/>
           </a:xfrm>
           <a:prstGeom prst="rect">
             <a:avLst/>
@@ -9377,8 +11199,8 @@
         </p:nvSpPr>
         <p:spPr>
           <a:xfrm>
-            <a:off x="594360" y="347472"/>
-            <a:ext cx="7772400" cy="274320"/>
+            <a:off x="594360" y="301752"/>
+            <a:ext cx="7772400" cy="256032"/>
           </a:xfrm>
           <a:prstGeom prst="rect">
             <a:avLst/>
@@ -9392,7 +11214,7 @@
           <a:lstStyle/>
           <a:p>
             <a:pPr>
-              <a:defRPr sz="850" b="1">
+              <a:defRPr sz="800" b="1">
                 <a:solidFill>
                   <a:srgbClr val="C5A869"/>
                 </a:solidFill>
@@ -9400,7 +11222,7 @@
               </a:defRPr>
             </a:pPr>
             <a:r>
-              <a:t>SMART INDIA HACKATHON 2026 · PS: SIH26227 · THEME: SPACE TECHNOLOGY · MINISTRY OF DEFENCE (MOD) / INDIAN ARMY — DGIS</a:t>
+              <a:t>SMART INDIA HACKATHON 2026 · PS: SIH26227 · SPACE TECHNOLOGY · SOFTWARE · MINISTRY OF DEFENCE / INDIAN ARMY — DGIS</a:t>
             </a:r>
           </a:p>
         </p:txBody>
@@ -9413,8 +11235,8 @@
         </p:nvSpPr>
         <p:spPr>
           <a:xfrm>
-            <a:off x="8412480" y="347472"/>
-            <a:ext cx="3182112" cy="274320"/>
+            <a:off x="8412480" y="301752"/>
+            <a:ext cx="3182112" cy="256032"/>
           </a:xfrm>
           <a:prstGeom prst="rect">
             <a:avLst/>
@@ -9429,16 +11251,16 @@
           <a:p>
             <a:pPr algn="r"/>
             <a:r>
-              <a:rPr sz="850">
+              <a:rPr sz="800">
                 <a:solidFill>
                   <a:srgbClr val="94A3B8"/>
                 </a:solidFill>
                 <a:latin typeface="Consolas"/>
               </a:rPr>
-              <a:t>TEAM: Quantumcrew | </a:t>
-            </a:r>
-            <a:r>
-              <a:rPr sz="850" b="1">
+              <a:t>TEAM: Quantumcrew  |  </a:t>
+            </a:r>
+            <a:r>
+              <a:rPr sz="800" b="1">
                 <a:solidFill>
                   <a:srgbClr val="4EA8DE"/>
                 </a:solidFill>
@@ -9457,8 +11279,8 @@
         </p:nvSpPr>
         <p:spPr>
           <a:xfrm>
-            <a:off x="594360" y="594360"/>
-            <a:ext cx="11002975" cy="594360"/>
+            <a:off x="594360" y="548640"/>
+            <a:ext cx="11002975" cy="566928"/>
           </a:xfrm>
           <a:prstGeom prst="rect">
             <a:avLst/>
@@ -9472,7 +11294,7 @@
           <a:lstStyle/>
           <a:p>
             <a:pPr>
-              <a:defRPr sz="1750" b="1">
+              <a:defRPr sz="1650" b="1">
                 <a:solidFill>
                   <a:srgbClr val="F5F3ED"/>
                 </a:solidFill>
@@ -9480,12 +11302,12 @@
               </a:defRPr>
             </a:pPr>
             <a:r>
-              <a:t>PROOF, RESEARCH &amp; REPRODUCIBILITY</a:t>
+              <a:t>06 — RESEARCH &amp; REFERENCES</a:t>
             </a:r>
           </a:p>
           <a:p>
             <a:pPr>
-              <a:defRPr sz="1000">
+              <a:defRPr sz="950">
                 <a:solidFill>
                   <a:srgbClr val="94A3B8"/>
                 </a:solidFill>
@@ -9493,7 +11315,7 @@
               </a:defRPr>
             </a:pPr>
             <a:r>
-              <a:t>Validated open benchmarks, transparent scientific references, live console access, and team credentials.</a:t>
+              <a:t>EMPIRICAL BENCHMARKS, RESEARCH FOUNDATIONS &amp; PROJECT ACCESS</a:t>
             </a:r>
           </a:p>
         </p:txBody>
@@ -9506,8 +11328,8 @@
         </p:nvSpPr>
         <p:spPr>
           <a:xfrm>
-            <a:off x="594360" y="6537960"/>
-            <a:ext cx="11002975" cy="228600"/>
+            <a:off x="594360" y="6565392"/>
+            <a:ext cx="11002975" cy="201168"/>
           </a:xfrm>
           <a:prstGeom prst="rect">
             <a:avLst/>
@@ -9521,25 +11343,25 @@
           <a:lstStyle/>
           <a:p>
             <a:r>
-              <a:rPr sz="800">
+              <a:rPr sz="780">
                 <a:solidFill>
                   <a:srgbClr val="64748B"/>
                 </a:solidFill>
                 <a:latin typeface="Segoe UI"/>
               </a:rPr>
-              <a:t>GEOAI — Evidence-Based Satellite Investigation Workstation  |  Ministry of Defence (MoD) / Indian Army — DGIS  |  SIH 2026 Submission</a:t>
-            </a:r>
-            <a:r>
-              <a:rPr sz="800">
+              <a:t>TERRAE — Earth Intelligence Satellite Investigation Console  |  Ministry of Defence / Indian Army — DGIS  |  SIH 2026 Submission</a:t>
+            </a:r>
+            <a:r>
+              <a:rPr sz="780">
                 <a:solidFill>
                   <a:srgbClr val="64748B"/>
                 </a:solidFill>
                 <a:latin typeface="Segoe UI"/>
               </a:rPr>
-              <a:t>                                                                    Live Console: </a:t>
-            </a:r>
-            <a:r>
-              <a:rPr sz="800">
+              <a:t>                                                         Live Console: </a:t>
+            </a:r>
+            <a:r>
+              <a:rPr sz="780">
                 <a:solidFill>
                   <a:srgbClr val="4EA8DE"/>
                 </a:solidFill>
@@ -9559,8 +11381,753 @@
         </p:nvSpPr>
         <p:spPr>
           <a:xfrm>
-            <a:off x="594360" y="1234440"/>
-            <a:ext cx="5349240" cy="2194560"/>
+            <a:off x="594360" y="1188720"/>
+            <a:ext cx="3291840" cy="3840480"/>
+          </a:xfrm>
+          <a:prstGeom prst="roundRect">
+            <a:avLst/>
+          </a:prstGeom>
+          <a:solidFill>
+            <a:srgbClr val="111724"/>
+          </a:solidFill>
+          <a:ln w="12700">
+            <a:solidFill>
+              <a:srgbClr val="C5A869"/>
+            </a:solidFill>
+          </a:ln>
+        </p:spPr>
+        <p:style>
+          <a:lnRef idx="1">
+            <a:schemeClr val="accent1"/>
+          </a:lnRef>
+          <a:fillRef idx="3">
+            <a:schemeClr val="accent1"/>
+          </a:fillRef>
+          <a:effectRef idx="2">
+            <a:schemeClr val="accent1"/>
+          </a:effectRef>
+          <a:fontRef idx="minor">
+            <a:schemeClr val="lt1"/>
+          </a:fontRef>
+        </p:style>
+        <p:txBody>
+          <a:bodyPr rtlCol="0" anchor="ctr"/>
+          <a:lstStyle/>
+          <a:p>
+            <a:pPr algn="ctr"/>
+          </a:p>
+        </p:txBody>
+      </p:sp>
+      <p:sp>
+        <p:nvSpPr>
+          <p:cNvPr id="9" name="TextBox 8"/>
+          <p:cNvSpPr txBox="1"/>
+          <p:nvPr/>
+        </p:nvSpPr>
+        <p:spPr>
+          <a:xfrm>
+            <a:off x="731520" y="1298448"/>
+            <a:ext cx="3017520" cy="320040"/>
+          </a:xfrm>
+          <a:prstGeom prst="rect">
+            <a:avLst/>
+          </a:prstGeom>
+          <a:noFill/>
+        </p:spPr>
+        <p:txBody>
+          <a:bodyPr wrap="none" lIns="0" tIns="0" rIns="0" bIns="0">
+            <a:spAutoFit/>
+          </a:bodyPr>
+          <a:lstStyle/>
+          <a:p>
+            <a:pPr>
+              <a:defRPr sz="900" b="1">
+                <a:solidFill>
+                  <a:srgbClr val="C5A869"/>
+                </a:solidFill>
+                <a:latin typeface="Consolas"/>
+              </a:defRPr>
+            </a:pPr>
+            <a:r>
+              <a:t>RESEARCH FOUNDATION FLOW</a:t>
+            </a:r>
+          </a:p>
+        </p:txBody>
+      </p:sp>
+      <p:sp>
+        <p:nvSpPr>
+          <p:cNvPr id="10" name="Rounded Rectangle 9"/>
+          <p:cNvSpPr/>
+          <p:nvPr/>
+        </p:nvSpPr>
+        <p:spPr>
+          <a:xfrm>
+            <a:off x="731520" y="1627632"/>
+            <a:ext cx="3017520" cy="621792"/>
+          </a:xfrm>
+          <a:prstGeom prst="roundRect">
+            <a:avLst/>
+          </a:prstGeom>
+          <a:solidFill>
+            <a:srgbClr val="171F30"/>
+          </a:solidFill>
+          <a:ln w="12700">
+            <a:solidFill>
+              <a:srgbClr val="25324A"/>
+            </a:solidFill>
+          </a:ln>
+        </p:spPr>
+        <p:style>
+          <a:lnRef idx="1">
+            <a:schemeClr val="accent1"/>
+          </a:lnRef>
+          <a:fillRef idx="3">
+            <a:schemeClr val="accent1"/>
+          </a:fillRef>
+          <a:effectRef idx="2">
+            <a:schemeClr val="accent1"/>
+          </a:effectRef>
+          <a:fontRef idx="minor">
+            <a:schemeClr val="lt1"/>
+          </a:fontRef>
+        </p:style>
+        <p:txBody>
+          <a:bodyPr rtlCol="0" anchor="ctr"/>
+          <a:lstStyle/>
+          <a:p>
+            <a:pPr algn="ctr"/>
+          </a:p>
+        </p:txBody>
+      </p:sp>
+      <p:sp>
+        <p:nvSpPr>
+          <p:cNvPr id="11" name="TextBox 10"/>
+          <p:cNvSpPr txBox="1"/>
+          <p:nvPr/>
+        </p:nvSpPr>
+        <p:spPr>
+          <a:xfrm>
+            <a:off x="822960" y="1664208"/>
+            <a:ext cx="2834640" cy="548640"/>
+          </a:xfrm>
+          <a:prstGeom prst="rect">
+            <a:avLst/>
+          </a:prstGeom>
+          <a:noFill/>
+        </p:spPr>
+        <p:txBody>
+          <a:bodyPr wrap="square" lIns="0" tIns="0" rIns="0" bIns="0">
+            <a:spAutoFit/>
+          </a:bodyPr>
+          <a:lstStyle/>
+          <a:p>
+            <a:r>
+              <a:rPr sz="760" b="1">
+                <a:solidFill>
+                  <a:srgbClr val="4EA8DE"/>
+                </a:solidFill>
+                <a:latin typeface="Segoe UI"/>
+              </a:rPr>
+              <a:t>1. RemoteCLIP </a:t>
+            </a:r>
+            <a:r>
+              <a:rPr sz="680">
+                <a:solidFill>
+                  <a:srgbClr val="94A3B8"/>
+                </a:solidFill>
+                <a:latin typeface="Segoe UI"/>
+              </a:rPr>
+              <a:t>(Chen et al., IEEE TGRS 2024)
+</a:t>
+            </a:r>
+          </a:p>
+          <a:p>
+            <a:r>
+              <a:rPr sz="660">
+                <a:solidFill>
+                  <a:srgbClr val="F5F3ED"/>
+                </a:solidFill>
+                <a:latin typeface="Segoe UI"/>
+              </a:rPr>
+              <a:t>Vision-language foundation model tailored for remote sensing semantic search.</a:t>
+            </a:r>
+          </a:p>
+        </p:txBody>
+      </p:sp>
+      <p:sp>
+        <p:nvSpPr>
+          <p:cNvPr id="12" name="Rounded Rectangle 11"/>
+          <p:cNvSpPr/>
+          <p:nvPr/>
+        </p:nvSpPr>
+        <p:spPr>
+          <a:xfrm>
+            <a:off x="731520" y="2304288"/>
+            <a:ext cx="3017520" cy="621792"/>
+          </a:xfrm>
+          <a:prstGeom prst="roundRect">
+            <a:avLst/>
+          </a:prstGeom>
+          <a:solidFill>
+            <a:srgbClr val="171F30"/>
+          </a:solidFill>
+          <a:ln w="12700">
+            <a:solidFill>
+              <a:srgbClr val="25324A"/>
+            </a:solidFill>
+          </a:ln>
+        </p:spPr>
+        <p:style>
+          <a:lnRef idx="1">
+            <a:schemeClr val="accent1"/>
+          </a:lnRef>
+          <a:fillRef idx="3">
+            <a:schemeClr val="accent1"/>
+          </a:fillRef>
+          <a:effectRef idx="2">
+            <a:schemeClr val="accent1"/>
+          </a:effectRef>
+          <a:fontRef idx="minor">
+            <a:schemeClr val="lt1"/>
+          </a:fontRef>
+        </p:style>
+        <p:txBody>
+          <a:bodyPr rtlCol="0" anchor="ctr"/>
+          <a:lstStyle/>
+          <a:p>
+            <a:pPr algn="ctr"/>
+          </a:p>
+        </p:txBody>
+      </p:sp>
+      <p:sp>
+        <p:nvSpPr>
+          <p:cNvPr id="13" name="TextBox 12"/>
+          <p:cNvSpPr txBox="1"/>
+          <p:nvPr/>
+        </p:nvSpPr>
+        <p:spPr>
+          <a:xfrm>
+            <a:off x="822960" y="2340864"/>
+            <a:ext cx="2834640" cy="548640"/>
+          </a:xfrm>
+          <a:prstGeom prst="rect">
+            <a:avLst/>
+          </a:prstGeom>
+          <a:noFill/>
+        </p:spPr>
+        <p:txBody>
+          <a:bodyPr wrap="square" lIns="0" tIns="0" rIns="0" bIns="0">
+            <a:spAutoFit/>
+          </a:bodyPr>
+          <a:lstStyle/>
+          <a:p>
+            <a:r>
+              <a:rPr sz="760" b="1">
+                <a:solidFill>
+                  <a:srgbClr val="52B788"/>
+                </a:solidFill>
+                <a:latin typeface="Segoe UI"/>
+              </a:rPr>
+              <a:t>2. Copernicus Sentinel-2 </a:t>
+            </a:r>
+            <a:r>
+              <a:rPr sz="680">
+                <a:solidFill>
+                  <a:srgbClr val="94A3B8"/>
+                </a:solidFill>
+                <a:latin typeface="Segoe UI"/>
+              </a:rPr>
+              <a:t>(ESA / European Commission)
+</a:t>
+            </a:r>
+          </a:p>
+          <a:p>
+            <a:r>
+              <a:rPr sz="660">
+                <a:solidFill>
+                  <a:srgbClr val="F5F3ED"/>
+                </a:solidFill>
+                <a:latin typeface="Segoe UI"/>
+              </a:rPr>
+              <a:t>Level-2A multispectral surface reflectance products (10m GSD BOA).</a:t>
+            </a:r>
+          </a:p>
+        </p:txBody>
+      </p:sp>
+      <p:sp>
+        <p:nvSpPr>
+          <p:cNvPr id="14" name="Rounded Rectangle 13"/>
+          <p:cNvSpPr/>
+          <p:nvPr/>
+        </p:nvSpPr>
+        <p:spPr>
+          <a:xfrm>
+            <a:off x="731520" y="2980944"/>
+            <a:ext cx="3017520" cy="621792"/>
+          </a:xfrm>
+          <a:prstGeom prst="roundRect">
+            <a:avLst/>
+          </a:prstGeom>
+          <a:solidFill>
+            <a:srgbClr val="171F30"/>
+          </a:solidFill>
+          <a:ln w="12700">
+            <a:solidFill>
+              <a:srgbClr val="25324A"/>
+            </a:solidFill>
+          </a:ln>
+        </p:spPr>
+        <p:style>
+          <a:lnRef idx="1">
+            <a:schemeClr val="accent1"/>
+          </a:lnRef>
+          <a:fillRef idx="3">
+            <a:schemeClr val="accent1"/>
+          </a:fillRef>
+          <a:effectRef idx="2">
+            <a:schemeClr val="accent1"/>
+          </a:effectRef>
+          <a:fontRef idx="minor">
+            <a:schemeClr val="lt1"/>
+          </a:fontRef>
+        </p:style>
+        <p:txBody>
+          <a:bodyPr rtlCol="0" anchor="ctr"/>
+          <a:lstStyle/>
+          <a:p>
+            <a:pPr algn="ctr"/>
+          </a:p>
+        </p:txBody>
+      </p:sp>
+      <p:sp>
+        <p:nvSpPr>
+          <p:cNvPr id="15" name="TextBox 14"/>
+          <p:cNvSpPr txBox="1"/>
+          <p:nvPr/>
+        </p:nvSpPr>
+        <p:spPr>
+          <a:xfrm>
+            <a:off x="822960" y="3017520"/>
+            <a:ext cx="2834640" cy="548640"/>
+          </a:xfrm>
+          <a:prstGeom prst="rect">
+            <a:avLst/>
+          </a:prstGeom>
+          <a:noFill/>
+        </p:spPr>
+        <p:txBody>
+          <a:bodyPr wrap="square" lIns="0" tIns="0" rIns="0" bIns="0">
+            <a:spAutoFit/>
+          </a:bodyPr>
+          <a:lstStyle/>
+          <a:p>
+            <a:r>
+              <a:rPr sz="760" b="1">
+                <a:solidFill>
+                  <a:srgbClr val="C5A869"/>
+                </a:solidFill>
+                <a:latin typeface="Segoe UI"/>
+              </a:rPr>
+              <a:t>3. OSCD Benchmark </a:t>
+            </a:r>
+            <a:r>
+              <a:rPr sz="680">
+                <a:solidFill>
+                  <a:srgbClr val="94A3B8"/>
+                </a:solidFill>
+                <a:latin typeface="Segoe UI"/>
+              </a:rPr>
+              <a:t>(Daudt et al., IEEE IGARSS 2018)
+</a:t>
+            </a:r>
+          </a:p>
+          <a:p>
+            <a:r>
+              <a:rPr sz="660">
+                <a:solidFill>
+                  <a:srgbClr val="F5F3ED"/>
+                </a:solidFill>
+                <a:latin typeface="Segoe UI"/>
+              </a:rPr>
+              <a:t>Onera Satellite Change Detection benchmark ground truth.</a:t>
+            </a:r>
+          </a:p>
+        </p:txBody>
+      </p:sp>
+      <p:sp>
+        <p:nvSpPr>
+          <p:cNvPr id="16" name="Rounded Rectangle 15"/>
+          <p:cNvSpPr/>
+          <p:nvPr/>
+        </p:nvSpPr>
+        <p:spPr>
+          <a:xfrm>
+            <a:off x="731520" y="3657600"/>
+            <a:ext cx="3017520" cy="621792"/>
+          </a:xfrm>
+          <a:prstGeom prst="roundRect">
+            <a:avLst/>
+          </a:prstGeom>
+          <a:solidFill>
+            <a:srgbClr val="171F30"/>
+          </a:solidFill>
+          <a:ln w="12700">
+            <a:solidFill>
+              <a:srgbClr val="25324A"/>
+            </a:solidFill>
+          </a:ln>
+        </p:spPr>
+        <p:style>
+          <a:lnRef idx="1">
+            <a:schemeClr val="accent1"/>
+          </a:lnRef>
+          <a:fillRef idx="3">
+            <a:schemeClr val="accent1"/>
+          </a:fillRef>
+          <a:effectRef idx="2">
+            <a:schemeClr val="accent1"/>
+          </a:effectRef>
+          <a:fontRef idx="minor">
+            <a:schemeClr val="lt1"/>
+          </a:fontRef>
+        </p:style>
+        <p:txBody>
+          <a:bodyPr rtlCol="0" anchor="ctr"/>
+          <a:lstStyle/>
+          <a:p>
+            <a:pPr algn="ctr"/>
+          </a:p>
+        </p:txBody>
+      </p:sp>
+      <p:sp>
+        <p:nvSpPr>
+          <p:cNvPr id="17" name="TextBox 16"/>
+          <p:cNvSpPr txBox="1"/>
+          <p:nvPr/>
+        </p:nvSpPr>
+        <p:spPr>
+          <a:xfrm>
+            <a:off x="822960" y="3694176"/>
+            <a:ext cx="2834640" cy="548640"/>
+          </a:xfrm>
+          <a:prstGeom prst="rect">
+            <a:avLst/>
+          </a:prstGeom>
+          <a:noFill/>
+        </p:spPr>
+        <p:txBody>
+          <a:bodyPr wrap="square" lIns="0" tIns="0" rIns="0" bIns="0">
+            <a:spAutoFit/>
+          </a:bodyPr>
+          <a:lstStyle/>
+          <a:p>
+            <a:r>
+              <a:rPr sz="760" b="1">
+                <a:solidFill>
+                  <a:srgbClr val="C5A869"/>
+                </a:solidFill>
+                <a:latin typeface="Segoe UI"/>
+              </a:rPr>
+              <a:t>4. Physical Index Math </a:t>
+            </a:r>
+            <a:r>
+              <a:rPr sz="680">
+                <a:solidFill>
+                  <a:srgbClr val="94A3B8"/>
+                </a:solidFill>
+                <a:latin typeface="Segoe UI"/>
+              </a:rPr>
+              <a:t>(Rouse et al. / McFeeters)
+</a:t>
+            </a:r>
+          </a:p>
+          <a:p>
+            <a:r>
+              <a:rPr sz="660">
+                <a:solidFill>
+                  <a:srgbClr val="F5F3ED"/>
+                </a:solidFill>
+                <a:latin typeface="Segoe UI"/>
+              </a:rPr>
+              <a:t>NDVI &amp; NDWI normalized band ratios for vegetation &amp; water dynamics.</a:t>
+            </a:r>
+          </a:p>
+        </p:txBody>
+      </p:sp>
+      <p:sp>
+        <p:nvSpPr>
+          <p:cNvPr id="18" name="Rounded Rectangle 17"/>
+          <p:cNvSpPr/>
+          <p:nvPr/>
+        </p:nvSpPr>
+        <p:spPr>
+          <a:xfrm>
+            <a:off x="731520" y="4334256"/>
+            <a:ext cx="3017520" cy="621792"/>
+          </a:xfrm>
+          <a:prstGeom prst="roundRect">
+            <a:avLst/>
+          </a:prstGeom>
+          <a:solidFill>
+            <a:srgbClr val="171F30"/>
+          </a:solidFill>
+          <a:ln w="12700">
+            <a:solidFill>
+              <a:srgbClr val="25324A"/>
+            </a:solidFill>
+          </a:ln>
+        </p:spPr>
+        <p:style>
+          <a:lnRef idx="1">
+            <a:schemeClr val="accent1"/>
+          </a:lnRef>
+          <a:fillRef idx="3">
+            <a:schemeClr val="accent1"/>
+          </a:fillRef>
+          <a:effectRef idx="2">
+            <a:schemeClr val="accent1"/>
+          </a:effectRef>
+          <a:fontRef idx="minor">
+            <a:schemeClr val="lt1"/>
+          </a:fontRef>
+        </p:style>
+        <p:txBody>
+          <a:bodyPr rtlCol="0" anchor="ctr"/>
+          <a:lstStyle/>
+          <a:p>
+            <a:pPr algn="ctr"/>
+          </a:p>
+        </p:txBody>
+      </p:sp>
+      <p:sp>
+        <p:nvSpPr>
+          <p:cNvPr id="19" name="TextBox 18"/>
+          <p:cNvSpPr txBox="1"/>
+          <p:nvPr/>
+        </p:nvSpPr>
+        <p:spPr>
+          <a:xfrm>
+            <a:off x="822960" y="4370832"/>
+            <a:ext cx="2834640" cy="548640"/>
+          </a:xfrm>
+          <a:prstGeom prst="rect">
+            <a:avLst/>
+          </a:prstGeom>
+          <a:noFill/>
+        </p:spPr>
+        <p:txBody>
+          <a:bodyPr wrap="square" lIns="0" tIns="0" rIns="0" bIns="0">
+            <a:spAutoFit/>
+          </a:bodyPr>
+          <a:lstStyle/>
+          <a:p>
+            <a:r>
+              <a:rPr sz="760" b="1">
+                <a:solidFill>
+                  <a:srgbClr val="C5A869"/>
+                </a:solidFill>
+                <a:latin typeface="Segoe UI"/>
+              </a:rPr>
+              <a:t>5. TERRAE Console </a:t>
+            </a:r>
+            <a:r>
+              <a:rPr sz="680">
+                <a:solidFill>
+                  <a:srgbClr val="94A3B8"/>
+                </a:solidFill>
+                <a:latin typeface="Segoe UI"/>
+              </a:rPr>
+              <a:t>(Quantumcrew SIH26227)
+</a:t>
+            </a:r>
+          </a:p>
+          <a:p>
+            <a:r>
+              <a:rPr sz="660">
+                <a:solidFill>
+                  <a:srgbClr val="F5F3ED"/>
+                </a:solidFill>
+                <a:latin typeface="Segoe UI"/>
+              </a:rPr>
+              <a:t>Unified, evidence-based satellite investigation workstation.</a:t>
+            </a:r>
+          </a:p>
+        </p:txBody>
+      </p:sp>
+      <p:sp>
+        <p:nvSpPr>
+          <p:cNvPr id="20" name="Rounded Rectangle 19"/>
+          <p:cNvSpPr/>
+          <p:nvPr/>
+        </p:nvSpPr>
+        <p:spPr>
+          <a:xfrm>
+            <a:off x="3977639" y="1188720"/>
+            <a:ext cx="4160520" cy="3840480"/>
+          </a:xfrm>
+          <a:prstGeom prst="roundRect">
+            <a:avLst/>
+          </a:prstGeom>
+          <a:solidFill>
+            <a:srgbClr val="111724"/>
+          </a:solidFill>
+          <a:ln w="12700">
+            <a:solidFill>
+              <a:srgbClr val="52B788"/>
+            </a:solidFill>
+          </a:ln>
+        </p:spPr>
+        <p:style>
+          <a:lnRef idx="1">
+            <a:schemeClr val="accent1"/>
+          </a:lnRef>
+          <a:fillRef idx="3">
+            <a:schemeClr val="accent1"/>
+          </a:fillRef>
+          <a:effectRef idx="2">
+            <a:schemeClr val="accent1"/>
+          </a:effectRef>
+          <a:fontRef idx="minor">
+            <a:schemeClr val="lt1"/>
+          </a:fontRef>
+        </p:style>
+        <p:txBody>
+          <a:bodyPr rtlCol="0" anchor="ctr"/>
+          <a:lstStyle/>
+          <a:p>
+            <a:pPr algn="ctr"/>
+          </a:p>
+        </p:txBody>
+      </p:sp>
+      <p:sp>
+        <p:nvSpPr>
+          <p:cNvPr id="21" name="TextBox 20"/>
+          <p:cNvSpPr txBox="1"/>
+          <p:nvPr/>
+        </p:nvSpPr>
+        <p:spPr>
+          <a:xfrm>
+            <a:off x="4114800" y="1298448"/>
+            <a:ext cx="3886200" cy="320040"/>
+          </a:xfrm>
+          <a:prstGeom prst="rect">
+            <a:avLst/>
+          </a:prstGeom>
+          <a:noFill/>
+        </p:spPr>
+        <p:txBody>
+          <a:bodyPr wrap="none" lIns="0" tIns="0" rIns="0" bIns="0">
+            <a:spAutoFit/>
+          </a:bodyPr>
+          <a:lstStyle/>
+          <a:p>
+            <a:pPr>
+              <a:defRPr sz="900" b="1">
+                <a:solidFill>
+                  <a:srgbClr val="52B788"/>
+                </a:solidFill>
+                <a:latin typeface="Consolas"/>
+              </a:defRPr>
+            </a:pPr>
+            <a:r>
+              <a:t>VALIDATED EMPIRICAL EVIDENCE</a:t>
+            </a:r>
+          </a:p>
+        </p:txBody>
+      </p:sp>
+      <p:sp>
+        <p:nvSpPr>
+          <p:cNvPr id="22" name="TextBox 21"/>
+          <p:cNvSpPr txBox="1"/>
+          <p:nvPr/>
+        </p:nvSpPr>
+        <p:spPr>
+          <a:xfrm>
+            <a:off x="4114800" y="1645920"/>
+            <a:ext cx="3886200" cy="3291840"/>
+          </a:xfrm>
+          <a:prstGeom prst="rect">
+            <a:avLst/>
+          </a:prstGeom>
+          <a:noFill/>
+        </p:spPr>
+        <p:txBody>
+          <a:bodyPr wrap="square" lIns="0" tIns="0" rIns="0" bIns="0">
+            <a:spAutoFit/>
+          </a:bodyPr>
+          <a:lstStyle/>
+          <a:p>
+            <a:pPr>
+              <a:defRPr sz="800" b="1">
+                <a:solidFill>
+                  <a:srgbClr val="C5A869"/>
+                </a:solidFill>
+                <a:latin typeface="Consolas"/>
+              </a:defRPr>
+            </a:pPr>
+            <a:r>
+              <a:t>1. REAL SENTINEL-2 VALIDATION (MGRS 43RGM · NCR INDIA)</a:t>
+            </a:r>
+          </a:p>
+          <a:p>
+            <a:r>
+              <a:rPr sz="720">
+                <a:solidFill>
+                  <a:srgbClr val="F5F3ED"/>
+                </a:solidFill>
+                <a:latin typeface="Segoe UI"/>
+              </a:rPr>
+              <a:t>• Analysis Tile: 512×512 (262,144 valid pixels, 10m GSD)
+• Observations: T0 (19 May 2023), TMID (06 Oct 2023), T1 (05 Dec 2023)
+• Change Fractions: T0→TMID: 0.7% | TMID→T1: 0.2% | T0→T1: 1.0%
+• Trajectory Distribution: STABLE = 98.75% (258,869 px)
+• Attribution: Built 51.1% | Veg 24.7% | Seasonal 19.9% | Unresolved 3.1%
+• System Verdict: REVIEW (Conservative routing on 1.0% change)</a:t>
+            </a:r>
+          </a:p>
+          <a:p>
+            <a:pPr>
+              <a:spcBef>
+                <a:spcPts val="500"/>
+              </a:spcBef>
+              <a:defRPr sz="800" b="1">
+                <a:solidFill>
+                  <a:srgbClr val="4EA8DE"/>
+                </a:solidFill>
+                <a:latin typeface="Consolas"/>
+              </a:defRPr>
+            </a:pPr>
+            <a:r>
+              <a:t>2. OSCD BENCHMARK — 5-PAIR VALIDATION SUBSET</a:t>
+            </a:r>
+          </a:p>
+          <a:p>
+            <a:r>
+              <a:rPr sz="700">
+                <a:solidFill>
+                  <a:srgbClr val="94A3B8"/>
+                </a:solidFill>
+                <a:latin typeface="Segoe UI"/>
+              </a:rPr>
+              <a:t>• Pairs: Aguas Claras, Beirut, Bordeaux, Cupertino, Mumbai
+• Valid Pixels Evaluated: 3,025,938 valid pixels | Fixed τ = 0.15
+• Micro Aggregate: Precision 57.55% | Recall 9.72% | F1 0.1663 | IoU 0.0907
+• Macro Average: Precision 52.22% | Recall 7.84% | F1 0.1267 | IoU 0.0692
+• Class Imbalance Note: Accuracy (97.90%) is dominated by 97.64% unchanged ground truth. Low recall reflects conservative noise suppression.</a:t>
+            </a:r>
+          </a:p>
+        </p:txBody>
+      </p:sp>
+      <p:sp>
+        <p:nvSpPr>
+          <p:cNvPr id="23" name="Rounded Rectangle 22"/>
+          <p:cNvSpPr/>
+          <p:nvPr/>
+        </p:nvSpPr>
+        <p:spPr>
+          <a:xfrm>
+            <a:off x="8229600" y="1188720"/>
+            <a:ext cx="3459175" cy="3840480"/>
           </a:xfrm>
           <a:prstGeom prst="roundRect">
             <a:avLst/>
@@ -9598,14 +12165,50 @@
       </p:sp>
       <p:sp>
         <p:nvSpPr>
-          <p:cNvPr id="9" name="TextBox 8"/>
+          <p:cNvPr id="24" name="TextBox 23"/>
           <p:cNvSpPr txBox="1"/>
           <p:nvPr/>
         </p:nvSpPr>
         <p:spPr>
           <a:xfrm>
-            <a:off x="731520" y="1344168"/>
-            <a:ext cx="5074920" cy="411480"/>
+            <a:off x="8366760" y="1298448"/>
+            <a:ext cx="3184855" cy="320040"/>
+          </a:xfrm>
+          <a:prstGeom prst="rect">
+            <a:avLst/>
+          </a:prstGeom>
+          <a:noFill/>
+        </p:spPr>
+        <p:txBody>
+          <a:bodyPr wrap="none" lIns="0" tIns="0" rIns="0" bIns="0">
+            <a:spAutoFit/>
+          </a:bodyPr>
+          <a:lstStyle/>
+          <a:p>
+            <a:pPr>
+              <a:defRPr sz="900" b="1">
+                <a:solidFill>
+                  <a:srgbClr val="4EA8DE"/>
+                </a:solidFill>
+                <a:latin typeface="Consolas"/>
+              </a:defRPr>
+            </a:pPr>
+            <a:r>
+              <a:t>PROJECT ACCESS &amp; TEAM DETAILS</a:t>
+            </a:r>
+          </a:p>
+        </p:txBody>
+      </p:sp>
+      <p:sp>
+        <p:nvSpPr>
+          <p:cNvPr id="25" name="TextBox 24"/>
+          <p:cNvSpPr txBox="1"/>
+          <p:nvPr/>
+        </p:nvSpPr>
+        <p:spPr>
+          <a:xfrm>
+            <a:off x="8366760" y="1645920"/>
+            <a:ext cx="3184855" cy="3291840"/>
           </a:xfrm>
           <a:prstGeom prst="rect">
             <a:avLst/>
@@ -9618,76 +12221,23 @@
           </a:bodyPr>
           <a:lstStyle/>
           <a:p>
-            <a:pPr>
-              <a:defRPr sz="950" b="1">
-                <a:solidFill>
-                  <a:srgbClr val="4EA8DE"/>
-                </a:solidFill>
-                <a:latin typeface="Consolas"/>
-              </a:defRPr>
-            </a:pPr>
-            <a:r>
-              <a:t>1. PROTOTYPE PROOF (LIVE PRODUCTION SYSTEM)</a:t>
-            </a:r>
-          </a:p>
-        </p:txBody>
-      </p:sp>
-      <p:pic>
-        <p:nvPicPr>
-          <p:cNvPr id="10" name="Picture 9" descr="PROD_SEARCH_OPTIONS_ALL_1920.png"/>
-          <p:cNvPicPr>
-            <a:picLocks noChangeAspect="1"/>
-          </p:cNvPicPr>
-          <p:nvPr/>
-        </p:nvPicPr>
-        <p:blipFill>
-          <a:blip r:embed="rId3"/>
-          <a:stretch>
-            <a:fillRect/>
-          </a:stretch>
-        </p:blipFill>
-        <p:spPr>
-          <a:xfrm>
-            <a:off x="731520" y="1783080"/>
-            <a:ext cx="2194560" cy="1463040"/>
-          </a:xfrm>
-          <a:prstGeom prst="rect">
-            <a:avLst/>
-          </a:prstGeom>
-        </p:spPr>
-      </p:pic>
-      <p:sp>
-        <p:nvSpPr>
-          <p:cNvPr id="11" name="TextBox 10"/>
-          <p:cNvSpPr txBox="1"/>
-          <p:nvPr/>
-        </p:nvSpPr>
-        <p:spPr>
-          <a:xfrm>
-            <a:off x="3017520" y="1783080"/>
-            <a:ext cx="2880360" cy="1508760"/>
-          </a:xfrm>
-          <a:prstGeom prst="rect">
-            <a:avLst/>
-          </a:prstGeom>
-          <a:noFill/>
-        </p:spPr>
-        <p:txBody>
-          <a:bodyPr wrap="square" lIns="0" tIns="0" rIns="0" bIns="0">
-            <a:spAutoFit/>
-          </a:bodyPr>
-          <a:lstStyle/>
-          <a:p>
-            <a:pPr>
-              <a:defRPr sz="850" b="1">
+            <a:r>
+              <a:rPr sz="730" b="1">
                 <a:solidFill>
                   <a:srgbClr val="F5F3ED"/>
                 </a:solidFill>
                 <a:latin typeface="Segoe UI"/>
-              </a:defRPr>
-            </a:pPr>
-            <a:r>
-              <a:t>TERRAE Console Live Deployment:</a:t>
+              </a:rPr>
+              <a:t>• Team Name: </a:t>
+            </a:r>
+            <a:r>
+              <a:rPr sz="700">
+                <a:solidFill>
+                  <a:srgbClr val="94A3B8"/>
+                </a:solidFill>
+                <a:latin typeface="Segoe UI"/>
+              </a:rPr>
+              <a:t>Quantumcrew</a:t>
             </a:r>
           </a:p>
           <a:p>
@@ -9697,42 +12247,221 @@
               </a:spcBef>
             </a:pPr>
             <a:r>
-              <a:rPr sz="760">
+              <a:rPr sz="730" b="1">
+                <a:solidFill>
+                  <a:srgbClr val="F5F3ED"/>
+                </a:solidFill>
+                <a:latin typeface="Segoe UI"/>
+              </a:rPr>
+              <a:t>• Team ID: </a:t>
+            </a:r>
+            <a:r>
+              <a:rPr sz="700">
                 <a:solidFill>
                   <a:srgbClr val="94A3B8"/>
                 </a:solidFill>
                 <a:latin typeface="Segoe UI"/>
               </a:rPr>
-              <a:t>• Natural Intent Query Input
-• RemoteCLIP Semantic Retrieval
-• Multi-Temporal Differencing
-• Topological Spatial Coherence
-• Analyst Workstation Dossier
-Status: 100% Deployed &amp; Operational</a:t>
-            </a:r>
-          </a:p>
-        </p:txBody>
-      </p:sp>
-      <p:sp>
-        <p:nvSpPr>
-          <p:cNvPr id="12" name="Rounded Rectangle 11"/>
+              <a:t>[Registered Team ID / SIH2026]</a:t>
+            </a:r>
+          </a:p>
+          <a:p>
+            <a:pPr>
+              <a:spcBef>
+                <a:spcPts val="200"/>
+              </a:spcBef>
+            </a:pPr>
+            <a:r>
+              <a:rPr sz="730" b="1">
+                <a:solidFill>
+                  <a:srgbClr val="F5F3ED"/>
+                </a:solidFill>
+                <a:latin typeface="Segoe UI"/>
+              </a:rPr>
+              <a:t>• Problem Statement: </a:t>
+            </a:r>
+            <a:r>
+              <a:rPr sz="700">
+                <a:solidFill>
+                  <a:srgbClr val="94A3B8"/>
+                </a:solidFill>
+                <a:latin typeface="Segoe UI"/>
+              </a:rPr>
+              <a:t>SIH26227 (Space Technology)</a:t>
+            </a:r>
+          </a:p>
+          <a:p>
+            <a:pPr>
+              <a:spcBef>
+                <a:spcPts val="200"/>
+              </a:spcBef>
+            </a:pPr>
+            <a:r>
+              <a:rPr sz="730" b="1">
+                <a:solidFill>
+                  <a:srgbClr val="F5F3ED"/>
+                </a:solidFill>
+                <a:latin typeface="Segoe UI"/>
+              </a:rPr>
+              <a:t>• Client Mandate: </a:t>
+            </a:r>
+            <a:r>
+              <a:rPr sz="700">
+                <a:solidFill>
+                  <a:srgbClr val="94A3B8"/>
+                </a:solidFill>
+                <a:latin typeface="Segoe UI"/>
+              </a:rPr>
+              <a:t>Ministry of Defence / Indian Army — DGIS</a:t>
+            </a:r>
+          </a:p>
+          <a:p>
+            <a:pPr>
+              <a:spcBef>
+                <a:spcPts val="200"/>
+              </a:spcBef>
+            </a:pPr>
+            <a:r>
+              <a:rPr sz="730" b="1">
+                <a:solidFill>
+                  <a:srgbClr val="F5F3ED"/>
+                </a:solidFill>
+                <a:latin typeface="Segoe UI"/>
+              </a:rPr>
+              <a:t>• Category: </a:t>
+            </a:r>
+            <a:r>
+              <a:rPr sz="700">
+                <a:solidFill>
+                  <a:srgbClr val="94A3B8"/>
+                </a:solidFill>
+                <a:latin typeface="Segoe UI"/>
+              </a:rPr>
+              <a:t>Software</a:t>
+            </a:r>
+          </a:p>
+          <a:p>
+            <a:pPr>
+              <a:spcBef>
+                <a:spcPts val="200"/>
+              </a:spcBef>
+            </a:pPr>
+            <a:r>
+              <a:rPr sz="730" b="1">
+                <a:solidFill>
+                  <a:srgbClr val="F5F3ED"/>
+                </a:solidFill>
+                <a:latin typeface="Segoe UI"/>
+              </a:rPr>
+              <a:t>• Live Web Console: </a:t>
+            </a:r>
+            <a:r>
+              <a:rPr sz="700">
+                <a:solidFill>
+                  <a:srgbClr val="4EA8DE"/>
+                </a:solidFill>
+                <a:latin typeface="Consolas"/>
+              </a:rPr>
+              <a:t>terrae-geospatial-intelligence.vercel.app</a:t>
+            </a:r>
+          </a:p>
+          <a:p>
+            <a:pPr>
+              <a:spcBef>
+                <a:spcPts val="200"/>
+              </a:spcBef>
+            </a:pPr>
+            <a:r>
+              <a:rPr sz="730" b="1">
+                <a:solidFill>
+                  <a:srgbClr val="F5F3ED"/>
+                </a:solidFill>
+                <a:latin typeface="Segoe UI"/>
+              </a:rPr>
+              <a:t>• GitHub Repository: </a:t>
+            </a:r>
+            <a:r>
+              <a:rPr sz="700">
+                <a:solidFill>
+                  <a:srgbClr val="4EA8DE"/>
+                </a:solidFill>
+                <a:latin typeface="Consolas"/>
+              </a:rPr>
+              <a:t>github.com/PhantomCipher13/terrae-geospatial-intelligence</a:t>
+            </a:r>
+          </a:p>
+          <a:p>
+            <a:pPr>
+              <a:spcBef>
+                <a:spcPts val="200"/>
+              </a:spcBef>
+            </a:pPr>
+            <a:r>
+              <a:rPr sz="730" b="1">
+                <a:solidFill>
+                  <a:srgbClr val="F5F3ED"/>
+                </a:solidFill>
+                <a:latin typeface="Segoe UI"/>
+              </a:rPr>
+              <a:t>• Technical Report: </a:t>
+            </a:r>
+            <a:r>
+              <a:rPr sz="700">
+                <a:solidFill>
+                  <a:srgbClr val="94A3B8"/>
+                </a:solidFill>
+                <a:latin typeface="Consolas"/>
+              </a:rPr>
+              <a:t>REPORT.md (Full 6-Part Scientific Dossier)</a:t>
+            </a:r>
+          </a:p>
+          <a:p>
+            <a:pPr>
+              <a:spcBef>
+                <a:spcPts val="200"/>
+              </a:spcBef>
+            </a:pPr>
+            <a:r>
+              <a:rPr sz="730" b="1">
+                <a:solidFill>
+                  <a:srgbClr val="F5F3ED"/>
+                </a:solidFill>
+                <a:latin typeface="Segoe UI"/>
+              </a:rPr>
+              <a:t>• Automated Tests: </a:t>
+            </a:r>
+            <a:r>
+              <a:rPr sz="700">
+                <a:solidFill>
+                  <a:srgbClr val="94A3B8"/>
+                </a:solidFill>
+                <a:latin typeface="Consolas"/>
+              </a:rPr>
+              <a:t>135 / 135 Tests Passing (pytest)</a:t>
+            </a:r>
+          </a:p>
+        </p:txBody>
+      </p:sp>
+      <p:sp>
+        <p:nvSpPr>
+          <p:cNvPr id="26" name="Rounded Rectangle 25"/>
           <p:cNvSpPr/>
           <p:nvPr/>
         </p:nvSpPr>
         <p:spPr>
           <a:xfrm>
-            <a:off x="6245352" y="1234440"/>
-            <a:ext cx="5349240" cy="2194560"/>
+            <a:off x="594360" y="5120640"/>
+            <a:ext cx="11002975" cy="777240"/>
           </a:xfrm>
           <a:prstGeom prst="roundRect">
             <a:avLst/>
           </a:prstGeom>
           <a:solidFill>
-            <a:srgbClr val="111724"/>
+            <a:srgbClr val="171F30"/>
           </a:solidFill>
           <a:ln w="12700">
             <a:solidFill>
-              <a:srgbClr val="52B788"/>
+              <a:srgbClr val="25324A"/>
             </a:solidFill>
           </a:ln>
         </p:spPr>
@@ -9760,14 +12489,14 @@
       </p:sp>
       <p:sp>
         <p:nvSpPr>
-          <p:cNvPr id="13" name="TextBox 12"/>
+          <p:cNvPr id="27" name="TextBox 26"/>
           <p:cNvSpPr txBox="1"/>
           <p:nvPr/>
         </p:nvSpPr>
         <p:spPr>
           <a:xfrm>
-            <a:off x="6400800" y="1344168"/>
-            <a:ext cx="5074920" cy="411480"/>
+            <a:off x="731520" y="5175504"/>
+            <a:ext cx="10728655" cy="667512"/>
           </a:xfrm>
           <a:prstGeom prst="rect">
             <a:avLst/>
@@ -9781,547 +12510,40 @@
           <a:lstStyle/>
           <a:p>
             <a:pPr>
-              <a:defRPr sz="950" b="1">
-                <a:solidFill>
-                  <a:srgbClr val="52B788"/>
+              <a:defRPr sz="750" b="1">
+                <a:solidFill>
+                  <a:srgbClr val="C5A869"/>
                 </a:solidFill>
                 <a:latin typeface="Consolas"/>
               </a:defRPr>
             </a:pPr>
             <a:r>
-              <a:t>2. VALIDATION PROOF (EMPIRICAL DATASETS)</a:t>
-            </a:r>
-          </a:p>
-        </p:txBody>
-      </p:sp>
-      <p:pic>
-        <p:nvPicPr>
-          <p:cNvPr id="14" name="Picture 13" descr="PROD_08_VALIDATION_1920.png"/>
-          <p:cNvPicPr>
-            <a:picLocks noChangeAspect="1"/>
-          </p:cNvPicPr>
-          <p:nvPr/>
-        </p:nvPicPr>
-        <p:blipFill>
-          <a:blip r:embed="rId4"/>
-          <a:stretch>
-            <a:fillRect/>
-          </a:stretch>
-        </p:blipFill>
-        <p:spPr>
-          <a:xfrm>
-            <a:off x="6400800" y="1783080"/>
-            <a:ext cx="2194560" cy="1463040"/>
-          </a:xfrm>
-          <a:prstGeom prst="rect">
-            <a:avLst/>
-          </a:prstGeom>
-        </p:spPr>
-      </p:pic>
-      <p:sp>
-        <p:nvSpPr>
-          <p:cNvPr id="15" name="TextBox 14"/>
-          <p:cNvSpPr txBox="1"/>
-          <p:nvPr/>
-        </p:nvSpPr>
-        <p:spPr>
-          <a:xfrm>
-            <a:off x="8686800" y="1783080"/>
-            <a:ext cx="2880360" cy="1508760"/>
-          </a:xfrm>
-          <a:prstGeom prst="rect">
-            <a:avLst/>
-          </a:prstGeom>
-          <a:noFill/>
-        </p:spPr>
-        <p:txBody>
-          <a:bodyPr wrap="square" lIns="0" tIns="0" rIns="0" bIns="0">
-            <a:spAutoFit/>
-          </a:bodyPr>
-          <a:lstStyle/>
-          <a:p>
-            <a:pPr>
-              <a:defRPr sz="850" b="1">
-                <a:solidFill>
-                  <a:srgbClr val="F5F3ED"/>
-                </a:solidFill>
-                <a:latin typeface="Segoe UI"/>
-              </a:defRPr>
-            </a:pPr>
-            <a:r>
-              <a:t>OSCD 5-Pair Benchmark Subset:</a:t>
-            </a:r>
-          </a:p>
-          <a:p>
-            <a:pPr>
-              <a:spcBef>
-                <a:spcPts val="200"/>
-              </a:spcBef>
-            </a:pPr>
-            <a:r>
-              <a:rPr sz="760">
+              <a:t>SCIENTIFIC &amp; BENCHMARK REFERENCES:</a:t>
+            </a:r>
+          </a:p>
+          <a:p>
+            <a:r>
+              <a:rPr sz="680">
                 <a:solidFill>
                   <a:srgbClr val="94A3B8"/>
                 </a:solidFill>
-                <a:latin typeface="Consolas"/>
-              </a:rPr>
-              <a:t>• Valid Pixels: 3,025,938
-• Threshold: Fixed τ = 0.15
-• Macro Accuracy: 97.90%
-• Micro Precision: 57.55%
-• Micro Recall: 9.72%
-(Strict False-Alarm Suppression)</a:t>
-            </a:r>
-          </a:p>
-        </p:txBody>
-      </p:sp>
-      <p:sp>
-        <p:nvSpPr>
-          <p:cNvPr id="16" name="Rounded Rectangle 15"/>
+                <a:latin typeface="Segoe UI"/>
+              </a:rPr>
+              <a:t>[1] Chen et al. (2024), RemoteCLIP: A Vision-Language Foundation Model for Remote Sensing, IEEE TGRS.  [2] European Space Agency (ESA), Copernicus Sentinel-2 MSI Level-2A ATBD.  [3] Daudt et al. (2018), Urban Change Detection for Multispectral Earth Observation, IEEE IGARSS (OSCD Benchmark).  [4] Rouse et al. (1974), Monitoring Vegetation Systems with ERTS, NASA SP-351 (NDVI).  [5] McFeeters (1996), Use of NDWI in Delineation of Open Water Features, Int. J. Remote Sens.</a:t>
+            </a:r>
+          </a:p>
+        </p:txBody>
+      </p:sp>
+      <p:sp>
+        <p:nvSpPr>
+          <p:cNvPr id="28" name="Rounded Rectangle 27"/>
           <p:cNvSpPr/>
           <p:nvPr/>
         </p:nvSpPr>
         <p:spPr>
           <a:xfrm>
-            <a:off x="594360" y="3611880"/>
-            <a:ext cx="5349240" cy="2194560"/>
-          </a:xfrm>
-          <a:prstGeom prst="roundRect">
-            <a:avLst/>
-          </a:prstGeom>
-          <a:solidFill>
-            <a:srgbClr val="111724"/>
-          </a:solidFill>
-          <a:ln w="12700">
-            <a:solidFill>
-              <a:srgbClr val="C5A869"/>
-            </a:solidFill>
-          </a:ln>
-        </p:spPr>
-        <p:style>
-          <a:lnRef idx="1">
-            <a:schemeClr val="accent1"/>
-          </a:lnRef>
-          <a:fillRef idx="3">
-            <a:schemeClr val="accent1"/>
-          </a:fillRef>
-          <a:effectRef idx="2">
-            <a:schemeClr val="accent1"/>
-          </a:effectRef>
-          <a:fontRef idx="minor">
-            <a:schemeClr val="lt1"/>
-          </a:fontRef>
-        </p:style>
-        <p:txBody>
-          <a:bodyPr rtlCol="0" anchor="ctr"/>
-          <a:lstStyle/>
-          <a:p>
-            <a:pPr algn="ctr"/>
-          </a:p>
-        </p:txBody>
-      </p:sp>
-      <p:sp>
-        <p:nvSpPr>
-          <p:cNvPr id="17" name="TextBox 16"/>
-          <p:cNvSpPr txBox="1"/>
-          <p:nvPr/>
-        </p:nvSpPr>
-        <p:spPr>
-          <a:xfrm>
-            <a:off x="731520" y="3721608"/>
-            <a:ext cx="5074920" cy="1975104"/>
-          </a:xfrm>
-          <a:prstGeom prst="rect">
-            <a:avLst/>
-          </a:prstGeom>
-          <a:noFill/>
-        </p:spPr>
-        <p:txBody>
-          <a:bodyPr wrap="square" lIns="0" tIns="0" rIns="0" bIns="0">
-            <a:spAutoFit/>
-          </a:bodyPr>
-          <a:lstStyle/>
-          <a:p>
-            <a:pPr>
-              <a:defRPr sz="950" b="1">
-                <a:solidFill>
-                  <a:srgbClr val="C5A869"/>
-                </a:solidFill>
-                <a:latin typeface="Consolas"/>
-              </a:defRPr>
-            </a:pPr>
-            <a:r>
-              <a:t>3. RESEARCH FOUNDATION &amp; PEER REFERENCES</a:t>
-            </a:r>
-          </a:p>
-          <a:p>
-            <a:pPr>
-              <a:spcBef>
-                <a:spcPts val="200"/>
-              </a:spcBef>
-            </a:pPr>
-            <a:r>
-              <a:rPr sz="800" b="1">
-                <a:solidFill>
-                  <a:srgbClr val="F5F3ED"/>
-                </a:solidFill>
-                <a:latin typeface="Segoe UI"/>
-              </a:rPr>
-              <a:t>• RemoteCLIP (Sun et al., IEEE TGRS 2023): </a:t>
-            </a:r>
-            <a:r>
-              <a:rPr sz="750">
-                <a:solidFill>
-                  <a:srgbClr val="94A3B8"/>
-                </a:solidFill>
-                <a:latin typeface="Segoe UI"/>
-              </a:rPr>
-              <a:t>Vision-language foundation model for remote sensing retrieval.</a:t>
-            </a:r>
-          </a:p>
-          <a:p>
-            <a:pPr>
-              <a:spcBef>
-                <a:spcPts val="200"/>
-              </a:spcBef>
-            </a:pPr>
-            <a:r>
-              <a:rPr sz="800" b="1">
-                <a:solidFill>
-                  <a:srgbClr val="F5F3ED"/>
-                </a:solidFill>
-                <a:latin typeface="Segoe UI"/>
-              </a:rPr>
-              <a:t>• Copernicus Sentinel-2 (ESA / European Commission): </a:t>
-            </a:r>
-            <a:r>
-              <a:rPr sz="750">
-                <a:solidFill>
-                  <a:srgbClr val="94A3B8"/>
-                </a:solidFill>
-                <a:latin typeface="Segoe UI"/>
-              </a:rPr>
-              <a:t>Level-2A multispectral optical constellation (10m GSD BOA).</a:t>
-            </a:r>
-          </a:p>
-          <a:p>
-            <a:pPr>
-              <a:spcBef>
-                <a:spcPts val="200"/>
-              </a:spcBef>
-            </a:pPr>
-            <a:r>
-              <a:rPr sz="800" b="1">
-                <a:solidFill>
-                  <a:srgbClr val="F5F3ED"/>
-                </a:solidFill>
-                <a:latin typeface="Segoe UI"/>
-              </a:rPr>
-              <a:t>• OSCD Benchmark (Caye Daudt et al., IEEE 2018): </a:t>
-            </a:r>
-            <a:r>
-              <a:rPr sz="750">
-                <a:solidFill>
-                  <a:srgbClr val="94A3B8"/>
-                </a:solidFill>
-                <a:latin typeface="Segoe UI"/>
-              </a:rPr>
-              <a:t>Onera Satellite Change Detection dataset for urban/rural change.</a:t>
-            </a:r>
-          </a:p>
-          <a:p>
-            <a:pPr>
-              <a:spcBef>
-                <a:spcPts val="200"/>
-              </a:spcBef>
-            </a:pPr>
-            <a:r>
-              <a:rPr sz="800" b="1">
-                <a:solidFill>
-                  <a:srgbClr val="F5F3ED"/>
-                </a:solidFill>
-                <a:latin typeface="Segoe UI"/>
-              </a:rPr>
-              <a:t>• Physical Index Math (Rouse et al. / McFeeters): </a:t>
-            </a:r>
-            <a:r>
-              <a:rPr sz="750">
-                <a:solidFill>
-                  <a:srgbClr val="94A3B8"/>
-                </a:solidFill>
-                <a:latin typeface="Segoe UI"/>
-              </a:rPr>
-              <a:t>NDVI and NDWI deterministic normalized spectral differencing.</a:t>
-            </a:r>
-          </a:p>
-        </p:txBody>
-      </p:sp>
-      <p:sp>
-        <p:nvSpPr>
-          <p:cNvPr id="18" name="Rounded Rectangle 17"/>
-          <p:cNvSpPr/>
-          <p:nvPr/>
-        </p:nvSpPr>
-        <p:spPr>
-          <a:xfrm>
-            <a:off x="6245352" y="3611880"/>
-            <a:ext cx="5349240" cy="2194560"/>
-          </a:xfrm>
-          <a:prstGeom prst="roundRect">
-            <a:avLst/>
-          </a:prstGeom>
-          <a:solidFill>
-            <a:srgbClr val="111724"/>
-          </a:solidFill>
-          <a:ln w="12700">
-            <a:solidFill>
-              <a:srgbClr val="4EA8DE"/>
-            </a:solidFill>
-          </a:ln>
-        </p:spPr>
-        <p:style>
-          <a:lnRef idx="1">
-            <a:schemeClr val="accent1"/>
-          </a:lnRef>
-          <a:fillRef idx="3">
-            <a:schemeClr val="accent1"/>
-          </a:fillRef>
-          <a:effectRef idx="2">
-            <a:schemeClr val="accent1"/>
-          </a:effectRef>
-          <a:fontRef idx="minor">
-            <a:schemeClr val="lt1"/>
-          </a:fontRef>
-        </p:style>
-        <p:txBody>
-          <a:bodyPr rtlCol="0" anchor="ctr"/>
-          <a:lstStyle/>
-          <a:p>
-            <a:pPr algn="ctr"/>
-          </a:p>
-        </p:txBody>
-      </p:sp>
-      <p:sp>
-        <p:nvSpPr>
-          <p:cNvPr id="19" name="TextBox 18"/>
-          <p:cNvSpPr txBox="1"/>
-          <p:nvPr/>
-        </p:nvSpPr>
-        <p:spPr>
-          <a:xfrm>
-            <a:off x="6400800" y="3721608"/>
-            <a:ext cx="5074920" cy="1975104"/>
-          </a:xfrm>
-          <a:prstGeom prst="rect">
-            <a:avLst/>
-          </a:prstGeom>
-          <a:noFill/>
-        </p:spPr>
-        <p:txBody>
-          <a:bodyPr wrap="square" lIns="0" tIns="0" rIns="0" bIns="0">
-            <a:spAutoFit/>
-          </a:bodyPr>
-          <a:lstStyle/>
-          <a:p>
-            <a:pPr>
-              <a:defRPr sz="950" b="1">
-                <a:solidFill>
-                  <a:srgbClr val="4EA8DE"/>
-                </a:solidFill>
-                <a:latin typeface="Consolas"/>
-              </a:defRPr>
-            </a:pPr>
-            <a:r>
-              <a:t>4. PROJECT ACCESS &amp; TEAM CREDENTIALS</a:t>
-            </a:r>
-          </a:p>
-          <a:p>
-            <a:pPr>
-              <a:spcBef>
-                <a:spcPts val="100"/>
-              </a:spcBef>
-            </a:pPr>
-            <a:r>
-              <a:rPr sz="780" b="1">
-                <a:solidFill>
-                  <a:srgbClr val="F5F3ED"/>
-                </a:solidFill>
-                <a:latin typeface="Segoe UI"/>
-              </a:rPr>
-              <a:t>• Team Name: </a:t>
-            </a:r>
-            <a:r>
-              <a:rPr sz="750">
-                <a:solidFill>
-                  <a:srgbClr val="94A3B8"/>
-                </a:solidFill>
-                <a:latin typeface="Segoe UI"/>
-              </a:rPr>
-              <a:t>Quantumcrew</a:t>
-            </a:r>
-          </a:p>
-          <a:p>
-            <a:pPr>
-              <a:spcBef>
-                <a:spcPts val="100"/>
-              </a:spcBef>
-            </a:pPr>
-            <a:r>
-              <a:rPr sz="780" b="1">
-                <a:solidFill>
-                  <a:srgbClr val="F5F3ED"/>
-                </a:solidFill>
-                <a:latin typeface="Segoe UI"/>
-              </a:rPr>
-              <a:t>• Team ID: </a:t>
-            </a:r>
-            <a:r>
-              <a:rPr sz="750">
-                <a:solidFill>
-                  <a:srgbClr val="94A3B8"/>
-                </a:solidFill>
-                <a:latin typeface="Segoe UI"/>
-              </a:rPr>
-              <a:t>[Registered Team ID / SIH2026]</a:t>
-            </a:r>
-          </a:p>
-          <a:p>
-            <a:pPr>
-              <a:spcBef>
-                <a:spcPts val="100"/>
-              </a:spcBef>
-            </a:pPr>
-            <a:r>
-              <a:rPr sz="780" b="1">
-                <a:solidFill>
-                  <a:srgbClr val="F5F3ED"/>
-                </a:solidFill>
-                <a:latin typeface="Segoe UI"/>
-              </a:rPr>
-              <a:t>• Problem Statement: </a:t>
-            </a:r>
-            <a:r>
-              <a:rPr sz="750">
-                <a:solidFill>
-                  <a:srgbClr val="94A3B8"/>
-                </a:solidFill>
-                <a:latin typeface="Segoe UI"/>
-              </a:rPr>
-              <a:t>SIH26227 (Space Technology)</a:t>
-            </a:r>
-          </a:p>
-          <a:p>
-            <a:pPr>
-              <a:spcBef>
-                <a:spcPts val="100"/>
-              </a:spcBef>
-            </a:pPr>
-            <a:r>
-              <a:rPr sz="780" b="1">
-                <a:solidFill>
-                  <a:srgbClr val="F5F3ED"/>
-                </a:solidFill>
-                <a:latin typeface="Segoe UI"/>
-              </a:rPr>
-              <a:t>• Client Mandate: </a:t>
-            </a:r>
-            <a:r>
-              <a:rPr sz="750">
-                <a:solidFill>
-                  <a:srgbClr val="94A3B8"/>
-                </a:solidFill>
-                <a:latin typeface="Segoe UI"/>
-              </a:rPr>
-              <a:t>Ministry of Defence (MoD) / Indian Army — DGIS</a:t>
-            </a:r>
-          </a:p>
-          <a:p>
-            <a:pPr>
-              <a:spcBef>
-                <a:spcPts val="100"/>
-              </a:spcBef>
-            </a:pPr>
-            <a:r>
-              <a:rPr sz="780" b="1">
-                <a:solidFill>
-                  <a:srgbClr val="F5F3ED"/>
-                </a:solidFill>
-                <a:latin typeface="Segoe UI"/>
-              </a:rPr>
-              <a:t>• GitHub Source: </a:t>
-            </a:r>
-            <a:r>
-              <a:rPr sz="750">
-                <a:solidFill>
-                  <a:srgbClr val="4EA8DE"/>
-                </a:solidFill>
-                <a:latin typeface="Consolas"/>
-              </a:rPr>
-              <a:t>github.com/PhantomCipher13/terrae-geospatial-intelligence</a:t>
-            </a:r>
-          </a:p>
-          <a:p>
-            <a:pPr>
-              <a:spcBef>
-                <a:spcPts val="100"/>
-              </a:spcBef>
-            </a:pPr>
-            <a:r>
-              <a:rPr sz="780" b="1">
-                <a:solidFill>
-                  <a:srgbClr val="F5F3ED"/>
-                </a:solidFill>
-                <a:latin typeface="Segoe UI"/>
-              </a:rPr>
-              <a:t>• Live Web Console: </a:t>
-            </a:r>
-            <a:r>
-              <a:rPr sz="750">
-                <a:solidFill>
-                  <a:srgbClr val="4EA8DE"/>
-                </a:solidFill>
-                <a:latin typeface="Consolas"/>
-              </a:rPr>
-              <a:t>terrae-geospatial-intelligence.vercel.app</a:t>
-            </a:r>
-          </a:p>
-          <a:p>
-            <a:pPr>
-              <a:spcBef>
-                <a:spcPts val="100"/>
-              </a:spcBef>
-            </a:pPr>
-            <a:r>
-              <a:rPr sz="780" b="1">
-                <a:solidFill>
-                  <a:srgbClr val="F5F3ED"/>
-                </a:solidFill>
-                <a:latin typeface="Segoe UI"/>
-              </a:rPr>
-              <a:t>• Technical Report: </a:t>
-            </a:r>
-            <a:r>
-              <a:rPr sz="750">
-                <a:solidFill>
-                  <a:srgbClr val="94A3B8"/>
-                </a:solidFill>
-                <a:latin typeface="Consolas"/>
-              </a:rPr>
-              <a:t>REPORT.md (Complete SIH 6-Part Documentation)</a:t>
-            </a:r>
-          </a:p>
-        </p:txBody>
-      </p:sp>
-      <p:sp>
-        <p:nvSpPr>
-          <p:cNvPr id="20" name="Rounded Rectangle 19"/>
-          <p:cNvSpPr/>
-          <p:nvPr/>
-        </p:nvSpPr>
-        <p:spPr>
-          <a:xfrm>
-            <a:off x="594360" y="5943600"/>
-            <a:ext cx="11002975" cy="457200"/>
+            <a:off x="594360" y="5961888"/>
+            <a:ext cx="11002975" cy="420624"/>
           </a:xfrm>
           <a:prstGeom prst="roundRect">
             <a:avLst/>
@@ -10359,14 +12581,14 @@
       </p:sp>
       <p:sp>
         <p:nvSpPr>
-          <p:cNvPr id="21" name="TextBox 20"/>
+          <p:cNvPr id="29" name="TextBox 28"/>
           <p:cNvSpPr txBox="1"/>
           <p:nvPr/>
         </p:nvSpPr>
         <p:spPr>
           <a:xfrm>
-            <a:off x="731520" y="5989320"/>
-            <a:ext cx="10728655" cy="320040"/>
+            <a:off x="731520" y="5998464"/>
+            <a:ext cx="10728655" cy="347472"/>
           </a:xfrm>
           <a:prstGeom prst="rect">
             <a:avLst/>
@@ -10381,7 +12603,7 @@
           <a:p>
             <a:pPr algn="ctr"/>
             <a:r>
-              <a:rPr sz="1200" b="1">
+              <a:rPr sz="1150" b="1">
                 <a:solidFill>
                   <a:srgbClr val="C5A869"/>
                 </a:solidFill>
